--- a/AI_Mental_Health_Presentation.pptx
+++ b/AI_Mental_Health_Presentation.pptx
@@ -2,15 +2,25 @@
 <file path=ppt/presentation.xml><?xml version="1.0" encoding="utf-8"?>
 <p:presentation xmlns:a="http://schemas.openxmlformats.org/drawingml/2006/main" xmlns:r="http://schemas.openxmlformats.org/officeDocument/2006/relationships" xmlns:p="http://schemas.openxmlformats.org/presentationml/2006/main" saveSubsetFonts="1" autoCompressPictures="0">
   <p:sldMasterIdLst>
-    <p:sldMasterId id="2147483648" r:id="rId1"/>
+    <p:sldMasterId id="2147483660" r:id="rId1"/>
   </p:sldMasterIdLst>
   <p:sldIdLst>
-    <p:sldId id="256" r:id="rId7"/>
-    <p:sldId id="257" r:id="rId8"/>
-    <p:sldId id="258" r:id="rId9"/>
-    <p:sldId id="259" r:id="rId10"/>
+    <p:sldId id="256" r:id="rId2"/>
+    <p:sldId id="257" r:id="rId3"/>
+    <p:sldId id="258" r:id="rId4"/>
+    <p:sldId id="259" r:id="rId5"/>
+    <p:sldId id="260" r:id="rId6"/>
+    <p:sldId id="261" r:id="rId7"/>
+    <p:sldId id="262" r:id="rId8"/>
+    <p:sldId id="263" r:id="rId9"/>
+    <p:sldId id="264" r:id="rId10"/>
+    <p:sldId id="265" r:id="rId11"/>
+    <p:sldId id="266" r:id="rId12"/>
+    <p:sldId id="267" r:id="rId13"/>
+    <p:sldId id="268" r:id="rId14"/>
+    <p:sldId id="269" r:id="rId15"/>
   </p:sldIdLst>
-  <p:sldSz cx="12191695" cy="6858000" type="screen4x3"/>
+  <p:sldSz cx="12192000" cy="6858000"/>
   <p:notesSz cx="6858000" cy="9144000"/>
   <p:defaultTextStyle>
     <a:defPPr>
@@ -107,11 +117,27 @@
       </a:defRPr>
     </a:lvl9pPr>
   </p:defaultTextStyle>
+  <p:extLst>
+    <p:ext uri="{EFAFB233-063F-42B5-8137-9DF3F51BA10A}">
+      <p15:sldGuideLst xmlns:p15="http://schemas.microsoft.com/office/powerpoint/2012/main">
+        <p15:guide id="1" orient="horz" pos="2160">
+          <p15:clr>
+            <a:srgbClr val="A4A3A4"/>
+          </p15:clr>
+        </p15:guide>
+        <p15:guide id="2" pos="2880">
+          <p15:clr>
+            <a:srgbClr val="A4A3A4"/>
+          </p15:clr>
+        </p15:guide>
+      </p15:sldGuideLst>
+    </p:ext>
+  </p:extLst>
 </p:presentation>
 </file>
 
 <file path=ppt/slideLayouts/slideLayout1.xml><?xml version="1.0" encoding="utf-8"?>
-<p:sldLayout xmlns:a="http://schemas.openxmlformats.org/drawingml/2006/main" xmlns:r="http://schemas.openxmlformats.org/officeDocument/2006/relationships" xmlns:p="http://schemas.openxmlformats.org/presentationml/2006/main" type="title" preserve="1">
+<p:sldLayout xmlns:a="http://schemas.openxmlformats.org/drawingml/2006/main" xmlns:r="http://schemas.openxmlformats.org/officeDocument/2006/relationships" xmlns:p="http://schemas.openxmlformats.org/presentationml/2006/main" showMasterSp="0" type="title" preserve="1">
   <p:cSld name="Title Slide">
     <p:spTree>
       <p:nvGrpSpPr>
@@ -127,6 +153,143 @@
           <a:chExt cx="0" cy="0"/>
         </a:xfrm>
       </p:grpSpPr>
+      <p:grpSp>
+        <p:nvGrpSpPr>
+          <p:cNvPr id="7" name="Group 6"/>
+          <p:cNvGrpSpPr/>
+          <p:nvPr/>
+        </p:nvGrpSpPr>
+        <p:grpSpPr>
+          <a:xfrm>
+            <a:off x="-16934" y="0"/>
+            <a:ext cx="12231160" cy="6856214"/>
+            <a:chOff x="-16934" y="0"/>
+            <a:chExt cx="12231160" cy="6856214"/>
+          </a:xfrm>
+        </p:grpSpPr>
+        <p:pic>
+          <p:nvPicPr>
+            <p:cNvPr id="16" name="Picture 15" descr="HD-PanelTitleR1.png"/>
+            <p:cNvPicPr>
+              <a:picLocks noChangeAspect="1"/>
+            </p:cNvPicPr>
+            <p:nvPr/>
+          </p:nvPicPr>
+          <p:blipFill>
+            <a:blip r:embed="rId2">
+              <a:extLst>
+                <a:ext uri="{28A0092B-C50C-407E-A947-70E740481C1C}">
+                  <a14:useLocalDpi xmlns:a14="http://schemas.microsoft.com/office/drawing/2010/main" val="0"/>
+                </a:ext>
+              </a:extLst>
+            </a:blip>
+            <a:stretch>
+              <a:fillRect/>
+            </a:stretch>
+          </p:blipFill>
+          <p:spPr>
+            <a:xfrm>
+              <a:off x="0" y="0"/>
+              <a:ext cx="12188825" cy="6856214"/>
+            </a:xfrm>
+            <a:prstGeom prst="rect">
+              <a:avLst/>
+            </a:prstGeom>
+          </p:spPr>
+        </p:pic>
+        <p:sp>
+          <p:nvSpPr>
+            <p:cNvPr id="26" name="Rectangle 25"/>
+            <p:cNvSpPr/>
+            <p:nvPr/>
+          </p:nvSpPr>
+          <p:spPr>
+            <a:xfrm>
+              <a:off x="2328332" y="1540931"/>
+              <a:ext cx="7543802" cy="3835401"/>
+            </a:xfrm>
+            <a:prstGeom prst="rect">
+              <a:avLst/>
+            </a:prstGeom>
+            <a:noFill/>
+            <a:ln w="15875">
+              <a:miter lim="800000"/>
+            </a:ln>
+          </p:spPr>
+          <p:style>
+            <a:lnRef idx="1">
+              <a:schemeClr val="accent1"/>
+            </a:lnRef>
+            <a:fillRef idx="3">
+              <a:schemeClr val="accent1"/>
+            </a:fillRef>
+            <a:effectRef idx="2">
+              <a:schemeClr val="accent1"/>
+            </a:effectRef>
+            <a:fontRef idx="minor">
+              <a:schemeClr val="lt1"/>
+            </a:fontRef>
+          </p:style>
+        </p:sp>
+        <p:pic>
+          <p:nvPicPr>
+            <p:cNvPr id="17" name="Picture 16" descr="HDRibbonTitle-UniformTrim.png"/>
+            <p:cNvPicPr>
+              <a:picLocks noChangeAspect="1"/>
+            </p:cNvPicPr>
+            <p:nvPr/>
+          </p:nvPicPr>
+          <p:blipFill rotWithShape="1">
+            <a:blip r:embed="rId3">
+              <a:extLst>
+                <a:ext uri="{28A0092B-C50C-407E-A947-70E740481C1C}">
+                  <a14:useLocalDpi xmlns:a14="http://schemas.microsoft.com/office/drawing/2010/main" val="0"/>
+                </a:ext>
+              </a:extLst>
+            </a:blip>
+            <a:srcRect/>
+            <a:stretch/>
+          </p:blipFill>
+          <p:spPr>
+            <a:xfrm>
+              <a:off x="-16934" y="3147609"/>
+              <a:ext cx="2478024" cy="612648"/>
+            </a:xfrm>
+            <a:prstGeom prst="rect">
+              <a:avLst/>
+            </a:prstGeom>
+          </p:spPr>
+        </p:pic>
+        <p:pic>
+          <p:nvPicPr>
+            <p:cNvPr id="20" name="Picture 19" descr="HDRibbonTitle-UniformTrim.png"/>
+            <p:cNvPicPr>
+              <a:picLocks noChangeAspect="1"/>
+            </p:cNvPicPr>
+            <p:nvPr/>
+          </p:nvPicPr>
+          <p:blipFill rotWithShape="1">
+            <a:blip r:embed="rId3">
+              <a:extLst>
+                <a:ext uri="{28A0092B-C50C-407E-A947-70E740481C1C}">
+                  <a14:useLocalDpi xmlns:a14="http://schemas.microsoft.com/office/drawing/2010/main" val="0"/>
+                </a:ext>
+              </a:extLst>
+            </a:blip>
+            <a:srcRect/>
+            <a:stretch/>
+          </p:blipFill>
+          <p:spPr>
+            <a:xfrm>
+              <a:off x="9736202" y="3147609"/>
+              <a:ext cx="2478024" cy="612648"/>
+            </a:xfrm>
+            <a:prstGeom prst="rect">
+              <a:avLst/>
+            </a:prstGeom>
+          </p:spPr>
+        </p:pic>
+      </p:grpSp>
       <p:sp>
         <p:nvSpPr>
           <p:cNvPr id="2" name="Title 1"/>
@@ -139,19 +302,27 @@
         </p:nvSpPr>
         <p:spPr>
           <a:xfrm>
-            <a:off x="685800" y="2130425"/>
-            <a:ext cx="7772400" cy="1470025"/>
+            <a:off x="2692398" y="1871131"/>
+            <a:ext cx="6815669" cy="1515533"/>
           </a:xfrm>
         </p:spPr>
         <p:txBody>
-          <a:bodyPr/>
-          <a:lstStyle/>
-          <a:p>
-            <a:r>
-              <a:rPr lang="en-US" smtClean="0"/>
+          <a:bodyPr anchor="b">
+            <a:noAutofit/>
+          </a:bodyPr>
+          <a:lstStyle>
+            <a:lvl1pPr algn="ctr">
+              <a:defRPr sz="5400">
+                <a:effectLst/>
+              </a:defRPr>
+            </a:lvl1pPr>
+          </a:lstStyle>
+          <a:p>
+            <a:r>
+              <a:rPr lang="en-US"/>
               <a:t>Click to edit Master title style</a:t>
             </a:r>
-            <a:endParaRPr lang="en-US"/>
+            <a:endParaRPr lang="en-US" dirty="0"/>
           </a:p>
         </p:txBody>
       </p:sp>
@@ -167,14 +338,24 @@
         </p:nvSpPr>
         <p:spPr>
           <a:xfrm>
-            <a:off x="1371600" y="3886200"/>
-            <a:ext cx="6400800" cy="1752600"/>
+            <a:off x="2692398" y="3657597"/>
+            <a:ext cx="6815669" cy="1320802"/>
           </a:xfrm>
         </p:spPr>
         <p:txBody>
-          <a:bodyPr/>
+          <a:bodyPr anchor="t">
+            <a:normAutofit/>
+          </a:bodyPr>
           <a:lstStyle>
             <a:lvl1pPr marL="0" indent="0" algn="ctr">
+              <a:buNone/>
+              <a:defRPr sz="2100">
+                <a:solidFill>
+                  <a:schemeClr val="tx1"/>
+                </a:solidFill>
+              </a:defRPr>
+            </a:lvl1pPr>
+            <a:lvl2pPr marL="457200" indent="0" algn="ctr">
               <a:buNone/>
               <a:defRPr>
                 <a:solidFill>
@@ -183,8 +364,8 @@
                   </a:schemeClr>
                 </a:solidFill>
               </a:defRPr>
-            </a:lvl1pPr>
-            <a:lvl2pPr marL="457200" indent="0" algn="ctr">
+            </a:lvl2pPr>
+            <a:lvl3pPr marL="914400" indent="0" algn="ctr">
               <a:buNone/>
               <a:defRPr>
                 <a:solidFill>
@@ -193,8 +374,8 @@
                   </a:schemeClr>
                 </a:solidFill>
               </a:defRPr>
-            </a:lvl2pPr>
-            <a:lvl3pPr marL="914400" indent="0" algn="ctr">
+            </a:lvl3pPr>
+            <a:lvl4pPr marL="1371600" indent="0" algn="ctr">
               <a:buNone/>
               <a:defRPr>
                 <a:solidFill>
@@ -203,8 +384,8 @@
                   </a:schemeClr>
                 </a:solidFill>
               </a:defRPr>
-            </a:lvl3pPr>
-            <a:lvl4pPr marL="1371600" indent="0" algn="ctr">
+            </a:lvl4pPr>
+            <a:lvl5pPr marL="1828800" indent="0" algn="ctr">
               <a:buNone/>
               <a:defRPr>
                 <a:solidFill>
@@ -213,8 +394,8 @@
                   </a:schemeClr>
                 </a:solidFill>
               </a:defRPr>
-            </a:lvl4pPr>
-            <a:lvl5pPr marL="1828800" indent="0" algn="ctr">
+            </a:lvl5pPr>
+            <a:lvl6pPr marL="2286000" indent="0" algn="ctr">
               <a:buNone/>
               <a:defRPr>
                 <a:solidFill>
@@ -223,8 +404,8 @@
                   </a:schemeClr>
                 </a:solidFill>
               </a:defRPr>
-            </a:lvl5pPr>
-            <a:lvl6pPr marL="2286000" indent="0" algn="ctr">
+            </a:lvl6pPr>
+            <a:lvl7pPr marL="2743200" indent="0" algn="ctr">
               <a:buNone/>
               <a:defRPr>
                 <a:solidFill>
@@ -233,8 +414,8 @@
                   </a:schemeClr>
                 </a:solidFill>
               </a:defRPr>
-            </a:lvl6pPr>
-            <a:lvl7pPr marL="2743200" indent="0" algn="ctr">
+            </a:lvl7pPr>
+            <a:lvl8pPr marL="3200400" indent="0" algn="ctr">
               <a:buNone/>
               <a:defRPr>
                 <a:solidFill>
@@ -243,8 +424,8 @@
                   </a:schemeClr>
                 </a:solidFill>
               </a:defRPr>
-            </a:lvl7pPr>
-            <a:lvl8pPr marL="3200400" indent="0" algn="ctr">
+            </a:lvl8pPr>
+            <a:lvl9pPr marL="3657600" indent="0" algn="ctr">
               <a:buNone/>
               <a:defRPr>
                 <a:solidFill>
@@ -253,24 +434,14 @@
                   </a:schemeClr>
                 </a:solidFill>
               </a:defRPr>
-            </a:lvl8pPr>
-            <a:lvl9pPr marL="3657600" indent="0" algn="ctr">
-              <a:buNone/>
-              <a:defRPr>
-                <a:solidFill>
-                  <a:schemeClr val="tx1">
-                    <a:tint val="75000"/>
-                  </a:schemeClr>
-                </a:solidFill>
-              </a:defRPr>
             </a:lvl9pPr>
           </a:lstStyle>
           <a:p>
             <a:r>
-              <a:rPr lang="en-US" smtClean="0"/>
+              <a:rPr lang="en-US"/>
               <a:t>Click to edit Master subtitle style</a:t>
             </a:r>
-            <a:endParaRPr lang="en-US"/>
+            <a:endParaRPr lang="en-US" dirty="0"/>
           </a:p>
         </p:txBody>
       </p:sp>
@@ -284,14 +455,19 @@
             <p:ph type="dt" sz="half" idx="10"/>
           </p:nvPr>
         </p:nvSpPr>
-        <p:spPr/>
+        <p:spPr>
+          <a:xfrm>
+            <a:off x="7983232" y="5037663"/>
+            <a:ext cx="897467" cy="279400"/>
+          </a:xfrm>
+        </p:spPr>
         <p:txBody>
           <a:bodyPr/>
           <a:lstStyle/>
           <a:p>
             <a:fld id="{5BCAD085-E8A6-8845-BD4E-CB4CCA059FC4}" type="datetimeFigureOut">
               <a:rPr lang="en-US" smtClean="0"/>
-              <a:t>1/27/13</a:t>
+              <a:t>5/25/2026</a:t>
             </a:fld>
             <a:endParaRPr lang="en-US"/>
           </a:p>
@@ -307,7 +483,12 @@
             <p:ph type="ftr" sz="quarter" idx="11"/>
           </p:nvPr>
         </p:nvSpPr>
-        <p:spPr/>
+        <p:spPr>
+          <a:xfrm>
+            <a:off x="2692397" y="5037663"/>
+            <a:ext cx="5214635" cy="279400"/>
+          </a:xfrm>
+        </p:spPr>
         <p:txBody>
           <a:bodyPr/>
           <a:lstStyle/>
@@ -326,7 +507,12 @@
             <p:ph type="sldNum" sz="quarter" idx="12"/>
           </p:nvPr>
         </p:nvSpPr>
-        <p:spPr/>
+        <p:spPr>
+          <a:xfrm>
+            <a:off x="8956900" y="5037663"/>
+            <a:ext cx="551167" cy="279400"/>
+          </a:xfrm>
+        </p:spPr>
         <p:txBody>
           <a:bodyPr/>
           <a:lstStyle/>
@@ -339,10 +525,40 @@
           </a:p>
         </p:txBody>
       </p:sp>
+      <p:cxnSp>
+        <p:nvCxnSpPr>
+          <p:cNvPr id="15" name="Straight Connector 14"/>
+          <p:cNvCxnSpPr/>
+          <p:nvPr/>
+        </p:nvCxnSpPr>
+        <p:spPr>
+          <a:xfrm>
+            <a:off x="2692399" y="3522131"/>
+            <a:ext cx="6815668" cy="0"/>
+          </a:xfrm>
+          <a:prstGeom prst="line">
+            <a:avLst/>
+          </a:prstGeom>
+        </p:spPr>
+        <p:style>
+          <a:lnRef idx="2">
+            <a:schemeClr val="accent1"/>
+          </a:lnRef>
+          <a:fillRef idx="0">
+            <a:schemeClr val="accent1"/>
+          </a:fillRef>
+          <a:effectRef idx="1">
+            <a:schemeClr val="accent1"/>
+          </a:effectRef>
+          <a:fontRef idx="minor">
+            <a:schemeClr val="tx1"/>
+          </a:fontRef>
+        </p:style>
+      </p:cxnSp>
     </p:spTree>
     <p:extLst>
       <p:ext uri="{BB962C8B-B14F-4D97-AF65-F5344CB8AC3E}">
-        <p14:creationId xmlns:p14="http://schemas.microsoft.com/office/powerpoint/2010/main" val="3168075583"/>
+        <p14:creationId xmlns:p14="http://schemas.microsoft.com/office/powerpoint/2010/main" val="377375461"/>
       </p:ext>
     </p:extLst>
   </p:cSld>
@@ -353,6 +569,2099 @@
 </file>
 
 <file path=ppt/slideLayouts/slideLayout10.xml><?xml version="1.0" encoding="utf-8"?>
+<p:sldLayout xmlns:a="http://schemas.openxmlformats.org/drawingml/2006/main" xmlns:r="http://schemas.openxmlformats.org/officeDocument/2006/relationships" xmlns:p="http://schemas.openxmlformats.org/presentationml/2006/main" preserve="1">
+  <p:cSld name="Panoramic Picture with Caption">
+    <p:spTree>
+      <p:nvGrpSpPr>
+        <p:cNvPr id="1" name=""/>
+        <p:cNvGrpSpPr/>
+        <p:nvPr/>
+      </p:nvGrpSpPr>
+      <p:grpSpPr>
+        <a:xfrm>
+          <a:off x="0" y="0"/>
+          <a:ext cx="0" cy="0"/>
+          <a:chOff x="0" y="0"/>
+          <a:chExt cx="0" cy="0"/>
+        </a:xfrm>
+      </p:grpSpPr>
+      <p:sp>
+        <p:nvSpPr>
+          <p:cNvPr id="2" name="Title 1"/>
+          <p:cNvSpPr>
+            <a:spLocks noGrp="1"/>
+          </p:cNvSpPr>
+          <p:nvPr>
+            <p:ph type="title"/>
+          </p:nvPr>
+        </p:nvSpPr>
+        <p:spPr>
+          <a:xfrm>
+            <a:off x="1295401" y="4815415"/>
+            <a:ext cx="9609666" cy="566738"/>
+          </a:xfrm>
+        </p:spPr>
+        <p:txBody>
+          <a:bodyPr anchor="b">
+            <a:normAutofit/>
+          </a:bodyPr>
+          <a:lstStyle>
+            <a:lvl1pPr algn="ctr">
+              <a:defRPr sz="2400" b="0"/>
+            </a:lvl1pPr>
+          </a:lstStyle>
+          <a:p>
+            <a:r>
+              <a:rPr lang="en-US"/>
+              <a:t>Click to edit Master title style</a:t>
+            </a:r>
+            <a:endParaRPr lang="en-US" dirty="0"/>
+          </a:p>
+        </p:txBody>
+      </p:sp>
+      <p:sp>
+        <p:nvSpPr>
+          <p:cNvPr id="3" name="Picture Placeholder 2"/>
+          <p:cNvSpPr>
+            <a:spLocks noGrp="1" noChangeAspect="1"/>
+          </p:cNvSpPr>
+          <p:nvPr>
+            <p:ph type="pic" idx="1"/>
+          </p:nvPr>
+        </p:nvSpPr>
+        <p:spPr>
+          <a:xfrm>
+            <a:off x="1041427" y="1041399"/>
+            <a:ext cx="10105972" cy="3335869"/>
+          </a:xfrm>
+          <a:prstGeom prst="roundRect">
+            <a:avLst>
+              <a:gd name="adj" fmla="val 0"/>
+            </a:avLst>
+          </a:prstGeom>
+          <a:ln w="57150" cmpd="thickThin">
+            <a:solidFill>
+              <a:schemeClr val="tx1">
+                <a:lumMod val="50000"/>
+                <a:lumOff val="50000"/>
+              </a:schemeClr>
+            </a:solidFill>
+            <a:miter lim="800000"/>
+          </a:ln>
+          <a:effectLst>
+            <a:innerShdw blurRad="57150" dist="38100" dir="14460000">
+              <a:srgbClr val="000000">
+                <a:alpha val="70000"/>
+              </a:srgbClr>
+            </a:innerShdw>
+          </a:effectLst>
+        </p:spPr>
+        <p:txBody>
+          <a:bodyPr anchor="t">
+            <a:normAutofit/>
+          </a:bodyPr>
+          <a:lstStyle>
+            <a:lvl1pPr marL="0" indent="0" algn="ctr">
+              <a:buNone/>
+              <a:defRPr sz="1600"/>
+            </a:lvl1pPr>
+            <a:lvl2pPr marL="457200" indent="0">
+              <a:buNone/>
+              <a:defRPr sz="1600"/>
+            </a:lvl2pPr>
+            <a:lvl3pPr marL="914400" indent="0">
+              <a:buNone/>
+              <a:defRPr sz="1600"/>
+            </a:lvl3pPr>
+            <a:lvl4pPr marL="1371600" indent="0">
+              <a:buNone/>
+              <a:defRPr sz="1600"/>
+            </a:lvl4pPr>
+            <a:lvl5pPr marL="1828800" indent="0">
+              <a:buNone/>
+              <a:defRPr sz="1600"/>
+            </a:lvl5pPr>
+            <a:lvl6pPr marL="2286000" indent="0">
+              <a:buNone/>
+              <a:defRPr sz="1600"/>
+            </a:lvl6pPr>
+            <a:lvl7pPr marL="2743200" indent="0">
+              <a:buNone/>
+              <a:defRPr sz="1600"/>
+            </a:lvl7pPr>
+            <a:lvl8pPr marL="3200400" indent="0">
+              <a:buNone/>
+              <a:defRPr sz="1600"/>
+            </a:lvl8pPr>
+            <a:lvl9pPr marL="3657600" indent="0">
+              <a:buNone/>
+              <a:defRPr sz="1600"/>
+            </a:lvl9pPr>
+          </a:lstStyle>
+          <a:p>
+            <a:r>
+              <a:rPr lang="en-US"/>
+              <a:t>Click icon to add picture</a:t>
+            </a:r>
+            <a:endParaRPr lang="en-US" dirty="0"/>
+          </a:p>
+        </p:txBody>
+      </p:sp>
+      <p:sp>
+        <p:nvSpPr>
+          <p:cNvPr id="4" name="Text Placeholder 3"/>
+          <p:cNvSpPr>
+            <a:spLocks noGrp="1"/>
+          </p:cNvSpPr>
+          <p:nvPr>
+            <p:ph type="body" sz="half" idx="2"/>
+          </p:nvPr>
+        </p:nvSpPr>
+        <p:spPr>
+          <a:xfrm>
+            <a:off x="1295401" y="5382153"/>
+            <a:ext cx="9609666" cy="493712"/>
+          </a:xfrm>
+        </p:spPr>
+        <p:txBody>
+          <a:bodyPr>
+            <a:normAutofit/>
+          </a:bodyPr>
+          <a:lstStyle>
+            <a:lvl1pPr marL="0" indent="0" algn="ctr">
+              <a:buNone/>
+              <a:defRPr sz="1400"/>
+            </a:lvl1pPr>
+            <a:lvl2pPr marL="457200" indent="0">
+              <a:buNone/>
+              <a:defRPr sz="1200"/>
+            </a:lvl2pPr>
+            <a:lvl3pPr marL="914400" indent="0">
+              <a:buNone/>
+              <a:defRPr sz="1000"/>
+            </a:lvl3pPr>
+            <a:lvl4pPr marL="1371600" indent="0">
+              <a:buNone/>
+              <a:defRPr sz="900"/>
+            </a:lvl4pPr>
+            <a:lvl5pPr marL="1828800" indent="0">
+              <a:buNone/>
+              <a:defRPr sz="900"/>
+            </a:lvl5pPr>
+            <a:lvl6pPr marL="2286000" indent="0">
+              <a:buNone/>
+              <a:defRPr sz="900"/>
+            </a:lvl6pPr>
+            <a:lvl7pPr marL="2743200" indent="0">
+              <a:buNone/>
+              <a:defRPr sz="900"/>
+            </a:lvl7pPr>
+            <a:lvl8pPr marL="3200400" indent="0">
+              <a:buNone/>
+              <a:defRPr sz="900"/>
+            </a:lvl8pPr>
+            <a:lvl9pPr marL="3657600" indent="0">
+              <a:buNone/>
+              <a:defRPr sz="900"/>
+            </a:lvl9pPr>
+          </a:lstStyle>
+          <a:p>
+            <a:pPr lvl="0"/>
+            <a:r>
+              <a:rPr lang="en-US"/>
+              <a:t>Click to edit Master text styles</a:t>
+            </a:r>
+          </a:p>
+        </p:txBody>
+      </p:sp>
+      <p:sp>
+        <p:nvSpPr>
+          <p:cNvPr id="5" name="Date Placeholder 4"/>
+          <p:cNvSpPr>
+            <a:spLocks noGrp="1"/>
+          </p:cNvSpPr>
+          <p:nvPr>
+            <p:ph type="dt" sz="half" idx="10"/>
+          </p:nvPr>
+        </p:nvSpPr>
+        <p:spPr/>
+        <p:txBody>
+          <a:bodyPr/>
+          <a:lstStyle/>
+          <a:p>
+            <a:fld id="{5BCAD085-E8A6-8845-BD4E-CB4CCA059FC4}" type="datetimeFigureOut">
+              <a:rPr lang="en-US" smtClean="0"/>
+              <a:t>5/25/2026</a:t>
+            </a:fld>
+            <a:endParaRPr lang="en-US"/>
+          </a:p>
+        </p:txBody>
+      </p:sp>
+      <p:sp>
+        <p:nvSpPr>
+          <p:cNvPr id="6" name="Footer Placeholder 5"/>
+          <p:cNvSpPr>
+            <a:spLocks noGrp="1"/>
+          </p:cNvSpPr>
+          <p:nvPr>
+            <p:ph type="ftr" sz="quarter" idx="11"/>
+          </p:nvPr>
+        </p:nvSpPr>
+        <p:spPr/>
+        <p:txBody>
+          <a:bodyPr/>
+          <a:lstStyle/>
+          <a:p>
+            <a:endParaRPr lang="en-US"/>
+          </a:p>
+        </p:txBody>
+      </p:sp>
+      <p:sp>
+        <p:nvSpPr>
+          <p:cNvPr id="7" name="Slide Number Placeholder 6"/>
+          <p:cNvSpPr>
+            <a:spLocks noGrp="1"/>
+          </p:cNvSpPr>
+          <p:nvPr>
+            <p:ph type="sldNum" sz="quarter" idx="12"/>
+          </p:nvPr>
+        </p:nvSpPr>
+        <p:spPr/>
+        <p:txBody>
+          <a:bodyPr/>
+          <a:lstStyle/>
+          <a:p>
+            <a:fld id="{C1FF6DA9-008F-8B48-92A6-B652298478BF}" type="slidenum">
+              <a:rPr lang="en-US" smtClean="0"/>
+              <a:t>‹#›</a:t>
+            </a:fld>
+            <a:endParaRPr lang="en-US"/>
+          </a:p>
+        </p:txBody>
+      </p:sp>
+    </p:spTree>
+    <p:extLst>
+      <p:ext uri="{BB962C8B-B14F-4D97-AF65-F5344CB8AC3E}">
+        <p14:creationId xmlns:p14="http://schemas.microsoft.com/office/powerpoint/2010/main" val="2137779847"/>
+      </p:ext>
+    </p:extLst>
+  </p:cSld>
+  <p:clrMapOvr>
+    <a:masterClrMapping/>
+  </p:clrMapOvr>
+</p:sldLayout>
+</file>
+
+<file path=ppt/slideLayouts/slideLayout11.xml><?xml version="1.0" encoding="utf-8"?>
+<p:sldLayout xmlns:a="http://schemas.openxmlformats.org/drawingml/2006/main" xmlns:r="http://schemas.openxmlformats.org/officeDocument/2006/relationships" xmlns:p="http://schemas.openxmlformats.org/presentationml/2006/main" preserve="1">
+  <p:cSld name="Title and Caption">
+    <p:spTree>
+      <p:nvGrpSpPr>
+        <p:cNvPr id="1" name=""/>
+        <p:cNvGrpSpPr/>
+        <p:nvPr/>
+      </p:nvGrpSpPr>
+      <p:grpSpPr>
+        <a:xfrm>
+          <a:off x="0" y="0"/>
+          <a:ext cx="0" cy="0"/>
+          <a:chOff x="0" y="0"/>
+          <a:chExt cx="0" cy="0"/>
+        </a:xfrm>
+      </p:grpSpPr>
+      <p:sp>
+        <p:nvSpPr>
+          <p:cNvPr id="2" name="Title 1"/>
+          <p:cNvSpPr>
+            <a:spLocks noGrp="1"/>
+          </p:cNvSpPr>
+          <p:nvPr>
+            <p:ph type="title"/>
+          </p:nvPr>
+        </p:nvSpPr>
+        <p:spPr>
+          <a:xfrm>
+            <a:off x="1303868" y="982132"/>
+            <a:ext cx="9592732" cy="2954868"/>
+          </a:xfrm>
+        </p:spPr>
+        <p:txBody>
+          <a:bodyPr anchor="ctr">
+            <a:normAutofit/>
+          </a:bodyPr>
+          <a:lstStyle>
+            <a:lvl1pPr algn="ctr">
+              <a:defRPr sz="3200" b="0" cap="none"/>
+            </a:lvl1pPr>
+          </a:lstStyle>
+          <a:p>
+            <a:r>
+              <a:rPr lang="en-US"/>
+              <a:t>Click to edit Master title style</a:t>
+            </a:r>
+            <a:endParaRPr lang="en-US" dirty="0"/>
+          </a:p>
+        </p:txBody>
+      </p:sp>
+      <p:sp>
+        <p:nvSpPr>
+          <p:cNvPr id="3" name="Text Placeholder 2"/>
+          <p:cNvSpPr>
+            <a:spLocks noGrp="1"/>
+          </p:cNvSpPr>
+          <p:nvPr>
+            <p:ph type="body" idx="1"/>
+          </p:nvPr>
+        </p:nvSpPr>
+        <p:spPr>
+          <a:xfrm>
+            <a:off x="1303868" y="4343399"/>
+            <a:ext cx="9592732" cy="1532467"/>
+          </a:xfrm>
+        </p:spPr>
+        <p:txBody>
+          <a:bodyPr anchor="ctr">
+            <a:normAutofit/>
+          </a:bodyPr>
+          <a:lstStyle>
+            <a:lvl1pPr marL="0" indent="0" algn="ctr">
+              <a:buNone/>
+              <a:defRPr sz="2000">
+                <a:solidFill>
+                  <a:schemeClr val="tx1"/>
+                </a:solidFill>
+              </a:defRPr>
+            </a:lvl1pPr>
+            <a:lvl2pPr marL="457200" indent="0">
+              <a:buNone/>
+              <a:defRPr sz="1800">
+                <a:solidFill>
+                  <a:schemeClr val="tx1">
+                    <a:tint val="75000"/>
+                  </a:schemeClr>
+                </a:solidFill>
+              </a:defRPr>
+            </a:lvl2pPr>
+            <a:lvl3pPr marL="914400" indent="0">
+              <a:buNone/>
+              <a:defRPr sz="1600">
+                <a:solidFill>
+                  <a:schemeClr val="tx1">
+                    <a:tint val="75000"/>
+                  </a:schemeClr>
+                </a:solidFill>
+              </a:defRPr>
+            </a:lvl3pPr>
+            <a:lvl4pPr marL="1371600" indent="0">
+              <a:buNone/>
+              <a:defRPr sz="1400">
+                <a:solidFill>
+                  <a:schemeClr val="tx1">
+                    <a:tint val="75000"/>
+                  </a:schemeClr>
+                </a:solidFill>
+              </a:defRPr>
+            </a:lvl4pPr>
+            <a:lvl5pPr marL="1828800" indent="0">
+              <a:buNone/>
+              <a:defRPr sz="1400">
+                <a:solidFill>
+                  <a:schemeClr val="tx1">
+                    <a:tint val="75000"/>
+                  </a:schemeClr>
+                </a:solidFill>
+              </a:defRPr>
+            </a:lvl5pPr>
+            <a:lvl6pPr marL="2286000" indent="0">
+              <a:buNone/>
+              <a:defRPr sz="1400">
+                <a:solidFill>
+                  <a:schemeClr val="tx1">
+                    <a:tint val="75000"/>
+                  </a:schemeClr>
+                </a:solidFill>
+              </a:defRPr>
+            </a:lvl6pPr>
+            <a:lvl7pPr marL="2743200" indent="0">
+              <a:buNone/>
+              <a:defRPr sz="1400">
+                <a:solidFill>
+                  <a:schemeClr val="tx1">
+                    <a:tint val="75000"/>
+                  </a:schemeClr>
+                </a:solidFill>
+              </a:defRPr>
+            </a:lvl7pPr>
+            <a:lvl8pPr marL="3200400" indent="0">
+              <a:buNone/>
+              <a:defRPr sz="1400">
+                <a:solidFill>
+                  <a:schemeClr val="tx1">
+                    <a:tint val="75000"/>
+                  </a:schemeClr>
+                </a:solidFill>
+              </a:defRPr>
+            </a:lvl8pPr>
+            <a:lvl9pPr marL="3657600" indent="0">
+              <a:buNone/>
+              <a:defRPr sz="1400">
+                <a:solidFill>
+                  <a:schemeClr val="tx1">
+                    <a:tint val="75000"/>
+                  </a:schemeClr>
+                </a:solidFill>
+              </a:defRPr>
+            </a:lvl9pPr>
+          </a:lstStyle>
+          <a:p>
+            <a:pPr lvl="0"/>
+            <a:r>
+              <a:rPr lang="en-US"/>
+              <a:t>Click to edit Master text styles</a:t>
+            </a:r>
+          </a:p>
+        </p:txBody>
+      </p:sp>
+      <p:sp>
+        <p:nvSpPr>
+          <p:cNvPr id="4" name="Date Placeholder 3"/>
+          <p:cNvSpPr>
+            <a:spLocks noGrp="1"/>
+          </p:cNvSpPr>
+          <p:nvPr>
+            <p:ph type="dt" sz="half" idx="10"/>
+          </p:nvPr>
+        </p:nvSpPr>
+        <p:spPr/>
+        <p:txBody>
+          <a:bodyPr/>
+          <a:lstStyle/>
+          <a:p>
+            <a:fld id="{5BCAD085-E8A6-8845-BD4E-CB4CCA059FC4}" type="datetimeFigureOut">
+              <a:rPr lang="en-US" smtClean="0"/>
+              <a:t>5/25/2026</a:t>
+            </a:fld>
+            <a:endParaRPr lang="en-US"/>
+          </a:p>
+        </p:txBody>
+      </p:sp>
+      <p:sp>
+        <p:nvSpPr>
+          <p:cNvPr id="5" name="Footer Placeholder 4"/>
+          <p:cNvSpPr>
+            <a:spLocks noGrp="1"/>
+          </p:cNvSpPr>
+          <p:nvPr>
+            <p:ph type="ftr" sz="quarter" idx="11"/>
+          </p:nvPr>
+        </p:nvSpPr>
+        <p:spPr/>
+        <p:txBody>
+          <a:bodyPr/>
+          <a:lstStyle/>
+          <a:p>
+            <a:endParaRPr lang="en-US"/>
+          </a:p>
+        </p:txBody>
+      </p:sp>
+      <p:sp>
+        <p:nvSpPr>
+          <p:cNvPr id="6" name="Slide Number Placeholder 5"/>
+          <p:cNvSpPr>
+            <a:spLocks noGrp="1"/>
+          </p:cNvSpPr>
+          <p:nvPr>
+            <p:ph type="sldNum" sz="quarter" idx="12"/>
+          </p:nvPr>
+        </p:nvSpPr>
+        <p:spPr/>
+        <p:txBody>
+          <a:bodyPr/>
+          <a:lstStyle/>
+          <a:p>
+            <a:fld id="{C1FF6DA9-008F-8B48-92A6-B652298478BF}" type="slidenum">
+              <a:rPr lang="en-US" smtClean="0"/>
+              <a:t>‹#›</a:t>
+            </a:fld>
+            <a:endParaRPr lang="en-US"/>
+          </a:p>
+        </p:txBody>
+      </p:sp>
+      <p:cxnSp>
+        <p:nvCxnSpPr>
+          <p:cNvPr id="15" name="Straight Connector 14"/>
+          <p:cNvCxnSpPr/>
+          <p:nvPr/>
+        </p:nvCxnSpPr>
+        <p:spPr>
+          <a:xfrm>
+            <a:off x="1396169" y="4140199"/>
+            <a:ext cx="9407298" cy="0"/>
+          </a:xfrm>
+          <a:prstGeom prst="line">
+            <a:avLst/>
+          </a:prstGeom>
+          <a:ln w="15875"/>
+        </p:spPr>
+        <p:style>
+          <a:lnRef idx="2">
+            <a:schemeClr val="accent1"/>
+          </a:lnRef>
+          <a:fillRef idx="0">
+            <a:schemeClr val="accent1"/>
+          </a:fillRef>
+          <a:effectRef idx="1">
+            <a:schemeClr val="accent1"/>
+          </a:effectRef>
+          <a:fontRef idx="minor">
+            <a:schemeClr val="tx1"/>
+          </a:fontRef>
+        </p:style>
+      </p:cxnSp>
+    </p:spTree>
+    <p:extLst>
+      <p:ext uri="{BB962C8B-B14F-4D97-AF65-F5344CB8AC3E}">
+        <p14:creationId xmlns:p14="http://schemas.microsoft.com/office/powerpoint/2010/main" val="2209744092"/>
+      </p:ext>
+    </p:extLst>
+  </p:cSld>
+  <p:clrMapOvr>
+    <a:masterClrMapping/>
+  </p:clrMapOvr>
+</p:sldLayout>
+</file>
+
+<file path=ppt/slideLayouts/slideLayout12.xml><?xml version="1.0" encoding="utf-8"?>
+<p:sldLayout xmlns:a="http://schemas.openxmlformats.org/drawingml/2006/main" xmlns:r="http://schemas.openxmlformats.org/officeDocument/2006/relationships" xmlns:p="http://schemas.openxmlformats.org/presentationml/2006/main" preserve="1">
+  <p:cSld name="Quote with Caption">
+    <p:spTree>
+      <p:nvGrpSpPr>
+        <p:cNvPr id="1" name=""/>
+        <p:cNvGrpSpPr/>
+        <p:nvPr/>
+      </p:nvGrpSpPr>
+      <p:grpSpPr>
+        <a:xfrm>
+          <a:off x="0" y="0"/>
+          <a:ext cx="0" cy="0"/>
+          <a:chOff x="0" y="0"/>
+          <a:chExt cx="0" cy="0"/>
+        </a:xfrm>
+      </p:grpSpPr>
+      <p:sp>
+        <p:nvSpPr>
+          <p:cNvPr id="2" name="Title 1"/>
+          <p:cNvSpPr>
+            <a:spLocks noGrp="1"/>
+          </p:cNvSpPr>
+          <p:nvPr>
+            <p:ph type="title"/>
+          </p:nvPr>
+        </p:nvSpPr>
+        <p:spPr>
+          <a:xfrm>
+            <a:off x="1446213" y="982132"/>
+            <a:ext cx="9296398" cy="2370668"/>
+          </a:xfrm>
+        </p:spPr>
+        <p:txBody>
+          <a:bodyPr anchor="ctr">
+            <a:normAutofit/>
+          </a:bodyPr>
+          <a:lstStyle>
+            <a:lvl1pPr algn="ctr">
+              <a:defRPr sz="3200" b="0" cap="none">
+                <a:solidFill>
+                  <a:schemeClr val="tx1"/>
+                </a:solidFill>
+              </a:defRPr>
+            </a:lvl1pPr>
+          </a:lstStyle>
+          <a:p>
+            <a:r>
+              <a:rPr lang="en-US"/>
+              <a:t>Click to edit Master title style</a:t>
+            </a:r>
+            <a:endParaRPr lang="en-US" dirty="0"/>
+          </a:p>
+        </p:txBody>
+      </p:sp>
+      <p:sp>
+        <p:nvSpPr>
+          <p:cNvPr id="10" name="Text Placeholder 9"/>
+          <p:cNvSpPr>
+            <a:spLocks noGrp="1"/>
+          </p:cNvSpPr>
+          <p:nvPr>
+            <p:ph type="body" sz="quarter" idx="13"/>
+          </p:nvPr>
+        </p:nvSpPr>
+        <p:spPr>
+          <a:xfrm>
+            <a:off x="1674812" y="3352800"/>
+            <a:ext cx="8839202" cy="584200"/>
+          </a:xfrm>
+        </p:spPr>
+        <p:txBody>
+          <a:bodyPr anchor="ctr">
+            <a:normAutofit/>
+          </a:bodyPr>
+          <a:lstStyle>
+            <a:lvl1pPr marL="0" indent="0" algn="r">
+              <a:buFontTx/>
+              <a:buNone/>
+              <a:defRPr sz="2000"/>
+            </a:lvl1pPr>
+            <a:lvl2pPr marL="457200" indent="0">
+              <a:buFontTx/>
+              <a:buNone/>
+              <a:defRPr/>
+            </a:lvl2pPr>
+            <a:lvl3pPr marL="914400" indent="0">
+              <a:buFontTx/>
+              <a:buNone/>
+              <a:defRPr/>
+            </a:lvl3pPr>
+            <a:lvl4pPr marL="1371600" indent="0">
+              <a:buFontTx/>
+              <a:buNone/>
+              <a:defRPr/>
+            </a:lvl4pPr>
+            <a:lvl5pPr marL="1828800" indent="0">
+              <a:buFontTx/>
+              <a:buNone/>
+              <a:defRPr/>
+            </a:lvl5pPr>
+          </a:lstStyle>
+          <a:p>
+            <a:pPr lvl="0"/>
+            <a:r>
+              <a:rPr lang="en-US"/>
+              <a:t>Click to edit Master text styles</a:t>
+            </a:r>
+          </a:p>
+        </p:txBody>
+      </p:sp>
+      <p:sp>
+        <p:nvSpPr>
+          <p:cNvPr id="3" name="Text Placeholder 2"/>
+          <p:cNvSpPr>
+            <a:spLocks noGrp="1"/>
+          </p:cNvSpPr>
+          <p:nvPr>
+            <p:ph type="body" idx="1"/>
+          </p:nvPr>
+        </p:nvSpPr>
+        <p:spPr>
+          <a:xfrm>
+            <a:off x="1295401" y="4343399"/>
+            <a:ext cx="9609666" cy="1532467"/>
+          </a:xfrm>
+        </p:spPr>
+        <p:txBody>
+          <a:bodyPr anchor="ctr">
+            <a:normAutofit/>
+          </a:bodyPr>
+          <a:lstStyle>
+            <a:lvl1pPr marL="0" indent="0" algn="ctr">
+              <a:buNone/>
+              <a:defRPr sz="2000">
+                <a:solidFill>
+                  <a:schemeClr val="tx1"/>
+                </a:solidFill>
+              </a:defRPr>
+            </a:lvl1pPr>
+            <a:lvl2pPr marL="457200" indent="0">
+              <a:buNone/>
+              <a:defRPr sz="1800">
+                <a:solidFill>
+                  <a:schemeClr val="tx1">
+                    <a:tint val="75000"/>
+                  </a:schemeClr>
+                </a:solidFill>
+              </a:defRPr>
+            </a:lvl2pPr>
+            <a:lvl3pPr marL="914400" indent="0">
+              <a:buNone/>
+              <a:defRPr sz="1600">
+                <a:solidFill>
+                  <a:schemeClr val="tx1">
+                    <a:tint val="75000"/>
+                  </a:schemeClr>
+                </a:solidFill>
+              </a:defRPr>
+            </a:lvl3pPr>
+            <a:lvl4pPr marL="1371600" indent="0">
+              <a:buNone/>
+              <a:defRPr sz="1400">
+                <a:solidFill>
+                  <a:schemeClr val="tx1">
+                    <a:tint val="75000"/>
+                  </a:schemeClr>
+                </a:solidFill>
+              </a:defRPr>
+            </a:lvl4pPr>
+            <a:lvl5pPr marL="1828800" indent="0">
+              <a:buNone/>
+              <a:defRPr sz="1400">
+                <a:solidFill>
+                  <a:schemeClr val="tx1">
+                    <a:tint val="75000"/>
+                  </a:schemeClr>
+                </a:solidFill>
+              </a:defRPr>
+            </a:lvl5pPr>
+            <a:lvl6pPr marL="2286000" indent="0">
+              <a:buNone/>
+              <a:defRPr sz="1400">
+                <a:solidFill>
+                  <a:schemeClr val="tx1">
+                    <a:tint val="75000"/>
+                  </a:schemeClr>
+                </a:solidFill>
+              </a:defRPr>
+            </a:lvl6pPr>
+            <a:lvl7pPr marL="2743200" indent="0">
+              <a:buNone/>
+              <a:defRPr sz="1400">
+                <a:solidFill>
+                  <a:schemeClr val="tx1">
+                    <a:tint val="75000"/>
+                  </a:schemeClr>
+                </a:solidFill>
+              </a:defRPr>
+            </a:lvl7pPr>
+            <a:lvl8pPr marL="3200400" indent="0">
+              <a:buNone/>
+              <a:defRPr sz="1400">
+                <a:solidFill>
+                  <a:schemeClr val="tx1">
+                    <a:tint val="75000"/>
+                  </a:schemeClr>
+                </a:solidFill>
+              </a:defRPr>
+            </a:lvl8pPr>
+            <a:lvl9pPr marL="3657600" indent="0">
+              <a:buNone/>
+              <a:defRPr sz="1400">
+                <a:solidFill>
+                  <a:schemeClr val="tx1">
+                    <a:tint val="75000"/>
+                  </a:schemeClr>
+                </a:solidFill>
+              </a:defRPr>
+            </a:lvl9pPr>
+          </a:lstStyle>
+          <a:p>
+            <a:pPr lvl="0"/>
+            <a:r>
+              <a:rPr lang="en-US"/>
+              <a:t>Click to edit Master text styles</a:t>
+            </a:r>
+          </a:p>
+        </p:txBody>
+      </p:sp>
+      <p:sp>
+        <p:nvSpPr>
+          <p:cNvPr id="4" name="Date Placeholder 3"/>
+          <p:cNvSpPr>
+            <a:spLocks noGrp="1"/>
+          </p:cNvSpPr>
+          <p:nvPr>
+            <p:ph type="dt" sz="half" idx="10"/>
+          </p:nvPr>
+        </p:nvSpPr>
+        <p:spPr/>
+        <p:txBody>
+          <a:bodyPr/>
+          <a:lstStyle/>
+          <a:p>
+            <a:fld id="{5BCAD085-E8A6-8845-BD4E-CB4CCA059FC4}" type="datetimeFigureOut">
+              <a:rPr lang="en-US" smtClean="0"/>
+              <a:t>5/25/2026</a:t>
+            </a:fld>
+            <a:endParaRPr lang="en-US"/>
+          </a:p>
+        </p:txBody>
+      </p:sp>
+      <p:sp>
+        <p:nvSpPr>
+          <p:cNvPr id="5" name="Footer Placeholder 4"/>
+          <p:cNvSpPr>
+            <a:spLocks noGrp="1"/>
+          </p:cNvSpPr>
+          <p:nvPr>
+            <p:ph type="ftr" sz="quarter" idx="11"/>
+          </p:nvPr>
+        </p:nvSpPr>
+        <p:spPr/>
+        <p:txBody>
+          <a:bodyPr/>
+          <a:lstStyle/>
+          <a:p>
+            <a:endParaRPr lang="en-US"/>
+          </a:p>
+        </p:txBody>
+      </p:sp>
+      <p:sp>
+        <p:nvSpPr>
+          <p:cNvPr id="6" name="Slide Number Placeholder 5"/>
+          <p:cNvSpPr>
+            <a:spLocks noGrp="1"/>
+          </p:cNvSpPr>
+          <p:nvPr>
+            <p:ph type="sldNum" sz="quarter" idx="12"/>
+          </p:nvPr>
+        </p:nvSpPr>
+        <p:spPr/>
+        <p:txBody>
+          <a:bodyPr/>
+          <a:lstStyle/>
+          <a:p>
+            <a:fld id="{C1FF6DA9-008F-8B48-92A6-B652298478BF}" type="slidenum">
+              <a:rPr lang="en-US" smtClean="0"/>
+              <a:t>‹#›</a:t>
+            </a:fld>
+            <a:endParaRPr lang="en-US"/>
+          </a:p>
+        </p:txBody>
+      </p:sp>
+      <p:sp>
+        <p:nvSpPr>
+          <p:cNvPr id="14" name="TextBox 13"/>
+          <p:cNvSpPr txBox="1"/>
+          <p:nvPr/>
+        </p:nvSpPr>
+        <p:spPr>
+          <a:xfrm>
+            <a:off x="862013" y="879961"/>
+            <a:ext cx="609600" cy="584776"/>
+          </a:xfrm>
+          <a:prstGeom prst="rect">
+            <a:avLst/>
+          </a:prstGeom>
+        </p:spPr>
+        <p:txBody>
+          <a:bodyPr vert="horz" lIns="91440" tIns="45720" rIns="91440" bIns="45720" rtlCol="0" anchor="ctr">
+            <a:noAutofit/>
+          </a:bodyPr>
+          <a:lstStyle/>
+          <a:p>
+            <a:pPr lvl="0"/>
+            <a:r>
+              <a:rPr lang="en-US" sz="8000" dirty="0">
+                <a:solidFill>
+                  <a:schemeClr val="tx1"/>
+                </a:solidFill>
+                <a:effectLst/>
+              </a:rPr>
+              <a:t>“</a:t>
+            </a:r>
+          </a:p>
+        </p:txBody>
+      </p:sp>
+      <p:sp>
+        <p:nvSpPr>
+          <p:cNvPr id="15" name="TextBox 14"/>
+          <p:cNvSpPr txBox="1"/>
+          <p:nvPr/>
+        </p:nvSpPr>
+        <p:spPr>
+          <a:xfrm>
+            <a:off x="10600267" y="2827870"/>
+            <a:ext cx="609600" cy="584776"/>
+          </a:xfrm>
+          <a:prstGeom prst="rect">
+            <a:avLst/>
+          </a:prstGeom>
+        </p:spPr>
+        <p:txBody>
+          <a:bodyPr vert="horz" lIns="91440" tIns="45720" rIns="91440" bIns="45720" rtlCol="0" anchor="ctr">
+            <a:noAutofit/>
+          </a:bodyPr>
+          <a:lstStyle/>
+          <a:p>
+            <a:pPr lvl="0" algn="r"/>
+            <a:r>
+              <a:rPr lang="en-US" sz="8000" dirty="0">
+                <a:solidFill>
+                  <a:schemeClr val="tx1"/>
+                </a:solidFill>
+                <a:effectLst/>
+              </a:rPr>
+              <a:t>”</a:t>
+            </a:r>
+          </a:p>
+        </p:txBody>
+      </p:sp>
+      <p:cxnSp>
+        <p:nvCxnSpPr>
+          <p:cNvPr id="19" name="Straight Connector 18"/>
+          <p:cNvCxnSpPr/>
+          <p:nvPr/>
+        </p:nvCxnSpPr>
+        <p:spPr>
+          <a:xfrm>
+            <a:off x="1396169" y="4140199"/>
+            <a:ext cx="9407298" cy="0"/>
+          </a:xfrm>
+          <a:prstGeom prst="line">
+            <a:avLst/>
+          </a:prstGeom>
+          <a:ln w="15875"/>
+        </p:spPr>
+        <p:style>
+          <a:lnRef idx="2">
+            <a:schemeClr val="accent1"/>
+          </a:lnRef>
+          <a:fillRef idx="0">
+            <a:schemeClr val="accent1"/>
+          </a:fillRef>
+          <a:effectRef idx="1">
+            <a:schemeClr val="accent1"/>
+          </a:effectRef>
+          <a:fontRef idx="minor">
+            <a:schemeClr val="tx1"/>
+          </a:fontRef>
+        </p:style>
+      </p:cxnSp>
+    </p:spTree>
+    <p:extLst>
+      <p:ext uri="{BB962C8B-B14F-4D97-AF65-F5344CB8AC3E}">
+        <p14:creationId xmlns:p14="http://schemas.microsoft.com/office/powerpoint/2010/main" val="1121230863"/>
+      </p:ext>
+    </p:extLst>
+  </p:cSld>
+  <p:clrMapOvr>
+    <a:masterClrMapping/>
+  </p:clrMapOvr>
+</p:sldLayout>
+</file>
+
+<file path=ppt/slideLayouts/slideLayout13.xml><?xml version="1.0" encoding="utf-8"?>
+<p:sldLayout xmlns:a="http://schemas.openxmlformats.org/drawingml/2006/main" xmlns:r="http://schemas.openxmlformats.org/officeDocument/2006/relationships" xmlns:p="http://schemas.openxmlformats.org/presentationml/2006/main" preserve="1">
+  <p:cSld name="Name Card">
+    <p:spTree>
+      <p:nvGrpSpPr>
+        <p:cNvPr id="1" name=""/>
+        <p:cNvGrpSpPr/>
+        <p:nvPr/>
+      </p:nvGrpSpPr>
+      <p:grpSpPr>
+        <a:xfrm>
+          <a:off x="0" y="0"/>
+          <a:ext cx="0" cy="0"/>
+          <a:chOff x="0" y="0"/>
+          <a:chExt cx="0" cy="0"/>
+        </a:xfrm>
+      </p:grpSpPr>
+      <p:sp>
+        <p:nvSpPr>
+          <p:cNvPr id="2" name="Title 1"/>
+          <p:cNvSpPr>
+            <a:spLocks noGrp="1"/>
+          </p:cNvSpPr>
+          <p:nvPr>
+            <p:ph type="title"/>
+          </p:nvPr>
+        </p:nvSpPr>
+        <p:spPr>
+          <a:xfrm>
+            <a:off x="1295402" y="3308581"/>
+            <a:ext cx="9609668" cy="1468800"/>
+          </a:xfrm>
+        </p:spPr>
+        <p:txBody>
+          <a:bodyPr anchor="b">
+            <a:normAutofit/>
+          </a:bodyPr>
+          <a:lstStyle>
+            <a:lvl1pPr algn="l">
+              <a:defRPr sz="3200" b="0" cap="none"/>
+            </a:lvl1pPr>
+          </a:lstStyle>
+          <a:p>
+            <a:r>
+              <a:rPr lang="en-US"/>
+              <a:t>Click to edit Master title style</a:t>
+            </a:r>
+            <a:endParaRPr lang="en-US" dirty="0"/>
+          </a:p>
+        </p:txBody>
+      </p:sp>
+      <p:sp>
+        <p:nvSpPr>
+          <p:cNvPr id="3" name="Text Placeholder 2"/>
+          <p:cNvSpPr>
+            <a:spLocks noGrp="1"/>
+          </p:cNvSpPr>
+          <p:nvPr>
+            <p:ph type="body" idx="1"/>
+          </p:nvPr>
+        </p:nvSpPr>
+        <p:spPr>
+          <a:xfrm>
+            <a:off x="1295401" y="4777381"/>
+            <a:ext cx="9609668" cy="860400"/>
+          </a:xfrm>
+        </p:spPr>
+        <p:txBody>
+          <a:bodyPr anchor="t">
+            <a:normAutofit/>
+          </a:bodyPr>
+          <a:lstStyle>
+            <a:lvl1pPr marL="0" indent="0" algn="l">
+              <a:buNone/>
+              <a:defRPr sz="2000">
+                <a:solidFill>
+                  <a:schemeClr val="tx1"/>
+                </a:solidFill>
+              </a:defRPr>
+            </a:lvl1pPr>
+            <a:lvl2pPr marL="457200" indent="0">
+              <a:buNone/>
+              <a:defRPr sz="1800">
+                <a:solidFill>
+                  <a:schemeClr val="tx1">
+                    <a:tint val="75000"/>
+                  </a:schemeClr>
+                </a:solidFill>
+              </a:defRPr>
+            </a:lvl2pPr>
+            <a:lvl3pPr marL="914400" indent="0">
+              <a:buNone/>
+              <a:defRPr sz="1600">
+                <a:solidFill>
+                  <a:schemeClr val="tx1">
+                    <a:tint val="75000"/>
+                  </a:schemeClr>
+                </a:solidFill>
+              </a:defRPr>
+            </a:lvl3pPr>
+            <a:lvl4pPr marL="1371600" indent="0">
+              <a:buNone/>
+              <a:defRPr sz="1400">
+                <a:solidFill>
+                  <a:schemeClr val="tx1">
+                    <a:tint val="75000"/>
+                  </a:schemeClr>
+                </a:solidFill>
+              </a:defRPr>
+            </a:lvl4pPr>
+            <a:lvl5pPr marL="1828800" indent="0">
+              <a:buNone/>
+              <a:defRPr sz="1400">
+                <a:solidFill>
+                  <a:schemeClr val="tx1">
+                    <a:tint val="75000"/>
+                  </a:schemeClr>
+                </a:solidFill>
+              </a:defRPr>
+            </a:lvl5pPr>
+            <a:lvl6pPr marL="2286000" indent="0">
+              <a:buNone/>
+              <a:defRPr sz="1400">
+                <a:solidFill>
+                  <a:schemeClr val="tx1">
+                    <a:tint val="75000"/>
+                  </a:schemeClr>
+                </a:solidFill>
+              </a:defRPr>
+            </a:lvl6pPr>
+            <a:lvl7pPr marL="2743200" indent="0">
+              <a:buNone/>
+              <a:defRPr sz="1400">
+                <a:solidFill>
+                  <a:schemeClr val="tx1">
+                    <a:tint val="75000"/>
+                  </a:schemeClr>
+                </a:solidFill>
+              </a:defRPr>
+            </a:lvl7pPr>
+            <a:lvl8pPr marL="3200400" indent="0">
+              <a:buNone/>
+              <a:defRPr sz="1400">
+                <a:solidFill>
+                  <a:schemeClr val="tx1">
+                    <a:tint val="75000"/>
+                  </a:schemeClr>
+                </a:solidFill>
+              </a:defRPr>
+            </a:lvl8pPr>
+            <a:lvl9pPr marL="3657600" indent="0">
+              <a:buNone/>
+              <a:defRPr sz="1400">
+                <a:solidFill>
+                  <a:schemeClr val="tx1">
+                    <a:tint val="75000"/>
+                  </a:schemeClr>
+                </a:solidFill>
+              </a:defRPr>
+            </a:lvl9pPr>
+          </a:lstStyle>
+          <a:p>
+            <a:pPr lvl="0"/>
+            <a:r>
+              <a:rPr lang="en-US"/>
+              <a:t>Click to edit Master text styles</a:t>
+            </a:r>
+          </a:p>
+        </p:txBody>
+      </p:sp>
+      <p:sp>
+        <p:nvSpPr>
+          <p:cNvPr id="4" name="Date Placeholder 3"/>
+          <p:cNvSpPr>
+            <a:spLocks noGrp="1"/>
+          </p:cNvSpPr>
+          <p:nvPr>
+            <p:ph type="dt" sz="half" idx="10"/>
+          </p:nvPr>
+        </p:nvSpPr>
+        <p:spPr/>
+        <p:txBody>
+          <a:bodyPr/>
+          <a:lstStyle/>
+          <a:p>
+            <a:fld id="{5BCAD085-E8A6-8845-BD4E-CB4CCA059FC4}" type="datetimeFigureOut">
+              <a:rPr lang="en-US" smtClean="0"/>
+              <a:t>5/25/2026</a:t>
+            </a:fld>
+            <a:endParaRPr lang="en-US"/>
+          </a:p>
+        </p:txBody>
+      </p:sp>
+      <p:sp>
+        <p:nvSpPr>
+          <p:cNvPr id="5" name="Footer Placeholder 4"/>
+          <p:cNvSpPr>
+            <a:spLocks noGrp="1"/>
+          </p:cNvSpPr>
+          <p:nvPr>
+            <p:ph type="ftr" sz="quarter" idx="11"/>
+          </p:nvPr>
+        </p:nvSpPr>
+        <p:spPr/>
+        <p:txBody>
+          <a:bodyPr/>
+          <a:lstStyle/>
+          <a:p>
+            <a:endParaRPr lang="en-US"/>
+          </a:p>
+        </p:txBody>
+      </p:sp>
+      <p:sp>
+        <p:nvSpPr>
+          <p:cNvPr id="6" name="Slide Number Placeholder 5"/>
+          <p:cNvSpPr>
+            <a:spLocks noGrp="1"/>
+          </p:cNvSpPr>
+          <p:nvPr>
+            <p:ph type="sldNum" sz="quarter" idx="12"/>
+          </p:nvPr>
+        </p:nvSpPr>
+        <p:spPr/>
+        <p:txBody>
+          <a:bodyPr/>
+          <a:lstStyle/>
+          <a:p>
+            <a:fld id="{C1FF6DA9-008F-8B48-92A6-B652298478BF}" type="slidenum">
+              <a:rPr lang="en-US" smtClean="0"/>
+              <a:t>‹#›</a:t>
+            </a:fld>
+            <a:endParaRPr lang="en-US"/>
+          </a:p>
+        </p:txBody>
+      </p:sp>
+    </p:spTree>
+    <p:extLst>
+      <p:ext uri="{BB962C8B-B14F-4D97-AF65-F5344CB8AC3E}">
+        <p14:creationId xmlns:p14="http://schemas.microsoft.com/office/powerpoint/2010/main" val="705380345"/>
+      </p:ext>
+    </p:extLst>
+  </p:cSld>
+  <p:clrMapOvr>
+    <a:masterClrMapping/>
+  </p:clrMapOvr>
+</p:sldLayout>
+</file>
+
+<file path=ppt/slideLayouts/slideLayout14.xml><?xml version="1.0" encoding="utf-8"?>
+<p:sldLayout xmlns:a="http://schemas.openxmlformats.org/drawingml/2006/main" xmlns:r="http://schemas.openxmlformats.org/officeDocument/2006/relationships" xmlns:p="http://schemas.openxmlformats.org/presentationml/2006/main" preserve="1">
+  <p:cSld name="Quote Name Card">
+    <p:spTree>
+      <p:nvGrpSpPr>
+        <p:cNvPr id="1" name=""/>
+        <p:cNvGrpSpPr/>
+        <p:nvPr/>
+      </p:nvGrpSpPr>
+      <p:grpSpPr>
+        <a:xfrm>
+          <a:off x="0" y="0"/>
+          <a:ext cx="0" cy="0"/>
+          <a:chOff x="0" y="0"/>
+          <a:chExt cx="0" cy="0"/>
+        </a:xfrm>
+      </p:grpSpPr>
+      <p:sp>
+        <p:nvSpPr>
+          <p:cNvPr id="2" name="Title 1"/>
+          <p:cNvSpPr>
+            <a:spLocks noGrp="1"/>
+          </p:cNvSpPr>
+          <p:nvPr>
+            <p:ph type="title"/>
+          </p:nvPr>
+        </p:nvSpPr>
+        <p:spPr>
+          <a:xfrm>
+            <a:off x="1446213" y="982132"/>
+            <a:ext cx="9296398" cy="2243668"/>
+          </a:xfrm>
+        </p:spPr>
+        <p:txBody>
+          <a:bodyPr anchor="ctr">
+            <a:normAutofit/>
+          </a:bodyPr>
+          <a:lstStyle>
+            <a:lvl1pPr algn="ctr">
+              <a:defRPr sz="3200" b="0" cap="none">
+                <a:solidFill>
+                  <a:schemeClr val="tx1"/>
+                </a:solidFill>
+              </a:defRPr>
+            </a:lvl1pPr>
+          </a:lstStyle>
+          <a:p>
+            <a:r>
+              <a:rPr lang="en-US"/>
+              <a:t>Click to edit Master title style</a:t>
+            </a:r>
+            <a:endParaRPr lang="en-US" dirty="0"/>
+          </a:p>
+        </p:txBody>
+      </p:sp>
+      <p:sp>
+        <p:nvSpPr>
+          <p:cNvPr id="23" name="Text Placeholder 2"/>
+          <p:cNvSpPr>
+            <a:spLocks noGrp="1"/>
+          </p:cNvSpPr>
+          <p:nvPr>
+            <p:ph type="body" idx="13"/>
+          </p:nvPr>
+        </p:nvSpPr>
+        <p:spPr>
+          <a:xfrm>
+            <a:off x="1295401" y="3639312"/>
+            <a:ext cx="9609668" cy="886968"/>
+          </a:xfrm>
+        </p:spPr>
+        <p:txBody>
+          <a:bodyPr anchor="b">
+            <a:normAutofit/>
+          </a:bodyPr>
+          <a:lstStyle>
+            <a:lvl1pPr marL="0" indent="0" algn="l">
+              <a:spcBef>
+                <a:spcPts val="0"/>
+              </a:spcBef>
+              <a:buNone/>
+              <a:defRPr sz="2400">
+                <a:solidFill>
+                  <a:schemeClr val="tx1"/>
+                </a:solidFill>
+              </a:defRPr>
+            </a:lvl1pPr>
+            <a:lvl2pPr marL="457200" indent="0">
+              <a:buNone/>
+              <a:defRPr sz="1800">
+                <a:solidFill>
+                  <a:schemeClr val="tx1">
+                    <a:tint val="75000"/>
+                  </a:schemeClr>
+                </a:solidFill>
+              </a:defRPr>
+            </a:lvl2pPr>
+            <a:lvl3pPr marL="914400" indent="0">
+              <a:buNone/>
+              <a:defRPr sz="1600">
+                <a:solidFill>
+                  <a:schemeClr val="tx1">
+                    <a:tint val="75000"/>
+                  </a:schemeClr>
+                </a:solidFill>
+              </a:defRPr>
+            </a:lvl3pPr>
+            <a:lvl4pPr marL="1371600" indent="0">
+              <a:buNone/>
+              <a:defRPr sz="1400">
+                <a:solidFill>
+                  <a:schemeClr val="tx1">
+                    <a:tint val="75000"/>
+                  </a:schemeClr>
+                </a:solidFill>
+              </a:defRPr>
+            </a:lvl4pPr>
+            <a:lvl5pPr marL="1828800" indent="0">
+              <a:buNone/>
+              <a:defRPr sz="1400">
+                <a:solidFill>
+                  <a:schemeClr val="tx1">
+                    <a:tint val="75000"/>
+                  </a:schemeClr>
+                </a:solidFill>
+              </a:defRPr>
+            </a:lvl5pPr>
+            <a:lvl6pPr marL="2286000" indent="0">
+              <a:buNone/>
+              <a:defRPr sz="1400">
+                <a:solidFill>
+                  <a:schemeClr val="tx1">
+                    <a:tint val="75000"/>
+                  </a:schemeClr>
+                </a:solidFill>
+              </a:defRPr>
+            </a:lvl6pPr>
+            <a:lvl7pPr marL="2743200" indent="0">
+              <a:buNone/>
+              <a:defRPr sz="1400">
+                <a:solidFill>
+                  <a:schemeClr val="tx1">
+                    <a:tint val="75000"/>
+                  </a:schemeClr>
+                </a:solidFill>
+              </a:defRPr>
+            </a:lvl7pPr>
+            <a:lvl8pPr marL="3200400" indent="0">
+              <a:buNone/>
+              <a:defRPr sz="1400">
+                <a:solidFill>
+                  <a:schemeClr val="tx1">
+                    <a:tint val="75000"/>
+                  </a:schemeClr>
+                </a:solidFill>
+              </a:defRPr>
+            </a:lvl8pPr>
+            <a:lvl9pPr marL="3657600" indent="0">
+              <a:buNone/>
+              <a:defRPr sz="1400">
+                <a:solidFill>
+                  <a:schemeClr val="tx1">
+                    <a:tint val="75000"/>
+                  </a:schemeClr>
+                </a:solidFill>
+              </a:defRPr>
+            </a:lvl9pPr>
+          </a:lstStyle>
+          <a:p>
+            <a:pPr lvl="0"/>
+            <a:r>
+              <a:rPr lang="en-US"/>
+              <a:t>Click to edit Master text styles</a:t>
+            </a:r>
+          </a:p>
+        </p:txBody>
+      </p:sp>
+      <p:sp>
+        <p:nvSpPr>
+          <p:cNvPr id="3" name="Text Placeholder 2"/>
+          <p:cNvSpPr>
+            <a:spLocks noGrp="1"/>
+          </p:cNvSpPr>
+          <p:nvPr>
+            <p:ph type="body" idx="1"/>
+          </p:nvPr>
+        </p:nvSpPr>
+        <p:spPr>
+          <a:xfrm>
+            <a:off x="1295401" y="4529667"/>
+            <a:ext cx="9609668" cy="1346200"/>
+          </a:xfrm>
+        </p:spPr>
+        <p:txBody>
+          <a:bodyPr anchor="t">
+            <a:normAutofit/>
+          </a:bodyPr>
+          <a:lstStyle>
+            <a:lvl1pPr marL="0" indent="0" algn="l">
+              <a:buNone/>
+              <a:defRPr sz="1800">
+                <a:solidFill>
+                  <a:schemeClr val="tx1"/>
+                </a:solidFill>
+              </a:defRPr>
+            </a:lvl1pPr>
+            <a:lvl2pPr marL="457200" indent="0">
+              <a:buNone/>
+              <a:defRPr sz="1800">
+                <a:solidFill>
+                  <a:schemeClr val="tx1">
+                    <a:tint val="75000"/>
+                  </a:schemeClr>
+                </a:solidFill>
+              </a:defRPr>
+            </a:lvl2pPr>
+            <a:lvl3pPr marL="914400" indent="0">
+              <a:buNone/>
+              <a:defRPr sz="1600">
+                <a:solidFill>
+                  <a:schemeClr val="tx1">
+                    <a:tint val="75000"/>
+                  </a:schemeClr>
+                </a:solidFill>
+              </a:defRPr>
+            </a:lvl3pPr>
+            <a:lvl4pPr marL="1371600" indent="0">
+              <a:buNone/>
+              <a:defRPr sz="1400">
+                <a:solidFill>
+                  <a:schemeClr val="tx1">
+                    <a:tint val="75000"/>
+                  </a:schemeClr>
+                </a:solidFill>
+              </a:defRPr>
+            </a:lvl4pPr>
+            <a:lvl5pPr marL="1828800" indent="0">
+              <a:buNone/>
+              <a:defRPr sz="1400">
+                <a:solidFill>
+                  <a:schemeClr val="tx1">
+                    <a:tint val="75000"/>
+                  </a:schemeClr>
+                </a:solidFill>
+              </a:defRPr>
+            </a:lvl5pPr>
+            <a:lvl6pPr marL="2286000" indent="0">
+              <a:buNone/>
+              <a:defRPr sz="1400">
+                <a:solidFill>
+                  <a:schemeClr val="tx1">
+                    <a:tint val="75000"/>
+                  </a:schemeClr>
+                </a:solidFill>
+              </a:defRPr>
+            </a:lvl6pPr>
+            <a:lvl7pPr marL="2743200" indent="0">
+              <a:buNone/>
+              <a:defRPr sz="1400">
+                <a:solidFill>
+                  <a:schemeClr val="tx1">
+                    <a:tint val="75000"/>
+                  </a:schemeClr>
+                </a:solidFill>
+              </a:defRPr>
+            </a:lvl7pPr>
+            <a:lvl8pPr marL="3200400" indent="0">
+              <a:buNone/>
+              <a:defRPr sz="1400">
+                <a:solidFill>
+                  <a:schemeClr val="tx1">
+                    <a:tint val="75000"/>
+                  </a:schemeClr>
+                </a:solidFill>
+              </a:defRPr>
+            </a:lvl8pPr>
+            <a:lvl9pPr marL="3657600" indent="0">
+              <a:buNone/>
+              <a:defRPr sz="1400">
+                <a:solidFill>
+                  <a:schemeClr val="tx1">
+                    <a:tint val="75000"/>
+                  </a:schemeClr>
+                </a:solidFill>
+              </a:defRPr>
+            </a:lvl9pPr>
+          </a:lstStyle>
+          <a:p>
+            <a:pPr lvl="0"/>
+            <a:r>
+              <a:rPr lang="en-US"/>
+              <a:t>Click to edit Master text styles</a:t>
+            </a:r>
+          </a:p>
+        </p:txBody>
+      </p:sp>
+      <p:sp>
+        <p:nvSpPr>
+          <p:cNvPr id="4" name="Date Placeholder 3"/>
+          <p:cNvSpPr>
+            <a:spLocks noGrp="1"/>
+          </p:cNvSpPr>
+          <p:nvPr>
+            <p:ph type="dt" sz="half" idx="10"/>
+          </p:nvPr>
+        </p:nvSpPr>
+        <p:spPr/>
+        <p:txBody>
+          <a:bodyPr/>
+          <a:lstStyle/>
+          <a:p>
+            <a:fld id="{5BCAD085-E8A6-8845-BD4E-CB4CCA059FC4}" type="datetimeFigureOut">
+              <a:rPr lang="en-US" smtClean="0"/>
+              <a:t>5/25/2026</a:t>
+            </a:fld>
+            <a:endParaRPr lang="en-US"/>
+          </a:p>
+        </p:txBody>
+      </p:sp>
+      <p:sp>
+        <p:nvSpPr>
+          <p:cNvPr id="5" name="Footer Placeholder 4"/>
+          <p:cNvSpPr>
+            <a:spLocks noGrp="1"/>
+          </p:cNvSpPr>
+          <p:nvPr>
+            <p:ph type="ftr" sz="quarter" idx="11"/>
+          </p:nvPr>
+        </p:nvSpPr>
+        <p:spPr/>
+        <p:txBody>
+          <a:bodyPr/>
+          <a:lstStyle/>
+          <a:p>
+            <a:endParaRPr lang="en-US"/>
+          </a:p>
+        </p:txBody>
+      </p:sp>
+      <p:sp>
+        <p:nvSpPr>
+          <p:cNvPr id="6" name="Slide Number Placeholder 5"/>
+          <p:cNvSpPr>
+            <a:spLocks noGrp="1"/>
+          </p:cNvSpPr>
+          <p:nvPr>
+            <p:ph type="sldNum" sz="quarter" idx="12"/>
+          </p:nvPr>
+        </p:nvSpPr>
+        <p:spPr/>
+        <p:txBody>
+          <a:bodyPr/>
+          <a:lstStyle/>
+          <a:p>
+            <a:fld id="{C1FF6DA9-008F-8B48-92A6-B652298478BF}" type="slidenum">
+              <a:rPr lang="en-US" smtClean="0"/>
+              <a:t>‹#›</a:t>
+            </a:fld>
+            <a:endParaRPr lang="en-US"/>
+          </a:p>
+        </p:txBody>
+      </p:sp>
+      <p:sp>
+        <p:nvSpPr>
+          <p:cNvPr id="12" name="TextBox 11"/>
+          <p:cNvSpPr txBox="1"/>
+          <p:nvPr/>
+        </p:nvSpPr>
+        <p:spPr>
+          <a:xfrm>
+            <a:off x="862013" y="879961"/>
+            <a:ext cx="609600" cy="584776"/>
+          </a:xfrm>
+          <a:prstGeom prst="rect">
+            <a:avLst/>
+          </a:prstGeom>
+        </p:spPr>
+        <p:txBody>
+          <a:bodyPr vert="horz" lIns="91440" tIns="45720" rIns="91440" bIns="45720" rtlCol="0" anchor="ctr">
+            <a:noAutofit/>
+          </a:bodyPr>
+          <a:lstStyle/>
+          <a:p>
+            <a:pPr lvl="0"/>
+            <a:r>
+              <a:rPr lang="en-US" sz="8000" dirty="0">
+                <a:solidFill>
+                  <a:schemeClr val="tx1"/>
+                </a:solidFill>
+                <a:effectLst/>
+              </a:rPr>
+              <a:t>“</a:t>
+            </a:r>
+          </a:p>
+        </p:txBody>
+      </p:sp>
+      <p:sp>
+        <p:nvSpPr>
+          <p:cNvPr id="13" name="TextBox 12"/>
+          <p:cNvSpPr txBox="1"/>
+          <p:nvPr/>
+        </p:nvSpPr>
+        <p:spPr>
+          <a:xfrm>
+            <a:off x="10600267" y="2599261"/>
+            <a:ext cx="609600" cy="584776"/>
+          </a:xfrm>
+          <a:prstGeom prst="rect">
+            <a:avLst/>
+          </a:prstGeom>
+        </p:spPr>
+        <p:txBody>
+          <a:bodyPr vert="horz" lIns="91440" tIns="45720" rIns="91440" bIns="45720" rtlCol="0" anchor="ctr">
+            <a:noAutofit/>
+          </a:bodyPr>
+          <a:lstStyle/>
+          <a:p>
+            <a:pPr lvl="0" algn="r"/>
+            <a:r>
+              <a:rPr lang="en-US" sz="8000" dirty="0">
+                <a:solidFill>
+                  <a:schemeClr val="tx1"/>
+                </a:solidFill>
+                <a:effectLst/>
+              </a:rPr>
+              <a:t>”</a:t>
+            </a:r>
+          </a:p>
+        </p:txBody>
+      </p:sp>
+      <p:cxnSp>
+        <p:nvCxnSpPr>
+          <p:cNvPr id="26" name="Straight Connector 25"/>
+          <p:cNvCxnSpPr/>
+          <p:nvPr/>
+        </p:nvCxnSpPr>
+        <p:spPr>
+          <a:xfrm>
+            <a:off x="1396169" y="3429000"/>
+            <a:ext cx="9407298" cy="0"/>
+          </a:xfrm>
+          <a:prstGeom prst="line">
+            <a:avLst/>
+          </a:prstGeom>
+          <a:ln w="15875"/>
+        </p:spPr>
+        <p:style>
+          <a:lnRef idx="2">
+            <a:schemeClr val="accent1"/>
+          </a:lnRef>
+          <a:fillRef idx="0">
+            <a:schemeClr val="accent1"/>
+          </a:fillRef>
+          <a:effectRef idx="1">
+            <a:schemeClr val="accent1"/>
+          </a:effectRef>
+          <a:fontRef idx="minor">
+            <a:schemeClr val="tx1"/>
+          </a:fontRef>
+        </p:style>
+      </p:cxnSp>
+    </p:spTree>
+    <p:extLst>
+      <p:ext uri="{BB962C8B-B14F-4D97-AF65-F5344CB8AC3E}">
+        <p14:creationId xmlns:p14="http://schemas.microsoft.com/office/powerpoint/2010/main" val="1014241098"/>
+      </p:ext>
+    </p:extLst>
+  </p:cSld>
+  <p:clrMapOvr>
+    <a:masterClrMapping/>
+  </p:clrMapOvr>
+</p:sldLayout>
+</file>
+
+<file path=ppt/slideLayouts/slideLayout15.xml><?xml version="1.0" encoding="utf-8"?>
+<p:sldLayout xmlns:a="http://schemas.openxmlformats.org/drawingml/2006/main" xmlns:r="http://schemas.openxmlformats.org/officeDocument/2006/relationships" xmlns:p="http://schemas.openxmlformats.org/presentationml/2006/main" preserve="1">
+  <p:cSld name="True or False">
+    <p:spTree>
+      <p:nvGrpSpPr>
+        <p:cNvPr id="1" name=""/>
+        <p:cNvGrpSpPr/>
+        <p:nvPr/>
+      </p:nvGrpSpPr>
+      <p:grpSpPr>
+        <a:xfrm>
+          <a:off x="0" y="0"/>
+          <a:ext cx="0" cy="0"/>
+          <a:chOff x="0" y="0"/>
+          <a:chExt cx="0" cy="0"/>
+        </a:xfrm>
+      </p:grpSpPr>
+      <p:sp>
+        <p:nvSpPr>
+          <p:cNvPr id="2" name="Title 1"/>
+          <p:cNvSpPr>
+            <a:spLocks noGrp="1"/>
+          </p:cNvSpPr>
+          <p:nvPr>
+            <p:ph type="title"/>
+          </p:nvPr>
+        </p:nvSpPr>
+        <p:spPr>
+          <a:xfrm>
+            <a:off x="1295401" y="982132"/>
+            <a:ext cx="9609666" cy="2243668"/>
+          </a:xfrm>
+        </p:spPr>
+        <p:txBody>
+          <a:bodyPr vert="horz" lIns="91440" tIns="45720" rIns="91440" bIns="45720" rtlCol="0" anchor="ctr">
+            <a:normAutofit/>
+          </a:bodyPr>
+          <a:lstStyle>
+            <a:lvl1pPr>
+              <a:defRPr lang="en-US" b="0" dirty="0"/>
+            </a:lvl1pPr>
+          </a:lstStyle>
+          <a:p>
+            <a:pPr marL="0" lvl="0"/>
+            <a:r>
+              <a:rPr lang="en-US"/>
+              <a:t>Click to edit Master title style</a:t>
+            </a:r>
+            <a:endParaRPr lang="en-US" dirty="0"/>
+          </a:p>
+        </p:txBody>
+      </p:sp>
+      <p:sp>
+        <p:nvSpPr>
+          <p:cNvPr id="20" name="Text Placeholder 2"/>
+          <p:cNvSpPr>
+            <a:spLocks noGrp="1"/>
+          </p:cNvSpPr>
+          <p:nvPr>
+            <p:ph type="body" idx="13"/>
+          </p:nvPr>
+        </p:nvSpPr>
+        <p:spPr>
+          <a:xfrm>
+            <a:off x="1295401" y="3630168"/>
+            <a:ext cx="9609668" cy="841248"/>
+          </a:xfrm>
+        </p:spPr>
+        <p:txBody>
+          <a:bodyPr anchor="b">
+            <a:normAutofit/>
+          </a:bodyPr>
+          <a:lstStyle>
+            <a:lvl1pPr marL="0" indent="0" algn="l">
+              <a:spcBef>
+                <a:spcPts val="0"/>
+              </a:spcBef>
+              <a:buNone/>
+              <a:defRPr sz="2800">
+                <a:solidFill>
+                  <a:schemeClr val="tx1"/>
+                </a:solidFill>
+              </a:defRPr>
+            </a:lvl1pPr>
+            <a:lvl2pPr marL="457200" indent="0">
+              <a:buNone/>
+              <a:defRPr sz="1800">
+                <a:solidFill>
+                  <a:schemeClr val="tx1">
+                    <a:tint val="75000"/>
+                  </a:schemeClr>
+                </a:solidFill>
+              </a:defRPr>
+            </a:lvl2pPr>
+            <a:lvl3pPr marL="914400" indent="0">
+              <a:buNone/>
+              <a:defRPr sz="1600">
+                <a:solidFill>
+                  <a:schemeClr val="tx1">
+                    <a:tint val="75000"/>
+                  </a:schemeClr>
+                </a:solidFill>
+              </a:defRPr>
+            </a:lvl3pPr>
+            <a:lvl4pPr marL="1371600" indent="0">
+              <a:buNone/>
+              <a:defRPr sz="1400">
+                <a:solidFill>
+                  <a:schemeClr val="tx1">
+                    <a:tint val="75000"/>
+                  </a:schemeClr>
+                </a:solidFill>
+              </a:defRPr>
+            </a:lvl4pPr>
+            <a:lvl5pPr marL="1828800" indent="0">
+              <a:buNone/>
+              <a:defRPr sz="1400">
+                <a:solidFill>
+                  <a:schemeClr val="tx1">
+                    <a:tint val="75000"/>
+                  </a:schemeClr>
+                </a:solidFill>
+              </a:defRPr>
+            </a:lvl5pPr>
+            <a:lvl6pPr marL="2286000" indent="0">
+              <a:buNone/>
+              <a:defRPr sz="1400">
+                <a:solidFill>
+                  <a:schemeClr val="tx1">
+                    <a:tint val="75000"/>
+                  </a:schemeClr>
+                </a:solidFill>
+              </a:defRPr>
+            </a:lvl6pPr>
+            <a:lvl7pPr marL="2743200" indent="0">
+              <a:buNone/>
+              <a:defRPr sz="1400">
+                <a:solidFill>
+                  <a:schemeClr val="tx1">
+                    <a:tint val="75000"/>
+                  </a:schemeClr>
+                </a:solidFill>
+              </a:defRPr>
+            </a:lvl7pPr>
+            <a:lvl8pPr marL="3200400" indent="0">
+              <a:buNone/>
+              <a:defRPr sz="1400">
+                <a:solidFill>
+                  <a:schemeClr val="tx1">
+                    <a:tint val="75000"/>
+                  </a:schemeClr>
+                </a:solidFill>
+              </a:defRPr>
+            </a:lvl8pPr>
+            <a:lvl9pPr marL="3657600" indent="0">
+              <a:buNone/>
+              <a:defRPr sz="1400">
+                <a:solidFill>
+                  <a:schemeClr val="tx1">
+                    <a:tint val="75000"/>
+                  </a:schemeClr>
+                </a:solidFill>
+              </a:defRPr>
+            </a:lvl9pPr>
+          </a:lstStyle>
+          <a:p>
+            <a:pPr lvl="0"/>
+            <a:r>
+              <a:rPr lang="en-US"/>
+              <a:t>Click to edit Master text styles</a:t>
+            </a:r>
+          </a:p>
+        </p:txBody>
+      </p:sp>
+      <p:sp>
+        <p:nvSpPr>
+          <p:cNvPr id="3" name="Text Placeholder 2"/>
+          <p:cNvSpPr>
+            <a:spLocks noGrp="1"/>
+          </p:cNvSpPr>
+          <p:nvPr>
+            <p:ph type="body" idx="1"/>
+          </p:nvPr>
+        </p:nvSpPr>
+        <p:spPr>
+          <a:xfrm>
+            <a:off x="1295400" y="4470399"/>
+            <a:ext cx="9609670" cy="1405467"/>
+          </a:xfrm>
+        </p:spPr>
+        <p:txBody>
+          <a:bodyPr anchor="t">
+            <a:normAutofit/>
+          </a:bodyPr>
+          <a:lstStyle>
+            <a:lvl1pPr marL="0" indent="0" algn="l">
+              <a:buNone/>
+              <a:defRPr sz="1800">
+                <a:solidFill>
+                  <a:schemeClr val="tx1"/>
+                </a:solidFill>
+              </a:defRPr>
+            </a:lvl1pPr>
+            <a:lvl2pPr marL="457200" indent="0">
+              <a:buNone/>
+              <a:defRPr sz="1800">
+                <a:solidFill>
+                  <a:schemeClr val="tx1">
+                    <a:tint val="75000"/>
+                  </a:schemeClr>
+                </a:solidFill>
+              </a:defRPr>
+            </a:lvl2pPr>
+            <a:lvl3pPr marL="914400" indent="0">
+              <a:buNone/>
+              <a:defRPr sz="1600">
+                <a:solidFill>
+                  <a:schemeClr val="tx1">
+                    <a:tint val="75000"/>
+                  </a:schemeClr>
+                </a:solidFill>
+              </a:defRPr>
+            </a:lvl3pPr>
+            <a:lvl4pPr marL="1371600" indent="0">
+              <a:buNone/>
+              <a:defRPr sz="1400">
+                <a:solidFill>
+                  <a:schemeClr val="tx1">
+                    <a:tint val="75000"/>
+                  </a:schemeClr>
+                </a:solidFill>
+              </a:defRPr>
+            </a:lvl4pPr>
+            <a:lvl5pPr marL="1828800" indent="0">
+              <a:buNone/>
+              <a:defRPr sz="1400">
+                <a:solidFill>
+                  <a:schemeClr val="tx1">
+                    <a:tint val="75000"/>
+                  </a:schemeClr>
+                </a:solidFill>
+              </a:defRPr>
+            </a:lvl5pPr>
+            <a:lvl6pPr marL="2286000" indent="0">
+              <a:buNone/>
+              <a:defRPr sz="1400">
+                <a:solidFill>
+                  <a:schemeClr val="tx1">
+                    <a:tint val="75000"/>
+                  </a:schemeClr>
+                </a:solidFill>
+              </a:defRPr>
+            </a:lvl6pPr>
+            <a:lvl7pPr marL="2743200" indent="0">
+              <a:buNone/>
+              <a:defRPr sz="1400">
+                <a:solidFill>
+                  <a:schemeClr val="tx1">
+                    <a:tint val="75000"/>
+                  </a:schemeClr>
+                </a:solidFill>
+              </a:defRPr>
+            </a:lvl7pPr>
+            <a:lvl8pPr marL="3200400" indent="0">
+              <a:buNone/>
+              <a:defRPr sz="1400">
+                <a:solidFill>
+                  <a:schemeClr val="tx1">
+                    <a:tint val="75000"/>
+                  </a:schemeClr>
+                </a:solidFill>
+              </a:defRPr>
+            </a:lvl8pPr>
+            <a:lvl9pPr marL="3657600" indent="0">
+              <a:buNone/>
+              <a:defRPr sz="1400">
+                <a:solidFill>
+                  <a:schemeClr val="tx1">
+                    <a:tint val="75000"/>
+                  </a:schemeClr>
+                </a:solidFill>
+              </a:defRPr>
+            </a:lvl9pPr>
+          </a:lstStyle>
+          <a:p>
+            <a:pPr lvl="0"/>
+            <a:r>
+              <a:rPr lang="en-US"/>
+              <a:t>Click to edit Master text styles</a:t>
+            </a:r>
+          </a:p>
+        </p:txBody>
+      </p:sp>
+      <p:sp>
+        <p:nvSpPr>
+          <p:cNvPr id="4" name="Date Placeholder 3"/>
+          <p:cNvSpPr>
+            <a:spLocks noGrp="1"/>
+          </p:cNvSpPr>
+          <p:nvPr>
+            <p:ph type="dt" sz="half" idx="10"/>
+          </p:nvPr>
+        </p:nvSpPr>
+        <p:spPr/>
+        <p:txBody>
+          <a:bodyPr/>
+          <a:lstStyle/>
+          <a:p>
+            <a:fld id="{5BCAD085-E8A6-8845-BD4E-CB4CCA059FC4}" type="datetimeFigureOut">
+              <a:rPr lang="en-US" smtClean="0"/>
+              <a:t>5/25/2026</a:t>
+            </a:fld>
+            <a:endParaRPr lang="en-US"/>
+          </a:p>
+        </p:txBody>
+      </p:sp>
+      <p:sp>
+        <p:nvSpPr>
+          <p:cNvPr id="5" name="Footer Placeholder 4"/>
+          <p:cNvSpPr>
+            <a:spLocks noGrp="1"/>
+          </p:cNvSpPr>
+          <p:nvPr>
+            <p:ph type="ftr" sz="quarter" idx="11"/>
+          </p:nvPr>
+        </p:nvSpPr>
+        <p:spPr/>
+        <p:txBody>
+          <a:bodyPr/>
+          <a:lstStyle/>
+          <a:p>
+            <a:endParaRPr lang="en-US"/>
+          </a:p>
+        </p:txBody>
+      </p:sp>
+      <p:sp>
+        <p:nvSpPr>
+          <p:cNvPr id="6" name="Slide Number Placeholder 5"/>
+          <p:cNvSpPr>
+            <a:spLocks noGrp="1"/>
+          </p:cNvSpPr>
+          <p:nvPr>
+            <p:ph type="sldNum" sz="quarter" idx="12"/>
+          </p:nvPr>
+        </p:nvSpPr>
+        <p:spPr/>
+        <p:txBody>
+          <a:bodyPr/>
+          <a:lstStyle/>
+          <a:p>
+            <a:fld id="{C1FF6DA9-008F-8B48-92A6-B652298478BF}" type="slidenum">
+              <a:rPr lang="en-US" smtClean="0"/>
+              <a:t>‹#›</a:t>
+            </a:fld>
+            <a:endParaRPr lang="en-US"/>
+          </a:p>
+        </p:txBody>
+      </p:sp>
+      <p:cxnSp>
+        <p:nvCxnSpPr>
+          <p:cNvPr id="15" name="Straight Connector 14"/>
+          <p:cNvCxnSpPr/>
+          <p:nvPr/>
+        </p:nvCxnSpPr>
+        <p:spPr>
+          <a:xfrm>
+            <a:off x="1396169" y="3429000"/>
+            <a:ext cx="9407298" cy="0"/>
+          </a:xfrm>
+          <a:prstGeom prst="line">
+            <a:avLst/>
+          </a:prstGeom>
+          <a:ln w="15875"/>
+        </p:spPr>
+        <p:style>
+          <a:lnRef idx="2">
+            <a:schemeClr val="accent1"/>
+          </a:lnRef>
+          <a:fillRef idx="0">
+            <a:schemeClr val="accent1"/>
+          </a:fillRef>
+          <a:effectRef idx="1">
+            <a:schemeClr val="accent1"/>
+          </a:effectRef>
+          <a:fontRef idx="minor">
+            <a:schemeClr val="tx1"/>
+          </a:fontRef>
+        </p:style>
+      </p:cxnSp>
+    </p:spTree>
+    <p:extLst>
+      <p:ext uri="{BB962C8B-B14F-4D97-AF65-F5344CB8AC3E}">
+        <p14:creationId xmlns:p14="http://schemas.microsoft.com/office/powerpoint/2010/main" val="1040371160"/>
+      </p:ext>
+    </p:extLst>
+  </p:cSld>
+  <p:clrMapOvr>
+    <a:masterClrMapping/>
+  </p:clrMapOvr>
+</p:sldLayout>
+</file>
+
+<file path=ppt/slideLayouts/slideLayout16.xml><?xml version="1.0" encoding="utf-8"?>
 <p:sldLayout xmlns:a="http://schemas.openxmlformats.org/drawingml/2006/main" xmlns:r="http://schemas.openxmlformats.org/officeDocument/2006/relationships" xmlns:p="http://schemas.openxmlformats.org/presentationml/2006/main" type="vertTx" preserve="1">
   <p:cSld name="Title and Vertical Text">
     <p:spTree>
@@ -382,13 +2691,17 @@
         <p:spPr/>
         <p:txBody>
           <a:bodyPr/>
-          <a:lstStyle/>
-          <a:p>
-            <a:r>
-              <a:rPr lang="en-US" smtClean="0"/>
+          <a:lstStyle>
+            <a:lvl1pPr algn="ctr">
+              <a:defRPr/>
+            </a:lvl1pPr>
+          </a:lstStyle>
+          <a:p>
+            <a:r>
+              <a:rPr lang="en-US"/>
               <a:t>Click to edit Master title style</a:t>
             </a:r>
-            <a:endParaRPr lang="en-US"/>
+            <a:endParaRPr lang="en-US" dirty="0"/>
           </a:p>
         </p:txBody>
       </p:sp>
@@ -404,43 +2717,43 @@
         </p:nvSpPr>
         <p:spPr/>
         <p:txBody>
-          <a:bodyPr vert="eaVert"/>
+          <a:bodyPr vert="eaVert" anchor="t"/>
           <a:lstStyle/>
           <a:p>
             <a:pPr lvl="0"/>
             <a:r>
-              <a:rPr lang="en-US" smtClean="0"/>
+              <a:rPr lang="en-US"/>
               <a:t>Click to edit Master text styles</a:t>
             </a:r>
           </a:p>
           <a:p>
             <a:pPr lvl="1"/>
             <a:r>
-              <a:rPr lang="en-US" smtClean="0"/>
+              <a:rPr lang="en-US"/>
               <a:t>Second level</a:t>
             </a:r>
           </a:p>
           <a:p>
             <a:pPr lvl="2"/>
             <a:r>
-              <a:rPr lang="en-US" smtClean="0"/>
+              <a:rPr lang="en-US"/>
               <a:t>Third level</a:t>
             </a:r>
           </a:p>
           <a:p>
             <a:pPr lvl="3"/>
             <a:r>
-              <a:rPr lang="en-US" smtClean="0"/>
+              <a:rPr lang="en-US"/>
               <a:t>Fourth level</a:t>
             </a:r>
           </a:p>
           <a:p>
             <a:pPr lvl="4"/>
             <a:r>
-              <a:rPr lang="en-US" smtClean="0"/>
+              <a:rPr lang="en-US"/>
               <a:t>Fifth level</a:t>
             </a:r>
-            <a:endParaRPr lang="en-US"/>
+            <a:endParaRPr lang="en-US" dirty="0"/>
           </a:p>
         </p:txBody>
       </p:sp>
@@ -461,7 +2774,7 @@
           <a:p>
             <a:fld id="{5BCAD085-E8A6-8845-BD4E-CB4CCA059FC4}" type="datetimeFigureOut">
               <a:rPr lang="en-US" smtClean="0"/>
-              <a:t>1/27/13</a:t>
+              <a:t>5/25/2026</a:t>
             </a:fld>
             <a:endParaRPr lang="en-US"/>
           </a:p>
@@ -509,10 +2822,41 @@
           </a:p>
         </p:txBody>
       </p:sp>
+      <p:cxnSp>
+        <p:nvCxnSpPr>
+          <p:cNvPr id="14" name="Straight Connector 13"/>
+          <p:cNvCxnSpPr/>
+          <p:nvPr/>
+        </p:nvCxnSpPr>
+        <p:spPr>
+          <a:xfrm>
+            <a:off x="1396169" y="2421466"/>
+            <a:ext cx="9407298" cy="0"/>
+          </a:xfrm>
+          <a:prstGeom prst="line">
+            <a:avLst/>
+          </a:prstGeom>
+          <a:ln w="15875"/>
+        </p:spPr>
+        <p:style>
+          <a:lnRef idx="2">
+            <a:schemeClr val="accent1"/>
+          </a:lnRef>
+          <a:fillRef idx="0">
+            <a:schemeClr val="accent1"/>
+          </a:fillRef>
+          <a:effectRef idx="1">
+            <a:schemeClr val="accent1"/>
+          </a:effectRef>
+          <a:fontRef idx="minor">
+            <a:schemeClr val="tx1"/>
+          </a:fontRef>
+        </p:style>
+      </p:cxnSp>
     </p:spTree>
     <p:extLst>
       <p:ext uri="{BB962C8B-B14F-4D97-AF65-F5344CB8AC3E}">
-        <p14:creationId xmlns:p14="http://schemas.microsoft.com/office/powerpoint/2010/main" val="2910927964"/>
+        <p14:creationId xmlns:p14="http://schemas.microsoft.com/office/powerpoint/2010/main" val="2407474840"/>
       </p:ext>
     </p:extLst>
   </p:cSld>
@@ -522,7 +2866,7 @@
 </p:sldLayout>
 </file>
 
-<file path=ppt/slideLayouts/slideLayout11.xml><?xml version="1.0" encoding="utf-8"?>
+<file path=ppt/slideLayouts/slideLayout17.xml><?xml version="1.0" encoding="utf-8"?>
 <p:sldLayout xmlns:a="http://schemas.openxmlformats.org/drawingml/2006/main" xmlns:r="http://schemas.openxmlformats.org/officeDocument/2006/relationships" xmlns:p="http://schemas.openxmlformats.org/presentationml/2006/main" type="vertTitleAndTx" preserve="1">
   <p:cSld name="Vertical Title and Text">
     <p:spTree>
@@ -551,8 +2895,8 @@
         </p:nvSpPr>
         <p:spPr>
           <a:xfrm>
-            <a:off x="6629400" y="274638"/>
-            <a:ext cx="2057400" cy="5851525"/>
+            <a:off x="8999356" y="982131"/>
+            <a:ext cx="1890895" cy="4893735"/>
           </a:xfrm>
         </p:spPr>
         <p:txBody>
@@ -560,10 +2904,10 @@
           <a:lstStyle/>
           <a:p>
             <a:r>
-              <a:rPr lang="en-US" smtClean="0"/>
+              <a:rPr lang="en-US"/>
               <a:t>Click to edit Master title style</a:t>
             </a:r>
-            <a:endParaRPr lang="en-US"/>
+            <a:endParaRPr lang="en-US" dirty="0"/>
           </a:p>
         </p:txBody>
       </p:sp>
@@ -579,48 +2923,48 @@
         </p:nvSpPr>
         <p:spPr>
           <a:xfrm>
-            <a:off x="457200" y="274638"/>
-            <a:ext cx="6019800" cy="5851525"/>
+            <a:off x="1295398" y="982132"/>
+            <a:ext cx="7433025" cy="4893734"/>
           </a:xfrm>
         </p:spPr>
         <p:txBody>
-          <a:bodyPr vert="eaVert"/>
+          <a:bodyPr vert="eaVert" anchor="t"/>
           <a:lstStyle/>
           <a:p>
             <a:pPr lvl="0"/>
             <a:r>
-              <a:rPr lang="en-US" smtClean="0"/>
+              <a:rPr lang="en-US"/>
               <a:t>Click to edit Master text styles</a:t>
             </a:r>
           </a:p>
           <a:p>
             <a:pPr lvl="1"/>
             <a:r>
-              <a:rPr lang="en-US" smtClean="0"/>
+              <a:rPr lang="en-US"/>
               <a:t>Second level</a:t>
             </a:r>
           </a:p>
           <a:p>
             <a:pPr lvl="2"/>
             <a:r>
-              <a:rPr lang="en-US" smtClean="0"/>
+              <a:rPr lang="en-US"/>
               <a:t>Third level</a:t>
             </a:r>
           </a:p>
           <a:p>
             <a:pPr lvl="3"/>
             <a:r>
-              <a:rPr lang="en-US" smtClean="0"/>
+              <a:rPr lang="en-US"/>
               <a:t>Fourth level</a:t>
             </a:r>
           </a:p>
           <a:p>
             <a:pPr lvl="4"/>
             <a:r>
-              <a:rPr lang="en-US" smtClean="0"/>
+              <a:rPr lang="en-US"/>
               <a:t>Fifth level</a:t>
             </a:r>
-            <a:endParaRPr lang="en-US"/>
+            <a:endParaRPr lang="en-US" dirty="0"/>
           </a:p>
         </p:txBody>
       </p:sp>
@@ -641,7 +2985,7 @@
           <a:p>
             <a:fld id="{5BCAD085-E8A6-8845-BD4E-CB4CCA059FC4}" type="datetimeFigureOut">
               <a:rPr lang="en-US" smtClean="0"/>
-              <a:t>1/27/13</a:t>
+              <a:t>5/25/2026</a:t>
             </a:fld>
             <a:endParaRPr lang="en-US"/>
           </a:p>
@@ -689,10 +3033,41 @@
           </a:p>
         </p:txBody>
       </p:sp>
+      <p:cxnSp>
+        <p:nvCxnSpPr>
+          <p:cNvPr id="14" name="Straight Connector 13"/>
+          <p:cNvCxnSpPr/>
+          <p:nvPr/>
+        </p:nvCxnSpPr>
+        <p:spPr>
+          <a:xfrm>
+            <a:off x="8863890" y="990600"/>
+            <a:ext cx="0" cy="4876800"/>
+          </a:xfrm>
+          <a:prstGeom prst="line">
+            <a:avLst/>
+          </a:prstGeom>
+          <a:ln w="15875"/>
+        </p:spPr>
+        <p:style>
+          <a:lnRef idx="2">
+            <a:schemeClr val="accent1"/>
+          </a:lnRef>
+          <a:fillRef idx="0">
+            <a:schemeClr val="accent1"/>
+          </a:fillRef>
+          <a:effectRef idx="1">
+            <a:schemeClr val="accent1"/>
+          </a:effectRef>
+          <a:fontRef idx="minor">
+            <a:schemeClr val="tx1"/>
+          </a:fontRef>
+        </p:style>
+      </p:cxnSp>
     </p:spTree>
     <p:extLst>
       <p:ext uri="{BB962C8B-B14F-4D97-AF65-F5344CB8AC3E}">
-        <p14:creationId xmlns:p14="http://schemas.microsoft.com/office/powerpoint/2010/main" val="3612223792"/>
+        <p14:creationId xmlns:p14="http://schemas.microsoft.com/office/powerpoint/2010/main" val="4168774872"/>
       </p:ext>
     </p:extLst>
   </p:cSld>
@@ -719,6 +3094,37 @@
           <a:chExt cx="0" cy="0"/>
         </a:xfrm>
       </p:grpSpPr>
+      <p:cxnSp>
+        <p:nvCxnSpPr>
+          <p:cNvPr id="7" name="Straight Connector 6"/>
+          <p:cNvCxnSpPr/>
+          <p:nvPr/>
+        </p:nvCxnSpPr>
+        <p:spPr>
+          <a:xfrm>
+            <a:off x="1396169" y="2421466"/>
+            <a:ext cx="9407298" cy="0"/>
+          </a:xfrm>
+          <a:prstGeom prst="line">
+            <a:avLst/>
+          </a:prstGeom>
+          <a:ln w="15875"/>
+        </p:spPr>
+        <p:style>
+          <a:lnRef idx="2">
+            <a:schemeClr val="accent1"/>
+          </a:lnRef>
+          <a:fillRef idx="0">
+            <a:schemeClr val="accent1"/>
+          </a:fillRef>
+          <a:effectRef idx="1">
+            <a:schemeClr val="accent1"/>
+          </a:effectRef>
+          <a:fontRef idx="minor">
+            <a:schemeClr val="tx1"/>
+          </a:fontRef>
+        </p:style>
+      </p:cxnSp>
       <p:sp>
         <p:nvSpPr>
           <p:cNvPr id="2" name="Title 1"/>
@@ -735,10 +3141,10 @@
           <a:lstStyle/>
           <a:p>
             <a:r>
-              <a:rPr lang="en-US" smtClean="0"/>
+              <a:rPr lang="en-US"/>
               <a:t>Click to edit Master title style</a:t>
             </a:r>
-            <a:endParaRPr lang="en-US"/>
+            <a:endParaRPr lang="en-US" dirty="0"/>
           </a:p>
         </p:txBody>
       </p:sp>
@@ -759,38 +3165,38 @@
           <a:p>
             <a:pPr lvl="0"/>
             <a:r>
-              <a:rPr lang="en-US" smtClean="0"/>
+              <a:rPr lang="en-US"/>
               <a:t>Click to edit Master text styles</a:t>
             </a:r>
           </a:p>
           <a:p>
             <a:pPr lvl="1"/>
             <a:r>
-              <a:rPr lang="en-US" smtClean="0"/>
+              <a:rPr lang="en-US"/>
               <a:t>Second level</a:t>
             </a:r>
           </a:p>
           <a:p>
             <a:pPr lvl="2"/>
             <a:r>
-              <a:rPr lang="en-US" smtClean="0"/>
+              <a:rPr lang="en-US"/>
               <a:t>Third level</a:t>
             </a:r>
           </a:p>
           <a:p>
             <a:pPr lvl="3"/>
             <a:r>
-              <a:rPr lang="en-US" smtClean="0"/>
+              <a:rPr lang="en-US"/>
               <a:t>Fourth level</a:t>
             </a:r>
           </a:p>
           <a:p>
             <a:pPr lvl="4"/>
             <a:r>
-              <a:rPr lang="en-US" smtClean="0"/>
+              <a:rPr lang="en-US"/>
               <a:t>Fifth level</a:t>
             </a:r>
-            <a:endParaRPr lang="en-US"/>
+            <a:endParaRPr lang="en-US" dirty="0"/>
           </a:p>
         </p:txBody>
       </p:sp>
@@ -811,7 +3217,7 @@
           <a:p>
             <a:fld id="{5BCAD085-E8A6-8845-BD4E-CB4CCA059FC4}" type="datetimeFigureOut">
               <a:rPr lang="en-US" smtClean="0"/>
-              <a:t>1/27/13</a:t>
+              <a:t>5/25/2026</a:t>
             </a:fld>
             <a:endParaRPr lang="en-US"/>
           </a:p>
@@ -862,7 +3268,7 @@
     </p:spTree>
     <p:extLst>
       <p:ext uri="{BB962C8B-B14F-4D97-AF65-F5344CB8AC3E}">
-        <p14:creationId xmlns:p14="http://schemas.microsoft.com/office/powerpoint/2010/main" val="2614314258"/>
+        <p14:creationId xmlns:p14="http://schemas.microsoft.com/office/powerpoint/2010/main" val="4155119928"/>
       </p:ext>
     </p:extLst>
   </p:cSld>
@@ -901,23 +3307,25 @@
         </p:nvSpPr>
         <p:spPr>
           <a:xfrm>
-            <a:off x="722313" y="4406900"/>
-            <a:ext cx="7772400" cy="1362075"/>
+            <a:off x="2015069" y="1752606"/>
+            <a:ext cx="8158688" cy="1822514"/>
           </a:xfrm>
         </p:spPr>
         <p:txBody>
-          <a:bodyPr anchor="t"/>
+          <a:bodyPr anchor="b">
+            <a:normAutofit/>
+          </a:bodyPr>
           <a:lstStyle>
-            <a:lvl1pPr algn="l">
-              <a:defRPr sz="4000" b="1" cap="all"/>
+            <a:lvl1pPr algn="ctr">
+              <a:defRPr sz="4400" b="0" cap="none"/>
             </a:lvl1pPr>
           </a:lstStyle>
           <a:p>
             <a:r>
-              <a:rPr lang="en-US" smtClean="0"/>
+              <a:rPr lang="en-US"/>
               <a:t>Click to edit Master title style</a:t>
             </a:r>
-            <a:endParaRPr lang="en-US"/>
+            <a:endParaRPr lang="en-US" dirty="0"/>
           </a:p>
         </p:txBody>
       </p:sp>
@@ -933,44 +3341,54 @@
         </p:nvSpPr>
         <p:spPr>
           <a:xfrm>
-            <a:off x="722313" y="2906713"/>
-            <a:ext cx="7772400" cy="1500187"/>
+            <a:off x="2015067" y="3846051"/>
+            <a:ext cx="8158690" cy="954547"/>
           </a:xfrm>
         </p:spPr>
         <p:txBody>
-          <a:bodyPr anchor="b"/>
+          <a:bodyPr anchor="t">
+            <a:normAutofit/>
+          </a:bodyPr>
           <a:lstStyle>
-            <a:lvl1pPr marL="0" indent="0">
-              <a:buNone/>
-              <a:defRPr sz="2000">
+            <a:lvl1pPr marL="0" indent="0" algn="ctr">
+              <a:buNone/>
+              <a:defRPr sz="2400">
+                <a:solidFill>
+                  <a:schemeClr val="tx1"/>
+                </a:solidFill>
+              </a:defRPr>
+            </a:lvl1pPr>
+            <a:lvl2pPr marL="457200" indent="0">
+              <a:buNone/>
+              <a:defRPr sz="1800">
                 <a:solidFill>
                   <a:schemeClr val="tx1">
                     <a:tint val="75000"/>
                   </a:schemeClr>
                 </a:solidFill>
               </a:defRPr>
-            </a:lvl1pPr>
-            <a:lvl2pPr marL="457200" indent="0">
-              <a:buNone/>
-              <a:defRPr sz="1800">
+            </a:lvl2pPr>
+            <a:lvl3pPr marL="914400" indent="0">
+              <a:buNone/>
+              <a:defRPr sz="1600">
                 <a:solidFill>
                   <a:schemeClr val="tx1">
                     <a:tint val="75000"/>
                   </a:schemeClr>
                 </a:solidFill>
               </a:defRPr>
-            </a:lvl2pPr>
-            <a:lvl3pPr marL="914400" indent="0">
-              <a:buNone/>
-              <a:defRPr sz="1600">
+            </a:lvl3pPr>
+            <a:lvl4pPr marL="1371600" indent="0">
+              <a:buNone/>
+              <a:defRPr sz="1400">
                 <a:solidFill>
                   <a:schemeClr val="tx1">
                     <a:tint val="75000"/>
                   </a:schemeClr>
                 </a:solidFill>
               </a:defRPr>
-            </a:lvl3pPr>
-            <a:lvl4pPr marL="1371600" indent="0">
+            </a:lvl4pPr>
+            <a:lvl5pPr marL="1828800" indent="0">
               <a:buNone/>
               <a:defRPr sz="1400">
                 <a:solidFill>
@@ -979,8 +3397,8 @@
                   </a:schemeClr>
                 </a:solidFill>
               </a:defRPr>
-            </a:lvl4pPr>
-            <a:lvl5pPr marL="1828800" indent="0">
+            </a:lvl5pPr>
+            <a:lvl6pPr marL="2286000" indent="0">
               <a:buNone/>
               <a:defRPr sz="1400">
                 <a:solidFill>
@@ -989,8 +3407,8 @@
                   </a:schemeClr>
                 </a:solidFill>
               </a:defRPr>
-            </a:lvl5pPr>
-            <a:lvl6pPr marL="2286000" indent="0">
+            </a:lvl6pPr>
+            <a:lvl7pPr marL="2743200" indent="0">
               <a:buNone/>
               <a:defRPr sz="1400">
                 <a:solidFill>
@@ -999,8 +3417,8 @@
                   </a:schemeClr>
                 </a:solidFill>
               </a:defRPr>
-            </a:lvl6pPr>
-            <a:lvl7pPr marL="2743200" indent="0">
+            </a:lvl7pPr>
+            <a:lvl8pPr marL="3200400" indent="0">
               <a:buNone/>
               <a:defRPr sz="1400">
                 <a:solidFill>
@@ -1009,8 +3427,8 @@
                   </a:schemeClr>
                 </a:solidFill>
               </a:defRPr>
-            </a:lvl7pPr>
-            <a:lvl8pPr marL="3200400" indent="0">
+            </a:lvl8pPr>
+            <a:lvl9pPr marL="3657600" indent="0">
               <a:buNone/>
               <a:defRPr sz="1400">
                 <a:solidFill>
@@ -1019,22 +3437,12 @@
                   </a:schemeClr>
                 </a:solidFill>
               </a:defRPr>
-            </a:lvl8pPr>
-            <a:lvl9pPr marL="3657600" indent="0">
-              <a:buNone/>
-              <a:defRPr sz="1400">
-                <a:solidFill>
-                  <a:schemeClr val="tx1">
-                    <a:tint val="75000"/>
-                  </a:schemeClr>
-                </a:solidFill>
-              </a:defRPr>
             </a:lvl9pPr>
           </a:lstStyle>
           <a:p>
             <a:pPr lvl="0"/>
             <a:r>
-              <a:rPr lang="en-US" smtClean="0"/>
+              <a:rPr lang="en-US"/>
               <a:t>Click to edit Master text styles</a:t>
             </a:r>
           </a:p>
@@ -1057,7 +3465,7 @@
           <a:p>
             <a:fld id="{5BCAD085-E8A6-8845-BD4E-CB4CCA059FC4}" type="datetimeFigureOut">
               <a:rPr lang="en-US" smtClean="0"/>
-              <a:t>1/27/13</a:t>
+              <a:t>5/25/2026</a:t>
             </a:fld>
             <a:endParaRPr lang="en-US"/>
           </a:p>
@@ -1105,10 +3513,41 @@
           </a:p>
         </p:txBody>
       </p:sp>
+      <p:cxnSp>
+        <p:nvCxnSpPr>
+          <p:cNvPr id="16" name="Straight Connector 15"/>
+          <p:cNvCxnSpPr/>
+          <p:nvPr/>
+        </p:nvCxnSpPr>
+        <p:spPr>
+          <a:xfrm>
+            <a:off x="2012723" y="3710585"/>
+            <a:ext cx="8163380" cy="0"/>
+          </a:xfrm>
+          <a:prstGeom prst="line">
+            <a:avLst/>
+          </a:prstGeom>
+          <a:ln w="15875"/>
+        </p:spPr>
+        <p:style>
+          <a:lnRef idx="2">
+            <a:schemeClr val="accent1"/>
+          </a:lnRef>
+          <a:fillRef idx="0">
+            <a:schemeClr val="accent1"/>
+          </a:fillRef>
+          <a:effectRef idx="1">
+            <a:schemeClr val="accent1"/>
+          </a:effectRef>
+          <a:fontRef idx="minor">
+            <a:schemeClr val="tx1"/>
+          </a:fontRef>
+        </p:style>
+      </p:cxnSp>
     </p:spTree>
     <p:extLst>
       <p:ext uri="{BB962C8B-B14F-4D97-AF65-F5344CB8AC3E}">
-        <p14:creationId xmlns:p14="http://schemas.microsoft.com/office/powerpoint/2010/main" val="960648375"/>
+        <p14:creationId xmlns:p14="http://schemas.microsoft.com/office/powerpoint/2010/main" val="546520287"/>
       </p:ext>
     </p:extLst>
   </p:cSld>
@@ -1135,111 +3574,116 @@
           <a:chExt cx="0" cy="0"/>
         </a:xfrm>
       </p:grpSpPr>
-      <p:sp>
-        <p:nvSpPr>
-          <p:cNvPr id="2" name="Title 1"/>
-          <p:cNvSpPr>
-            <a:spLocks noGrp="1"/>
-          </p:cNvSpPr>
-          <p:nvPr>
-            <p:ph type="title"/>
-          </p:nvPr>
-        </p:nvSpPr>
-        <p:spPr/>
-        <p:txBody>
-          <a:bodyPr/>
-          <a:lstStyle/>
-          <a:p>
-            <a:r>
-              <a:rPr lang="en-US" smtClean="0"/>
-              <a:t>Click to edit Master title style</a:t>
-            </a:r>
-            <a:endParaRPr lang="en-US"/>
-          </a:p>
-        </p:txBody>
-      </p:sp>
-      <p:sp>
-        <p:nvSpPr>
-          <p:cNvPr id="3" name="Content Placeholder 2"/>
-          <p:cNvSpPr>
-            <a:spLocks noGrp="1"/>
-          </p:cNvSpPr>
-          <p:nvPr>
-            <p:ph sz="half" idx="1"/>
-          </p:nvPr>
-        </p:nvSpPr>
+      <p:cxnSp>
+        <p:nvCxnSpPr>
+          <p:cNvPr id="8" name="Straight Connector 7"/>
+          <p:cNvCxnSpPr/>
+          <p:nvPr/>
+        </p:nvCxnSpPr>
         <p:spPr>
           <a:xfrm>
-            <a:off x="457200" y="1600200"/>
-            <a:ext cx="4038600" cy="4525963"/>
+            <a:off x="1396169" y="2421466"/>
+            <a:ext cx="9407298" cy="0"/>
+          </a:xfrm>
+          <a:prstGeom prst="line">
+            <a:avLst/>
+          </a:prstGeom>
+          <a:ln w="15875"/>
+        </p:spPr>
+        <p:style>
+          <a:lnRef idx="2">
+            <a:schemeClr val="accent1"/>
+          </a:lnRef>
+          <a:fillRef idx="0">
+            <a:schemeClr val="accent1"/>
+          </a:fillRef>
+          <a:effectRef idx="1">
+            <a:schemeClr val="accent1"/>
+          </a:effectRef>
+          <a:fontRef idx="minor">
+            <a:schemeClr val="tx1"/>
+          </a:fontRef>
+        </p:style>
+      </p:cxnSp>
+      <p:sp>
+        <p:nvSpPr>
+          <p:cNvPr id="2" name="Title 1"/>
+          <p:cNvSpPr>
+            <a:spLocks noGrp="1"/>
+          </p:cNvSpPr>
+          <p:nvPr>
+            <p:ph type="title"/>
+          </p:nvPr>
+        </p:nvSpPr>
+        <p:spPr/>
+        <p:txBody>
+          <a:bodyPr/>
+          <a:lstStyle/>
+          <a:p>
+            <a:r>
+              <a:rPr lang="en-US"/>
+              <a:t>Click to edit Master title style</a:t>
+            </a:r>
+            <a:endParaRPr lang="en-US" dirty="0"/>
+          </a:p>
+        </p:txBody>
+      </p:sp>
+      <p:sp>
+        <p:nvSpPr>
+          <p:cNvPr id="3" name="Content Placeholder 2"/>
+          <p:cNvSpPr>
+            <a:spLocks noGrp="1"/>
+          </p:cNvSpPr>
+          <p:nvPr>
+            <p:ph sz="half" idx="1"/>
+          </p:nvPr>
+        </p:nvSpPr>
+        <p:spPr>
+          <a:xfrm>
+            <a:off x="1298448" y="2560320"/>
+            <a:ext cx="4718304" cy="3310128"/>
           </a:xfrm>
         </p:spPr>
         <p:txBody>
-          <a:bodyPr/>
-          <a:lstStyle>
-            <a:lvl1pPr>
-              <a:defRPr sz="2800"/>
-            </a:lvl1pPr>
-            <a:lvl2pPr>
-              <a:defRPr sz="2400"/>
-            </a:lvl2pPr>
-            <a:lvl3pPr>
-              <a:defRPr sz="2000"/>
-            </a:lvl3pPr>
-            <a:lvl4pPr>
-              <a:defRPr sz="1800"/>
-            </a:lvl4pPr>
-            <a:lvl5pPr>
-              <a:defRPr sz="1800"/>
-            </a:lvl5pPr>
-            <a:lvl6pPr>
-              <a:defRPr sz="1800"/>
-            </a:lvl6pPr>
-            <a:lvl7pPr>
-              <a:defRPr sz="1800"/>
-            </a:lvl7pPr>
-            <a:lvl8pPr>
-              <a:defRPr sz="1800"/>
-            </a:lvl8pPr>
-            <a:lvl9pPr>
-              <a:defRPr sz="1800"/>
-            </a:lvl9pPr>
-          </a:lstStyle>
+          <a:bodyPr>
+            <a:normAutofit/>
+          </a:bodyPr>
+          <a:lstStyle/>
           <a:p>
             <a:pPr lvl="0"/>
             <a:r>
-              <a:rPr lang="en-US" smtClean="0"/>
+              <a:rPr lang="en-US"/>
               <a:t>Click to edit Master text styles</a:t>
             </a:r>
           </a:p>
           <a:p>
             <a:pPr lvl="1"/>
             <a:r>
-              <a:rPr lang="en-US" smtClean="0"/>
+              <a:rPr lang="en-US"/>
               <a:t>Second level</a:t>
             </a:r>
           </a:p>
           <a:p>
             <a:pPr lvl="2"/>
             <a:r>
-              <a:rPr lang="en-US" smtClean="0"/>
+              <a:rPr lang="en-US"/>
               <a:t>Third level</a:t>
             </a:r>
           </a:p>
           <a:p>
             <a:pPr lvl="3"/>
             <a:r>
-              <a:rPr lang="en-US" smtClean="0"/>
+              <a:rPr lang="en-US"/>
               <a:t>Fourth level</a:t>
             </a:r>
           </a:p>
           <a:p>
             <a:pPr lvl="4"/>
             <a:r>
-              <a:rPr lang="en-US" smtClean="0"/>
+              <a:rPr lang="en-US"/>
               <a:t>Fifth level</a:t>
             </a:r>
-            <a:endParaRPr lang="en-US"/>
+            <a:endParaRPr lang="en-US" dirty="0"/>
           </a:p>
         </p:txBody>
       </p:sp>
@@ -1255,76 +3699,50 @@
         </p:nvSpPr>
         <p:spPr>
           <a:xfrm>
-            <a:off x="4648200" y="1600200"/>
-            <a:ext cx="4038600" cy="4525963"/>
+            <a:off x="6181344" y="2560320"/>
+            <a:ext cx="4718304" cy="3310128"/>
           </a:xfrm>
         </p:spPr>
         <p:txBody>
-          <a:bodyPr/>
-          <a:lstStyle>
-            <a:lvl1pPr>
-              <a:defRPr sz="2800"/>
-            </a:lvl1pPr>
-            <a:lvl2pPr>
-              <a:defRPr sz="2400"/>
-            </a:lvl2pPr>
-            <a:lvl3pPr>
-              <a:defRPr sz="2000"/>
-            </a:lvl3pPr>
-            <a:lvl4pPr>
-              <a:defRPr sz="1800"/>
-            </a:lvl4pPr>
-            <a:lvl5pPr>
-              <a:defRPr sz="1800"/>
-            </a:lvl5pPr>
-            <a:lvl6pPr>
-              <a:defRPr sz="1800"/>
-            </a:lvl6pPr>
-            <a:lvl7pPr>
-              <a:defRPr sz="1800"/>
-            </a:lvl7pPr>
-            <a:lvl8pPr>
-              <a:defRPr sz="1800"/>
-            </a:lvl8pPr>
-            <a:lvl9pPr>
-              <a:defRPr sz="1800"/>
-            </a:lvl9pPr>
-          </a:lstStyle>
+          <a:bodyPr>
+            <a:normAutofit/>
+          </a:bodyPr>
+          <a:lstStyle/>
           <a:p>
             <a:pPr lvl="0"/>
             <a:r>
-              <a:rPr lang="en-US" smtClean="0"/>
+              <a:rPr lang="en-US"/>
               <a:t>Click to edit Master text styles</a:t>
             </a:r>
           </a:p>
           <a:p>
             <a:pPr lvl="1"/>
             <a:r>
-              <a:rPr lang="en-US" smtClean="0"/>
+              <a:rPr lang="en-US"/>
               <a:t>Second level</a:t>
             </a:r>
           </a:p>
           <a:p>
             <a:pPr lvl="2"/>
             <a:r>
-              <a:rPr lang="en-US" smtClean="0"/>
+              <a:rPr lang="en-US"/>
               <a:t>Third level</a:t>
             </a:r>
           </a:p>
           <a:p>
             <a:pPr lvl="3"/>
             <a:r>
-              <a:rPr lang="en-US" smtClean="0"/>
+              <a:rPr lang="en-US"/>
               <a:t>Fourth level</a:t>
             </a:r>
           </a:p>
           <a:p>
             <a:pPr lvl="4"/>
             <a:r>
-              <a:rPr lang="en-US" smtClean="0"/>
+              <a:rPr lang="en-US"/>
               <a:t>Fifth level</a:t>
             </a:r>
-            <a:endParaRPr lang="en-US"/>
+            <a:endParaRPr lang="en-US" dirty="0"/>
           </a:p>
         </p:txBody>
       </p:sp>
@@ -1345,7 +3763,7 @@
           <a:p>
             <a:fld id="{5BCAD085-E8A6-8845-BD4E-CB4CCA059FC4}" type="datetimeFigureOut">
               <a:rPr lang="en-US" smtClean="0"/>
-              <a:t>1/27/13</a:t>
+              <a:t>5/25/2026</a:t>
             </a:fld>
             <a:endParaRPr lang="en-US"/>
           </a:p>
@@ -1396,7 +3814,7 @@
     </p:spTree>
     <p:extLst>
       <p:ext uri="{BB962C8B-B14F-4D97-AF65-F5344CB8AC3E}">
-        <p14:creationId xmlns:p14="http://schemas.microsoft.com/office/powerpoint/2010/main" val="2782244947"/>
+        <p14:creationId xmlns:p14="http://schemas.microsoft.com/office/powerpoint/2010/main" val="3378272866"/>
       </p:ext>
     </p:extLst>
   </p:cSld>
@@ -1443,10 +3861,10 @@
           </a:lstStyle>
           <a:p>
             <a:r>
-              <a:rPr lang="en-US" smtClean="0"/>
+              <a:rPr lang="en-US"/>
               <a:t>Click to edit Master title style</a:t>
             </a:r>
-            <a:endParaRPr lang="en-US"/>
+            <a:endParaRPr lang="en-US" dirty="0"/>
           </a:p>
         </p:txBody>
       </p:sp>
@@ -1462,16 +3880,28 @@
         </p:nvSpPr>
         <p:spPr>
           <a:xfrm>
-            <a:off x="457200" y="1535113"/>
-            <a:ext cx="4040188" cy="639762"/>
+            <a:off x="1295400" y="2658533"/>
+            <a:ext cx="4718304" cy="576262"/>
           </a:xfrm>
         </p:spPr>
         <p:txBody>
-          <a:bodyPr anchor="b"/>
+          <a:bodyPr anchor="b">
+            <a:noAutofit/>
+          </a:bodyPr>
           <a:lstStyle>
             <a:lvl1pPr marL="0" indent="0">
-              <a:buNone/>
-              <a:defRPr sz="2400" b="1"/>
+              <a:spcBef>
+                <a:spcPts val="672"/>
+              </a:spcBef>
+              <a:spcAft>
+                <a:spcPts val="600"/>
+              </a:spcAft>
+              <a:buNone/>
+              <a:defRPr sz="2800" b="0">
+                <a:solidFill>
+                  <a:schemeClr val="accent1"/>
+                </a:solidFill>
+              </a:defRPr>
             </a:lvl1pPr>
             <a:lvl2pPr marL="457200" indent="0">
               <a:buNone/>
@@ -1509,7 +3939,7 @@
           <a:p>
             <a:pPr lvl="0"/>
             <a:r>
-              <a:rPr lang="en-US" smtClean="0"/>
+              <a:rPr lang="en-US"/>
               <a:t>Click to edit Master text styles</a:t>
             </a:r>
           </a:p>
@@ -1527,76 +3957,50 @@
         </p:nvSpPr>
         <p:spPr>
           <a:xfrm>
-            <a:off x="457200" y="2174875"/>
-            <a:ext cx="4040188" cy="3951288"/>
+            <a:off x="1295400" y="3243262"/>
+            <a:ext cx="4718304" cy="2632605"/>
           </a:xfrm>
         </p:spPr>
         <p:txBody>
-          <a:bodyPr/>
-          <a:lstStyle>
-            <a:lvl1pPr>
-              <a:defRPr sz="2400"/>
-            </a:lvl1pPr>
-            <a:lvl2pPr>
-              <a:defRPr sz="2000"/>
-            </a:lvl2pPr>
-            <a:lvl3pPr>
-              <a:defRPr sz="1800"/>
-            </a:lvl3pPr>
-            <a:lvl4pPr>
-              <a:defRPr sz="1600"/>
-            </a:lvl4pPr>
-            <a:lvl5pPr>
-              <a:defRPr sz="1600"/>
-            </a:lvl5pPr>
-            <a:lvl6pPr>
-              <a:defRPr sz="1600"/>
-            </a:lvl6pPr>
-            <a:lvl7pPr>
-              <a:defRPr sz="1600"/>
-            </a:lvl7pPr>
-            <a:lvl8pPr>
-              <a:defRPr sz="1600"/>
-            </a:lvl8pPr>
-            <a:lvl9pPr>
-              <a:defRPr sz="1600"/>
-            </a:lvl9pPr>
-          </a:lstStyle>
+          <a:bodyPr anchor="t">
+            <a:normAutofit/>
+          </a:bodyPr>
+          <a:lstStyle/>
           <a:p>
             <a:pPr lvl="0"/>
             <a:r>
-              <a:rPr lang="en-US" smtClean="0"/>
+              <a:rPr lang="en-US"/>
               <a:t>Click to edit Master text styles</a:t>
             </a:r>
           </a:p>
           <a:p>
             <a:pPr lvl="1"/>
             <a:r>
-              <a:rPr lang="en-US" smtClean="0"/>
+              <a:rPr lang="en-US"/>
               <a:t>Second level</a:t>
             </a:r>
           </a:p>
           <a:p>
             <a:pPr lvl="2"/>
             <a:r>
-              <a:rPr lang="en-US" smtClean="0"/>
+              <a:rPr lang="en-US"/>
               <a:t>Third level</a:t>
             </a:r>
           </a:p>
           <a:p>
             <a:pPr lvl="3"/>
             <a:r>
-              <a:rPr lang="en-US" smtClean="0"/>
+              <a:rPr lang="en-US"/>
               <a:t>Fourth level</a:t>
             </a:r>
           </a:p>
           <a:p>
             <a:pPr lvl="4"/>
             <a:r>
-              <a:rPr lang="en-US" smtClean="0"/>
+              <a:rPr lang="en-US"/>
               <a:t>Fifth level</a:t>
             </a:r>
-            <a:endParaRPr lang="en-US"/>
+            <a:endParaRPr lang="en-US" dirty="0"/>
           </a:p>
         </p:txBody>
       </p:sp>
@@ -1612,16 +4016,28 @@
         </p:nvSpPr>
         <p:spPr>
           <a:xfrm>
-            <a:off x="4645025" y="1535113"/>
-            <a:ext cx="4041775" cy="639762"/>
+            <a:off x="6180670" y="2658533"/>
+            <a:ext cx="4718304" cy="576262"/>
           </a:xfrm>
         </p:spPr>
         <p:txBody>
-          <a:bodyPr anchor="b"/>
+          <a:bodyPr anchor="b">
+            <a:noAutofit/>
+          </a:bodyPr>
           <a:lstStyle>
             <a:lvl1pPr marL="0" indent="0">
-              <a:buNone/>
-              <a:defRPr sz="2400" b="1"/>
+              <a:spcBef>
+                <a:spcPts val="672"/>
+              </a:spcBef>
+              <a:spcAft>
+                <a:spcPts val="600"/>
+              </a:spcAft>
+              <a:buNone/>
+              <a:defRPr sz="2800" b="0">
+                <a:solidFill>
+                  <a:schemeClr val="accent1"/>
+                </a:solidFill>
+              </a:defRPr>
             </a:lvl1pPr>
             <a:lvl2pPr marL="457200" indent="0">
               <a:buNone/>
@@ -1659,7 +4075,7 @@
           <a:p>
             <a:pPr lvl="0"/>
             <a:r>
-              <a:rPr lang="en-US" smtClean="0"/>
+              <a:rPr lang="en-US"/>
               <a:t>Click to edit Master text styles</a:t>
             </a:r>
           </a:p>
@@ -1677,76 +4093,50 @@
         </p:nvSpPr>
         <p:spPr>
           <a:xfrm>
-            <a:off x="4645025" y="2174875"/>
-            <a:ext cx="4041775" cy="3951288"/>
+            <a:off x="6180670" y="3243262"/>
+            <a:ext cx="4718304" cy="2632605"/>
           </a:xfrm>
         </p:spPr>
         <p:txBody>
-          <a:bodyPr/>
-          <a:lstStyle>
-            <a:lvl1pPr>
-              <a:defRPr sz="2400"/>
-            </a:lvl1pPr>
-            <a:lvl2pPr>
-              <a:defRPr sz="2000"/>
-            </a:lvl2pPr>
-            <a:lvl3pPr>
-              <a:defRPr sz="1800"/>
-            </a:lvl3pPr>
-            <a:lvl4pPr>
-              <a:defRPr sz="1600"/>
-            </a:lvl4pPr>
-            <a:lvl5pPr>
-              <a:defRPr sz="1600"/>
-            </a:lvl5pPr>
-            <a:lvl6pPr>
-              <a:defRPr sz="1600"/>
-            </a:lvl6pPr>
-            <a:lvl7pPr>
-              <a:defRPr sz="1600"/>
-            </a:lvl7pPr>
-            <a:lvl8pPr>
-              <a:defRPr sz="1600"/>
-            </a:lvl8pPr>
-            <a:lvl9pPr>
-              <a:defRPr sz="1600"/>
-            </a:lvl9pPr>
-          </a:lstStyle>
+          <a:bodyPr anchor="t">
+            <a:normAutofit/>
+          </a:bodyPr>
+          <a:lstStyle/>
           <a:p>
             <a:pPr lvl="0"/>
             <a:r>
-              <a:rPr lang="en-US" smtClean="0"/>
+              <a:rPr lang="en-US"/>
               <a:t>Click to edit Master text styles</a:t>
             </a:r>
           </a:p>
           <a:p>
             <a:pPr lvl="1"/>
             <a:r>
-              <a:rPr lang="en-US" smtClean="0"/>
+              <a:rPr lang="en-US"/>
               <a:t>Second level</a:t>
             </a:r>
           </a:p>
           <a:p>
             <a:pPr lvl="2"/>
             <a:r>
-              <a:rPr lang="en-US" smtClean="0"/>
+              <a:rPr lang="en-US"/>
               <a:t>Third level</a:t>
             </a:r>
           </a:p>
           <a:p>
             <a:pPr lvl="3"/>
             <a:r>
-              <a:rPr lang="en-US" smtClean="0"/>
+              <a:rPr lang="en-US"/>
               <a:t>Fourth level</a:t>
             </a:r>
           </a:p>
           <a:p>
             <a:pPr lvl="4"/>
             <a:r>
-              <a:rPr lang="en-US" smtClean="0"/>
+              <a:rPr lang="en-US"/>
               <a:t>Fifth level</a:t>
             </a:r>
-            <a:endParaRPr lang="en-US"/>
+            <a:endParaRPr lang="en-US" dirty="0"/>
           </a:p>
         </p:txBody>
       </p:sp>
@@ -1767,7 +4157,7 @@
           <a:p>
             <a:fld id="{5BCAD085-E8A6-8845-BD4E-CB4CCA059FC4}" type="datetimeFigureOut">
               <a:rPr lang="en-US" smtClean="0"/>
-              <a:t>1/27/13</a:t>
+              <a:t>5/25/2026</a:t>
             </a:fld>
             <a:endParaRPr lang="en-US"/>
           </a:p>
@@ -1815,10 +4205,41 @@
           </a:p>
         </p:txBody>
       </p:sp>
+      <p:cxnSp>
+        <p:nvCxnSpPr>
+          <p:cNvPr id="18" name="Straight Connector 17"/>
+          <p:cNvCxnSpPr/>
+          <p:nvPr/>
+        </p:nvCxnSpPr>
+        <p:spPr>
+          <a:xfrm>
+            <a:off x="1396169" y="2421466"/>
+            <a:ext cx="9407298" cy="0"/>
+          </a:xfrm>
+          <a:prstGeom prst="line">
+            <a:avLst/>
+          </a:prstGeom>
+          <a:ln w="15875"/>
+        </p:spPr>
+        <p:style>
+          <a:lnRef idx="2">
+            <a:schemeClr val="accent1"/>
+          </a:lnRef>
+          <a:fillRef idx="0">
+            <a:schemeClr val="accent1"/>
+          </a:fillRef>
+          <a:effectRef idx="1">
+            <a:schemeClr val="accent1"/>
+          </a:effectRef>
+          <a:fontRef idx="minor">
+            <a:schemeClr val="tx1"/>
+          </a:fontRef>
+        </p:style>
+      </p:cxnSp>
     </p:spTree>
     <p:extLst>
       <p:ext uri="{BB962C8B-B14F-4D97-AF65-F5344CB8AC3E}">
-        <p14:creationId xmlns:p14="http://schemas.microsoft.com/office/powerpoint/2010/main" val="990158736"/>
+        <p14:creationId xmlns:p14="http://schemas.microsoft.com/office/powerpoint/2010/main" val="2051628261"/>
       </p:ext>
     </p:extLst>
   </p:cSld>
@@ -1861,10 +4282,10 @@
           <a:lstStyle/>
           <a:p>
             <a:r>
-              <a:rPr lang="en-US" smtClean="0"/>
+              <a:rPr lang="en-US"/>
               <a:t>Click to edit Master title style</a:t>
             </a:r>
-            <a:endParaRPr lang="en-US"/>
+            <a:endParaRPr lang="en-US" dirty="0"/>
           </a:p>
         </p:txBody>
       </p:sp>
@@ -1885,7 +4306,7 @@
           <a:p>
             <a:fld id="{5BCAD085-E8A6-8845-BD4E-CB4CCA059FC4}" type="datetimeFigureOut">
               <a:rPr lang="en-US" smtClean="0"/>
-              <a:t>1/27/13</a:t>
+              <a:t>5/25/2026</a:t>
             </a:fld>
             <a:endParaRPr lang="en-US"/>
           </a:p>
@@ -1933,10 +4354,41 @@
           </a:p>
         </p:txBody>
       </p:sp>
+      <p:cxnSp>
+        <p:nvCxnSpPr>
+          <p:cNvPr id="14" name="Straight Connector 13"/>
+          <p:cNvCxnSpPr/>
+          <p:nvPr/>
+        </p:nvCxnSpPr>
+        <p:spPr>
+          <a:xfrm>
+            <a:off x="1396169" y="2421466"/>
+            <a:ext cx="9407298" cy="0"/>
+          </a:xfrm>
+          <a:prstGeom prst="line">
+            <a:avLst/>
+          </a:prstGeom>
+          <a:ln w="15875"/>
+        </p:spPr>
+        <p:style>
+          <a:lnRef idx="2">
+            <a:schemeClr val="accent1"/>
+          </a:lnRef>
+          <a:fillRef idx="0">
+            <a:schemeClr val="accent1"/>
+          </a:fillRef>
+          <a:effectRef idx="1">
+            <a:schemeClr val="accent1"/>
+          </a:effectRef>
+          <a:fontRef idx="minor">
+            <a:schemeClr val="tx1"/>
+          </a:fontRef>
+        </p:style>
+      </p:cxnSp>
     </p:spTree>
     <p:extLst>
       <p:ext uri="{BB962C8B-B14F-4D97-AF65-F5344CB8AC3E}">
-        <p14:creationId xmlns:p14="http://schemas.microsoft.com/office/powerpoint/2010/main" val="727027711"/>
+        <p14:creationId xmlns:p14="http://schemas.microsoft.com/office/powerpoint/2010/main" val="3501154643"/>
       </p:ext>
     </p:extLst>
   </p:cSld>
@@ -1980,7 +4432,7 @@
           <a:p>
             <a:fld id="{5BCAD085-E8A6-8845-BD4E-CB4CCA059FC4}" type="datetimeFigureOut">
               <a:rPr lang="en-US" smtClean="0"/>
-              <a:t>1/27/13</a:t>
+              <a:t>5/25/2026</a:t>
             </a:fld>
             <a:endParaRPr lang="en-US"/>
           </a:p>
@@ -2031,7 +4483,7 @@
     </p:spTree>
     <p:extLst>
       <p:ext uri="{BB962C8B-B14F-4D97-AF65-F5344CB8AC3E}">
-        <p14:creationId xmlns:p14="http://schemas.microsoft.com/office/powerpoint/2010/main" val="1212999818"/>
+        <p14:creationId xmlns:p14="http://schemas.microsoft.com/office/powerpoint/2010/main" val="2141876112"/>
       </p:ext>
     </p:extLst>
   </p:cSld>
@@ -2070,23 +4522,25 @@
         </p:nvSpPr>
         <p:spPr>
           <a:xfrm>
-            <a:off x="457200" y="273050"/>
-            <a:ext cx="3008313" cy="1162050"/>
+            <a:off x="1293811" y="1388534"/>
+            <a:ext cx="3718455" cy="1371600"/>
           </a:xfrm>
         </p:spPr>
         <p:txBody>
-          <a:bodyPr anchor="b"/>
+          <a:bodyPr anchor="b">
+            <a:normAutofit/>
+          </a:bodyPr>
           <a:lstStyle>
-            <a:lvl1pPr algn="l">
-              <a:defRPr sz="2000" b="1"/>
+            <a:lvl1pPr algn="ctr">
+              <a:defRPr sz="2400" b="0"/>
             </a:lvl1pPr>
           </a:lstStyle>
           <a:p>
             <a:r>
-              <a:rPr lang="en-US" smtClean="0"/>
+              <a:rPr lang="en-US"/>
               <a:t>Click to edit Master title style</a:t>
             </a:r>
-            <a:endParaRPr lang="en-US"/>
+            <a:endParaRPr lang="en-US" dirty="0"/>
           </a:p>
         </p:txBody>
       </p:sp>
@@ -2102,76 +4556,50 @@
         </p:nvSpPr>
         <p:spPr>
           <a:xfrm>
-            <a:off x="3575050" y="273050"/>
-            <a:ext cx="5111750" cy="5853113"/>
+            <a:off x="5418668" y="982131"/>
+            <a:ext cx="5469466" cy="4893735"/>
           </a:xfrm>
         </p:spPr>
         <p:txBody>
-          <a:bodyPr/>
-          <a:lstStyle>
-            <a:lvl1pPr>
-              <a:defRPr sz="3200"/>
-            </a:lvl1pPr>
-            <a:lvl2pPr>
-              <a:defRPr sz="2800"/>
-            </a:lvl2pPr>
-            <a:lvl3pPr>
-              <a:defRPr sz="2400"/>
-            </a:lvl3pPr>
-            <a:lvl4pPr>
-              <a:defRPr sz="2000"/>
-            </a:lvl4pPr>
-            <a:lvl5pPr>
-              <a:defRPr sz="2000"/>
-            </a:lvl5pPr>
-            <a:lvl6pPr>
-              <a:defRPr sz="2000"/>
-            </a:lvl6pPr>
-            <a:lvl7pPr>
-              <a:defRPr sz="2000"/>
-            </a:lvl7pPr>
-            <a:lvl8pPr>
-              <a:defRPr sz="2000"/>
-            </a:lvl8pPr>
-            <a:lvl9pPr>
-              <a:defRPr sz="2000"/>
-            </a:lvl9pPr>
-          </a:lstStyle>
+          <a:bodyPr anchor="ctr">
+            <a:normAutofit/>
+          </a:bodyPr>
+          <a:lstStyle/>
           <a:p>
             <a:pPr lvl="0"/>
             <a:r>
-              <a:rPr lang="en-US" smtClean="0"/>
+              <a:rPr lang="en-US"/>
               <a:t>Click to edit Master text styles</a:t>
             </a:r>
           </a:p>
           <a:p>
             <a:pPr lvl="1"/>
             <a:r>
-              <a:rPr lang="en-US" smtClean="0"/>
+              <a:rPr lang="en-US"/>
               <a:t>Second level</a:t>
             </a:r>
           </a:p>
           <a:p>
             <a:pPr lvl="2"/>
             <a:r>
-              <a:rPr lang="en-US" smtClean="0"/>
+              <a:rPr lang="en-US"/>
               <a:t>Third level</a:t>
             </a:r>
           </a:p>
           <a:p>
             <a:pPr lvl="3"/>
             <a:r>
-              <a:rPr lang="en-US" smtClean="0"/>
+              <a:rPr lang="en-US"/>
               <a:t>Fourth level</a:t>
             </a:r>
           </a:p>
           <a:p>
             <a:pPr lvl="4"/>
             <a:r>
-              <a:rPr lang="en-US" smtClean="0"/>
+              <a:rPr lang="en-US"/>
               <a:t>Fifth level</a:t>
             </a:r>
-            <a:endParaRPr lang="en-US"/>
+            <a:endParaRPr lang="en-US" dirty="0"/>
           </a:p>
         </p:txBody>
       </p:sp>
@@ -2187,16 +4615,18 @@
         </p:nvSpPr>
         <p:spPr>
           <a:xfrm>
-            <a:off x="457200" y="1435100"/>
-            <a:ext cx="3008313" cy="4691063"/>
+            <a:off x="1293811" y="3031065"/>
+            <a:ext cx="3718455" cy="2438404"/>
           </a:xfrm>
         </p:spPr>
         <p:txBody>
-          <a:bodyPr/>
+          <a:bodyPr anchor="t">
+            <a:normAutofit/>
+          </a:bodyPr>
           <a:lstStyle>
-            <a:lvl1pPr marL="0" indent="0">
-              <a:buNone/>
-              <a:defRPr sz="1400"/>
+            <a:lvl1pPr marL="0" indent="0" algn="ctr">
+              <a:buNone/>
+              <a:defRPr sz="1600"/>
             </a:lvl1pPr>
             <a:lvl2pPr marL="457200" indent="0">
               <a:buNone/>
@@ -2234,7 +4664,7 @@
           <a:p>
             <a:pPr lvl="0"/>
             <a:r>
-              <a:rPr lang="en-US" smtClean="0"/>
+              <a:rPr lang="en-US"/>
               <a:t>Click to edit Master text styles</a:t>
             </a:r>
           </a:p>
@@ -2257,7 +4687,7 @@
           <a:p>
             <a:fld id="{5BCAD085-E8A6-8845-BD4E-CB4CCA059FC4}" type="datetimeFigureOut">
               <a:rPr lang="en-US" smtClean="0"/>
-              <a:t>1/27/13</a:t>
+              <a:t>5/25/2026</a:t>
             </a:fld>
             <a:endParaRPr lang="en-US"/>
           </a:p>
@@ -2305,10 +4735,41 @@
           </a:p>
         </p:txBody>
       </p:sp>
+      <p:cxnSp>
+        <p:nvCxnSpPr>
+          <p:cNvPr id="16" name="Straight Connector 15"/>
+          <p:cNvCxnSpPr/>
+          <p:nvPr/>
+        </p:nvCxnSpPr>
+        <p:spPr>
+          <a:xfrm>
+            <a:off x="1396169" y="2912533"/>
+            <a:ext cx="3514498" cy="0"/>
+          </a:xfrm>
+          <a:prstGeom prst="line">
+            <a:avLst/>
+          </a:prstGeom>
+          <a:ln w="15875"/>
+        </p:spPr>
+        <p:style>
+          <a:lnRef idx="2">
+            <a:schemeClr val="accent1"/>
+          </a:lnRef>
+          <a:fillRef idx="0">
+            <a:schemeClr val="accent1"/>
+          </a:fillRef>
+          <a:effectRef idx="1">
+            <a:schemeClr val="accent1"/>
+          </a:effectRef>
+          <a:fontRef idx="minor">
+            <a:schemeClr val="tx1"/>
+          </a:fontRef>
+        </p:style>
+      </p:cxnSp>
     </p:spTree>
     <p:extLst>
       <p:ext uri="{BB962C8B-B14F-4D97-AF65-F5344CB8AC3E}">
-        <p14:creationId xmlns:p14="http://schemas.microsoft.com/office/powerpoint/2010/main" val="1840726560"/>
+        <p14:creationId xmlns:p14="http://schemas.microsoft.com/office/powerpoint/2010/main" val="3603587736"/>
       </p:ext>
     </p:extLst>
   </p:cSld>
@@ -2347,31 +4808,33 @@
         </p:nvSpPr>
         <p:spPr>
           <a:xfrm>
-            <a:off x="1792288" y="4800600"/>
-            <a:ext cx="5486400" cy="566738"/>
+            <a:off x="1295399" y="1883832"/>
+            <a:ext cx="6241816" cy="1371600"/>
           </a:xfrm>
         </p:spPr>
         <p:txBody>
-          <a:bodyPr anchor="b"/>
+          <a:bodyPr anchor="b">
+            <a:normAutofit/>
+          </a:bodyPr>
           <a:lstStyle>
-            <a:lvl1pPr algn="l">
-              <a:defRPr sz="2000" b="1"/>
+            <a:lvl1pPr algn="ctr">
+              <a:defRPr sz="2800" b="0"/>
             </a:lvl1pPr>
           </a:lstStyle>
           <a:p>
             <a:r>
-              <a:rPr lang="en-US" smtClean="0"/>
+              <a:rPr lang="en-US"/>
               <a:t>Click to edit Master title style</a:t>
             </a:r>
-            <a:endParaRPr lang="en-US"/>
-          </a:p>
-        </p:txBody>
-      </p:sp>
-      <p:sp>
-        <p:nvSpPr>
-          <p:cNvPr id="3" name="Picture Placeholder 2"/>
-          <p:cNvSpPr>
-            <a:spLocks noGrp="1"/>
+            <a:endParaRPr lang="en-US" dirty="0"/>
+          </a:p>
+        </p:txBody>
+      </p:sp>
+      <p:sp>
+        <p:nvSpPr>
+          <p:cNvPr id="17" name="Picture Placeholder 2"/>
+          <p:cNvSpPr>
+            <a:spLocks noGrp="1" noChangeAspect="1"/>
           </p:cNvSpPr>
           <p:nvPr>
             <p:ph type="pic" idx="1"/>
@@ -2379,77 +4842,106 @@
         </p:nvSpPr>
         <p:spPr>
           <a:xfrm>
-            <a:off x="1792288" y="612775"/>
-            <a:ext cx="5486400" cy="4114800"/>
+            <a:off x="8094831" y="1041400"/>
+            <a:ext cx="3063347" cy="4775200"/>
+          </a:xfrm>
+          <a:prstGeom prst="roundRect">
+            <a:avLst>
+              <a:gd name="adj" fmla="val 0"/>
+            </a:avLst>
+          </a:prstGeom>
+          <a:ln w="57150" cmpd="thickThin">
+            <a:solidFill>
+              <a:schemeClr val="tx1">
+                <a:lumMod val="50000"/>
+                <a:lumOff val="50000"/>
+              </a:schemeClr>
+            </a:solidFill>
+            <a:miter lim="800000"/>
+          </a:ln>
+          <a:effectLst>
+            <a:innerShdw blurRad="57150" dist="38100" dir="14460000">
+              <a:srgbClr val="000000">
+                <a:alpha val="70000"/>
+              </a:srgbClr>
+            </a:innerShdw>
+          </a:effectLst>
+        </p:spPr>
+        <p:txBody>
+          <a:bodyPr anchor="t">
+            <a:normAutofit/>
+          </a:bodyPr>
+          <a:lstStyle>
+            <a:lvl1pPr marL="0" indent="0" algn="ctr">
+              <a:buNone/>
+              <a:defRPr sz="1600"/>
+            </a:lvl1pPr>
+            <a:lvl2pPr marL="457200" indent="0">
+              <a:buNone/>
+              <a:defRPr sz="1600"/>
+            </a:lvl2pPr>
+            <a:lvl3pPr marL="914400" indent="0">
+              <a:buNone/>
+              <a:defRPr sz="1600"/>
+            </a:lvl3pPr>
+            <a:lvl4pPr marL="1371600" indent="0">
+              <a:buNone/>
+              <a:defRPr sz="1600"/>
+            </a:lvl4pPr>
+            <a:lvl5pPr marL="1828800" indent="0">
+              <a:buNone/>
+              <a:defRPr sz="1600"/>
+            </a:lvl5pPr>
+            <a:lvl6pPr marL="2286000" indent="0">
+              <a:buNone/>
+              <a:defRPr sz="1600"/>
+            </a:lvl6pPr>
+            <a:lvl7pPr marL="2743200" indent="0">
+              <a:buNone/>
+              <a:defRPr sz="1600"/>
+            </a:lvl7pPr>
+            <a:lvl8pPr marL="3200400" indent="0">
+              <a:buNone/>
+              <a:defRPr sz="1600"/>
+            </a:lvl8pPr>
+            <a:lvl9pPr marL="3657600" indent="0">
+              <a:buNone/>
+              <a:defRPr sz="1600"/>
+            </a:lvl9pPr>
+          </a:lstStyle>
+          <a:p>
+            <a:r>
+              <a:rPr lang="en-US"/>
+              <a:t>Click icon to add picture</a:t>
+            </a:r>
+            <a:endParaRPr lang="en-US" dirty="0"/>
+          </a:p>
+        </p:txBody>
+      </p:sp>
+      <p:sp>
+        <p:nvSpPr>
+          <p:cNvPr id="4" name="Text Placeholder 3"/>
+          <p:cNvSpPr>
+            <a:spLocks noGrp="1"/>
+          </p:cNvSpPr>
+          <p:nvPr>
+            <p:ph type="body" sz="half" idx="2"/>
+          </p:nvPr>
+        </p:nvSpPr>
+        <p:spPr>
+          <a:xfrm>
+            <a:off x="1295399" y="3255432"/>
+            <a:ext cx="6241816" cy="1828800"/>
           </a:xfrm>
         </p:spPr>
         <p:txBody>
-          <a:bodyPr/>
+          <a:bodyPr anchor="t">
+            <a:normAutofit/>
+          </a:bodyPr>
           <a:lstStyle>
-            <a:lvl1pPr marL="0" indent="0">
-              <a:buNone/>
-              <a:defRPr sz="3200"/>
-            </a:lvl1pPr>
-            <a:lvl2pPr marL="457200" indent="0">
-              <a:buNone/>
-              <a:defRPr sz="2800"/>
-            </a:lvl2pPr>
-            <a:lvl3pPr marL="914400" indent="0">
-              <a:buNone/>
-              <a:defRPr sz="2400"/>
-            </a:lvl3pPr>
-            <a:lvl4pPr marL="1371600" indent="0">
-              <a:buNone/>
-              <a:defRPr sz="2000"/>
-            </a:lvl4pPr>
-            <a:lvl5pPr marL="1828800" indent="0">
-              <a:buNone/>
-              <a:defRPr sz="2000"/>
-            </a:lvl5pPr>
-            <a:lvl6pPr marL="2286000" indent="0">
-              <a:buNone/>
-              <a:defRPr sz="2000"/>
-            </a:lvl6pPr>
-            <a:lvl7pPr marL="2743200" indent="0">
-              <a:buNone/>
-              <a:defRPr sz="2000"/>
-            </a:lvl7pPr>
-            <a:lvl8pPr marL="3200400" indent="0">
-              <a:buNone/>
-              <a:defRPr sz="2000"/>
-            </a:lvl8pPr>
-            <a:lvl9pPr marL="3657600" indent="0">
-              <a:buNone/>
-              <a:defRPr sz="2000"/>
-            </a:lvl9pPr>
-          </a:lstStyle>
-          <a:p>
-            <a:endParaRPr lang="en-US"/>
-          </a:p>
-        </p:txBody>
-      </p:sp>
-      <p:sp>
-        <p:nvSpPr>
-          <p:cNvPr id="4" name="Text Placeholder 3"/>
-          <p:cNvSpPr>
-            <a:spLocks noGrp="1"/>
-          </p:cNvSpPr>
-          <p:nvPr>
-            <p:ph type="body" sz="half" idx="2"/>
-          </p:nvPr>
-        </p:nvSpPr>
-        <p:spPr>
-          <a:xfrm>
-            <a:off x="1792288" y="5367338"/>
-            <a:ext cx="5486400" cy="804862"/>
-          </a:xfrm>
-        </p:spPr>
-        <p:txBody>
-          <a:bodyPr/>
-          <a:lstStyle>
-            <a:lvl1pPr marL="0" indent="0">
-              <a:buNone/>
-              <a:defRPr sz="1400"/>
+            <a:lvl1pPr marL="0" indent="0" algn="ctr">
+              <a:buNone/>
+              <a:defRPr sz="1800"/>
             </a:lvl1pPr>
             <a:lvl2pPr marL="457200" indent="0">
               <a:buNone/>
@@ -2487,7 +4979,7 @@
           <a:p>
             <a:pPr lvl="0"/>
             <a:r>
-              <a:rPr lang="en-US" smtClean="0"/>
+              <a:rPr lang="en-US"/>
               <a:t>Click to edit Master text styles</a:t>
             </a:r>
           </a:p>
@@ -2510,7 +5002,7 @@
           <a:p>
             <a:fld id="{5BCAD085-E8A6-8845-BD4E-CB4CCA059FC4}" type="datetimeFigureOut">
               <a:rPr lang="en-US" smtClean="0"/>
-              <a:t>1/27/13</a:t>
+              <a:t>5/25/2026</a:t>
             </a:fld>
             <a:endParaRPr lang="en-US"/>
           </a:p>
@@ -2561,7 +5053,7 @@
     </p:spTree>
     <p:extLst>
       <p:ext uri="{BB962C8B-B14F-4D97-AF65-F5344CB8AC3E}">
-        <p14:creationId xmlns:p14="http://schemas.microsoft.com/office/powerpoint/2010/main" val="3889236939"/>
+        <p14:creationId xmlns:p14="http://schemas.microsoft.com/office/powerpoint/2010/main" val="1835256798"/>
       </p:ext>
     </p:extLst>
   </p:cSld>
@@ -2575,7 +5067,7 @@
 <p:sldMaster xmlns:a="http://schemas.openxmlformats.org/drawingml/2006/main" xmlns:r="http://schemas.openxmlformats.org/officeDocument/2006/relationships" xmlns:p="http://schemas.openxmlformats.org/presentationml/2006/main">
   <p:cSld>
     <p:bg>
-      <p:bgRef idx="1001">
+      <p:bgRef idx="1003">
         <a:schemeClr val="bg1"/>
       </p:bgRef>
     </p:bg>
@@ -2593,6 +5085,143 @@
           <a:chExt cx="0" cy="0"/>
         </a:xfrm>
       </p:grpSpPr>
+      <p:grpSp>
+        <p:nvGrpSpPr>
+          <p:cNvPr id="7" name="Group 6"/>
+          <p:cNvGrpSpPr/>
+          <p:nvPr/>
+        </p:nvGrpSpPr>
+        <p:grpSpPr>
+          <a:xfrm>
+            <a:off x="-15736" y="0"/>
+            <a:ext cx="12229962" cy="6856214"/>
+            <a:chOff x="-15736" y="0"/>
+            <a:chExt cx="12229962" cy="6856214"/>
+          </a:xfrm>
+        </p:grpSpPr>
+        <p:pic>
+          <p:nvPicPr>
+            <p:cNvPr id="8" name="Picture 7" descr="HD-PanelContent.png"/>
+            <p:cNvPicPr>
+              <a:picLocks noChangeAspect="1"/>
+            </p:cNvPicPr>
+            <p:nvPr/>
+          </p:nvPicPr>
+          <p:blipFill>
+            <a:blip r:embed="rId19">
+              <a:extLst>
+                <a:ext uri="{28A0092B-C50C-407E-A947-70E740481C1C}">
+                  <a14:useLocalDpi xmlns:a14="http://schemas.microsoft.com/office/drawing/2010/main" val="0"/>
+                </a:ext>
+              </a:extLst>
+            </a:blip>
+            <a:stretch>
+              <a:fillRect/>
+            </a:stretch>
+          </p:blipFill>
+          <p:spPr>
+            <a:xfrm>
+              <a:off x="0" y="0"/>
+              <a:ext cx="12188825" cy="6856214"/>
+            </a:xfrm>
+            <a:prstGeom prst="rect">
+              <a:avLst/>
+            </a:prstGeom>
+          </p:spPr>
+        </p:pic>
+        <p:sp>
+          <p:nvSpPr>
+            <p:cNvPr id="9" name="Rectangle 8"/>
+            <p:cNvSpPr/>
+            <p:nvPr/>
+          </p:nvSpPr>
+          <p:spPr>
+            <a:xfrm>
+              <a:off x="608012" y="609600"/>
+              <a:ext cx="10972800" cy="5638800"/>
+            </a:xfrm>
+            <a:prstGeom prst="rect">
+              <a:avLst/>
+            </a:prstGeom>
+            <a:noFill/>
+            <a:ln w="15875" cap="flat">
+              <a:miter lim="800000"/>
+            </a:ln>
+          </p:spPr>
+          <p:style>
+            <a:lnRef idx="1">
+              <a:schemeClr val="accent1"/>
+            </a:lnRef>
+            <a:fillRef idx="3">
+              <a:schemeClr val="accent1"/>
+            </a:fillRef>
+            <a:effectRef idx="2">
+              <a:schemeClr val="accent1"/>
+            </a:effectRef>
+            <a:fontRef idx="minor">
+              <a:schemeClr val="lt1"/>
+            </a:fontRef>
+          </p:style>
+        </p:sp>
+        <p:pic>
+          <p:nvPicPr>
+            <p:cNvPr id="10" name="Picture 9" descr="HDRibbonContent-UniformTrim.png"/>
+            <p:cNvPicPr>
+              <a:picLocks noChangeAspect="1"/>
+            </p:cNvPicPr>
+            <p:nvPr/>
+          </p:nvPicPr>
+          <p:blipFill rotWithShape="1">
+            <a:blip r:embed="rId20">
+              <a:extLst>
+                <a:ext uri="{28A0092B-C50C-407E-A947-70E740481C1C}">
+                  <a14:useLocalDpi xmlns:a14="http://schemas.microsoft.com/office/drawing/2010/main" val="0"/>
+                </a:ext>
+              </a:extLst>
+            </a:blip>
+            <a:srcRect/>
+            <a:stretch/>
+          </p:blipFill>
+          <p:spPr>
+            <a:xfrm>
+              <a:off x="-15736" y="3153832"/>
+              <a:ext cx="777240" cy="606425"/>
+            </a:xfrm>
+            <a:prstGeom prst="rect">
+              <a:avLst/>
+            </a:prstGeom>
+          </p:spPr>
+        </p:pic>
+        <p:pic>
+          <p:nvPicPr>
+            <p:cNvPr id="11" name="Picture 10" descr="HDRibbonContent-UniformTrim.png"/>
+            <p:cNvPicPr>
+              <a:picLocks noChangeAspect="1"/>
+            </p:cNvPicPr>
+            <p:nvPr/>
+          </p:nvPicPr>
+          <p:blipFill rotWithShape="1">
+            <a:blip r:embed="rId20">
+              <a:extLst>
+                <a:ext uri="{28A0092B-C50C-407E-A947-70E740481C1C}">
+                  <a14:useLocalDpi xmlns:a14="http://schemas.microsoft.com/office/drawing/2010/main" val="0"/>
+                </a:ext>
+              </a:extLst>
+            </a:blip>
+            <a:srcRect/>
+            <a:stretch/>
+          </p:blipFill>
+          <p:spPr>
+            <a:xfrm>
+              <a:off x="11436986" y="3153832"/>
+              <a:ext cx="777240" cy="606425"/>
+            </a:xfrm>
+            <a:prstGeom prst="rect">
+              <a:avLst/>
+            </a:prstGeom>
+          </p:spPr>
+        </p:pic>
+      </p:grpSp>
       <p:sp>
         <p:nvSpPr>
           <p:cNvPr id="2" name="Title Placeholder 1"/>
@@ -2605,103 +5234,145 @@
         </p:nvSpPr>
         <p:spPr>
           <a:xfrm>
-            <a:off x="457200" y="274638"/>
-            <a:ext cx="8229600" cy="1143000"/>
+            <a:off x="1295402" y="982132"/>
+            <a:ext cx="9601196" cy="1303867"/>
+          </a:xfrm>
+          <a:prstGeom prst="rect">
+            <a:avLst/>
+          </a:prstGeom>
+          <a:effectLst/>
+        </p:spPr>
+        <p:txBody>
+          <a:bodyPr vert="horz" lIns="91440" tIns="45720" rIns="91440" bIns="45720" rtlCol="0" anchor="ctr">
+            <a:normAutofit/>
+          </a:bodyPr>
+          <a:lstStyle/>
+          <a:p>
+            <a:r>
+              <a:rPr lang="en-US"/>
+              <a:t>Click to edit Master title style</a:t>
+            </a:r>
+            <a:endParaRPr lang="en-US" dirty="0"/>
+          </a:p>
+        </p:txBody>
+      </p:sp>
+      <p:sp>
+        <p:nvSpPr>
+          <p:cNvPr id="3" name="Text Placeholder 2"/>
+          <p:cNvSpPr>
+            <a:spLocks noGrp="1"/>
+          </p:cNvSpPr>
+          <p:nvPr>
+            <p:ph type="body" idx="1"/>
+          </p:nvPr>
+        </p:nvSpPr>
+        <p:spPr>
+          <a:xfrm>
+            <a:off x="1295401" y="2556932"/>
+            <a:ext cx="9601196" cy="3318936"/>
           </a:xfrm>
           <a:prstGeom prst="rect">
             <a:avLst/>
           </a:prstGeom>
         </p:spPr>
         <p:txBody>
-          <a:bodyPr vert="horz" lIns="91440" tIns="45720" rIns="91440" bIns="45720" rtlCol="0" anchor="ctr">
+          <a:bodyPr vert="horz" lIns="91440" tIns="45720" rIns="91440" bIns="45720" rtlCol="0" anchor="t">
             <a:normAutofit/>
           </a:bodyPr>
           <a:lstStyle/>
           <a:p>
-            <a:r>
-              <a:rPr lang="en-US" smtClean="0"/>
-              <a:t>Click to edit Master title style</a:t>
-            </a:r>
-            <a:endParaRPr lang="en-US"/>
-          </a:p>
-        </p:txBody>
-      </p:sp>
-      <p:sp>
-        <p:nvSpPr>
-          <p:cNvPr id="3" name="Text Placeholder 2"/>
-          <p:cNvSpPr>
-            <a:spLocks noGrp="1"/>
-          </p:cNvSpPr>
-          <p:nvPr>
-            <p:ph type="body" idx="1"/>
+            <a:pPr lvl="0"/>
+            <a:r>
+              <a:rPr lang="en-US"/>
+              <a:t>Click to edit Master text styles</a:t>
+            </a:r>
+          </a:p>
+          <a:p>
+            <a:pPr lvl="1"/>
+            <a:r>
+              <a:rPr lang="en-US"/>
+              <a:t>Second level</a:t>
+            </a:r>
+          </a:p>
+          <a:p>
+            <a:pPr lvl="2"/>
+            <a:r>
+              <a:rPr lang="en-US"/>
+              <a:t>Third level</a:t>
+            </a:r>
+          </a:p>
+          <a:p>
+            <a:pPr lvl="3"/>
+            <a:r>
+              <a:rPr lang="en-US"/>
+              <a:t>Fourth level</a:t>
+            </a:r>
+          </a:p>
+          <a:p>
+            <a:pPr lvl="4"/>
+            <a:r>
+              <a:rPr lang="en-US"/>
+              <a:t>Fifth level</a:t>
+            </a:r>
+            <a:endParaRPr lang="en-US" dirty="0"/>
+          </a:p>
+        </p:txBody>
+      </p:sp>
+      <p:sp>
+        <p:nvSpPr>
+          <p:cNvPr id="4" name="Date Placeholder 3"/>
+          <p:cNvSpPr>
+            <a:spLocks noGrp="1"/>
+          </p:cNvSpPr>
+          <p:nvPr>
+            <p:ph type="dt" sz="half" idx="2"/>
           </p:nvPr>
         </p:nvSpPr>
         <p:spPr>
           <a:xfrm>
-            <a:off x="457200" y="1600200"/>
-            <a:ext cx="8229600" cy="4525963"/>
+            <a:off x="8677501" y="5969000"/>
+            <a:ext cx="1600200" cy="279400"/>
           </a:xfrm>
           <a:prstGeom prst="rect">
             <a:avLst/>
           </a:prstGeom>
         </p:spPr>
         <p:txBody>
-          <a:bodyPr vert="horz" lIns="91440" tIns="45720" rIns="91440" bIns="45720" rtlCol="0">
-            <a:normAutofit/>
-          </a:bodyPr>
-          <a:lstStyle/>
-          <a:p>
-            <a:pPr lvl="0"/>
-            <a:r>
+          <a:bodyPr vert="horz" lIns="91440" tIns="45720" rIns="91440" bIns="45720" rtlCol="0" anchor="ctr"/>
+          <a:lstStyle>
+            <a:lvl1pPr algn="r">
+              <a:defRPr sz="1000" b="0" i="0">
+                <a:solidFill>
+                  <a:schemeClr val="tx1"/>
+                </a:solidFill>
+                <a:effectLst/>
+                <a:latin typeface="+mn-lt"/>
+              </a:defRPr>
+            </a:lvl1pPr>
+          </a:lstStyle>
+          <a:p>
+            <a:fld id="{5BCAD085-E8A6-8845-BD4E-CB4CCA059FC4}" type="datetimeFigureOut">
               <a:rPr lang="en-US" smtClean="0"/>
-              <a:t>Click to edit Master text styles</a:t>
-            </a:r>
-          </a:p>
-          <a:p>
-            <a:pPr lvl="1"/>
-            <a:r>
-              <a:rPr lang="en-US" smtClean="0"/>
-              <a:t>Second level</a:t>
-            </a:r>
-          </a:p>
-          <a:p>
-            <a:pPr lvl="2"/>
-            <a:r>
-              <a:rPr lang="en-US" smtClean="0"/>
-              <a:t>Third level</a:t>
-            </a:r>
-          </a:p>
-          <a:p>
-            <a:pPr lvl="3"/>
-            <a:r>
-              <a:rPr lang="en-US" smtClean="0"/>
-              <a:t>Fourth level</a:t>
-            </a:r>
-          </a:p>
-          <a:p>
-            <a:pPr lvl="4"/>
-            <a:r>
-              <a:rPr lang="en-US" smtClean="0"/>
-              <a:t>Fifth level</a:t>
-            </a:r>
+              <a:t>5/25/2026</a:t>
+            </a:fld>
             <a:endParaRPr lang="en-US"/>
           </a:p>
         </p:txBody>
       </p:sp>
       <p:sp>
         <p:nvSpPr>
-          <p:cNvPr id="4" name="Date Placeholder 3"/>
-          <p:cNvSpPr>
-            <a:spLocks noGrp="1"/>
-          </p:cNvSpPr>
-          <p:nvPr>
-            <p:ph type="dt" sz="half" idx="2"/>
+          <p:cNvPr id="5" name="Footer Placeholder 4"/>
+          <p:cNvSpPr>
+            <a:spLocks noGrp="1"/>
+          </p:cNvSpPr>
+          <p:nvPr>
+            <p:ph type="ftr" sz="quarter" idx="3"/>
           </p:nvPr>
         </p:nvSpPr>
         <p:spPr>
           <a:xfrm>
-            <a:off x="457200" y="6356350"/>
-            <a:ext cx="2133600" cy="365125"/>
+            <a:off x="1295401" y="5969000"/>
+            <a:ext cx="7305900" cy="279400"/>
           </a:xfrm>
           <a:prstGeom prst="rect">
             <a:avLst/>
@@ -2711,38 +5382,34 @@
           <a:bodyPr vert="horz" lIns="91440" tIns="45720" rIns="91440" bIns="45720" rtlCol="0" anchor="ctr"/>
           <a:lstStyle>
             <a:lvl1pPr algn="l">
-              <a:defRPr sz="1200">
-                <a:solidFill>
-                  <a:schemeClr val="tx1">
-                    <a:tint val="75000"/>
-                  </a:schemeClr>
-                </a:solidFill>
+              <a:defRPr sz="1000" b="0" i="0">
+                <a:solidFill>
+                  <a:schemeClr val="tx1"/>
+                </a:solidFill>
+                <a:effectLst/>
+                <a:latin typeface="+mn-lt"/>
               </a:defRPr>
             </a:lvl1pPr>
           </a:lstStyle>
           <a:p>
-            <a:fld id="{5BCAD085-E8A6-8845-BD4E-CB4CCA059FC4}" type="datetimeFigureOut">
-              <a:rPr lang="en-US" smtClean="0"/>
-              <a:t>1/27/13</a:t>
-            </a:fld>
             <a:endParaRPr lang="en-US"/>
           </a:p>
         </p:txBody>
       </p:sp>
       <p:sp>
         <p:nvSpPr>
-          <p:cNvPr id="5" name="Footer Placeholder 4"/>
-          <p:cNvSpPr>
-            <a:spLocks noGrp="1"/>
-          </p:cNvSpPr>
-          <p:nvPr>
-            <p:ph type="ftr" sz="quarter" idx="3"/>
+          <p:cNvPr id="6" name="Slide Number Placeholder 5"/>
+          <p:cNvSpPr>
+            <a:spLocks noGrp="1"/>
+          </p:cNvSpPr>
+          <p:nvPr>
+            <p:ph type="sldNum" sz="quarter" idx="4"/>
           </p:nvPr>
         </p:nvSpPr>
         <p:spPr>
           <a:xfrm>
-            <a:off x="3124200" y="6356350"/>
-            <a:ext cx="2895600" cy="365125"/>
+            <a:off x="10353901" y="5969000"/>
+            <a:ext cx="542697" cy="279400"/>
           </a:xfrm>
           <a:prstGeom prst="rect">
             <a:avLst/>
@@ -2751,50 +5418,13 @@
         <p:txBody>
           <a:bodyPr vert="horz" lIns="91440" tIns="45720" rIns="91440" bIns="45720" rtlCol="0" anchor="ctr"/>
           <a:lstStyle>
-            <a:lvl1pPr algn="ctr">
-              <a:defRPr sz="1200">
-                <a:solidFill>
-                  <a:schemeClr val="tx1">
-                    <a:tint val="75000"/>
-                  </a:schemeClr>
-                </a:solidFill>
-              </a:defRPr>
-            </a:lvl1pPr>
-          </a:lstStyle>
-          <a:p>
-            <a:endParaRPr lang="en-US"/>
-          </a:p>
-        </p:txBody>
-      </p:sp>
-      <p:sp>
-        <p:nvSpPr>
-          <p:cNvPr id="6" name="Slide Number Placeholder 5"/>
-          <p:cNvSpPr>
-            <a:spLocks noGrp="1"/>
-          </p:cNvSpPr>
-          <p:nvPr>
-            <p:ph type="sldNum" sz="quarter" idx="4"/>
-          </p:nvPr>
-        </p:nvSpPr>
-        <p:spPr>
-          <a:xfrm>
-            <a:off x="6553200" y="6356350"/>
-            <a:ext cx="2133600" cy="365125"/>
-          </a:xfrm>
-          <a:prstGeom prst="rect">
-            <a:avLst/>
-          </a:prstGeom>
-        </p:spPr>
-        <p:txBody>
-          <a:bodyPr vert="horz" lIns="91440" tIns="45720" rIns="91440" bIns="45720" rtlCol="0" anchor="ctr"/>
-          <a:lstStyle>
             <a:lvl1pPr algn="r">
-              <a:defRPr sz="1200">
-                <a:solidFill>
-                  <a:schemeClr val="tx1">
-                    <a:tint val="75000"/>
-                  </a:schemeClr>
-                </a:solidFill>
+              <a:defRPr sz="1000" b="0" i="0">
+                <a:solidFill>
+                  <a:schemeClr val="tx1"/>
+                </a:solidFill>
+                <a:effectLst/>
+                <a:latin typeface="+mn-lt"/>
               </a:defRPr>
             </a:lvl1pPr>
           </a:lstStyle>
@@ -2810,23 +5440,29 @@
     </p:spTree>
     <p:extLst>
       <p:ext uri="{BB962C8B-B14F-4D97-AF65-F5344CB8AC3E}">
-        <p14:creationId xmlns:p14="http://schemas.microsoft.com/office/powerpoint/2010/main" val="2209977519"/>
+        <p14:creationId xmlns:p14="http://schemas.microsoft.com/office/powerpoint/2010/main" val="1381032226"/>
       </p:ext>
     </p:extLst>
   </p:cSld>
   <p:clrMap bg1="lt1" tx1="dk1" bg2="lt2" tx2="dk2" accent1="accent1" accent2="accent2" accent3="accent3" accent4="accent4" accent5="accent5" accent6="accent6" hlink="hlink" folHlink="folHlink"/>
   <p:sldLayoutIdLst>
-    <p:sldLayoutId id="2147483649" r:id="rId1"/>
-    <p:sldLayoutId id="2147483650" r:id="rId2"/>
-    <p:sldLayoutId id="2147483651" r:id="rId3"/>
-    <p:sldLayoutId id="2147483652" r:id="rId4"/>
-    <p:sldLayoutId id="2147483653" r:id="rId5"/>
-    <p:sldLayoutId id="2147483654" r:id="rId6"/>
-    <p:sldLayoutId id="2147483655" r:id="rId7"/>
-    <p:sldLayoutId id="2147483656" r:id="rId8"/>
-    <p:sldLayoutId id="2147483657" r:id="rId9"/>
-    <p:sldLayoutId id="2147483658" r:id="rId10"/>
-    <p:sldLayoutId id="2147483659" r:id="rId11"/>
+    <p:sldLayoutId id="2147483661" r:id="rId1"/>
+    <p:sldLayoutId id="2147483662" r:id="rId2"/>
+    <p:sldLayoutId id="2147483663" r:id="rId3"/>
+    <p:sldLayoutId id="2147483664" r:id="rId4"/>
+    <p:sldLayoutId id="2147483665" r:id="rId5"/>
+    <p:sldLayoutId id="2147483666" r:id="rId6"/>
+    <p:sldLayoutId id="2147483667" r:id="rId7"/>
+    <p:sldLayoutId id="2147483668" r:id="rId8"/>
+    <p:sldLayoutId id="2147483669" r:id="rId9"/>
+    <p:sldLayoutId id="2147483670" r:id="rId10"/>
+    <p:sldLayoutId id="2147483671" r:id="rId11"/>
+    <p:sldLayoutId id="2147483672" r:id="rId12"/>
+    <p:sldLayoutId id="2147483673" r:id="rId13"/>
+    <p:sldLayoutId id="2147483674" r:id="rId14"/>
+    <p:sldLayoutId id="2147483675" r:id="rId15"/>
+    <p:sldLayoutId id="2147483676" r:id="rId16"/>
+    <p:sldLayoutId id="2147483677" r:id="rId17"/>
   </p:sldLayoutIdLst>
   <p:txStyles>
     <p:titleStyle>
@@ -2835,27 +5471,101 @@
           <a:spcPct val="0"/>
         </a:spcBef>
         <a:buNone/>
-        <a:defRPr sz="4400" kern="1200">
+        <a:defRPr sz="4400" kern="1200" cap="none">
+          <a:ln w="3175" cmpd="sng">
+            <a:noFill/>
+          </a:ln>
           <a:solidFill>
-            <a:schemeClr val="tx1"/>
+            <a:schemeClr val="tx1">
+              <a:lumMod val="85000"/>
+              <a:lumOff val="15000"/>
+            </a:schemeClr>
           </a:solidFill>
+          <a:effectLst/>
           <a:latin typeface="+mj-lt"/>
           <a:ea typeface="+mj-ea"/>
           <a:cs typeface="+mj-cs"/>
         </a:defRPr>
       </a:lvl1pPr>
+      <a:lvl2pPr eaLnBrk="1" hangingPunct="1">
+        <a:defRPr>
+          <a:solidFill>
+            <a:schemeClr val="tx2"/>
+          </a:solidFill>
+        </a:defRPr>
+      </a:lvl2pPr>
+      <a:lvl3pPr eaLnBrk="1" hangingPunct="1">
+        <a:defRPr>
+          <a:solidFill>
+            <a:schemeClr val="tx2"/>
+          </a:solidFill>
+        </a:defRPr>
+      </a:lvl3pPr>
+      <a:lvl4pPr eaLnBrk="1" hangingPunct="1">
+        <a:defRPr>
+          <a:solidFill>
+            <a:schemeClr val="tx2"/>
+          </a:solidFill>
+        </a:defRPr>
+      </a:lvl4pPr>
+      <a:lvl5pPr eaLnBrk="1" hangingPunct="1">
+        <a:defRPr>
+          <a:solidFill>
+            <a:schemeClr val="tx2"/>
+          </a:solidFill>
+        </a:defRPr>
+      </a:lvl5pPr>
+      <a:lvl6pPr eaLnBrk="1" hangingPunct="1">
+        <a:defRPr>
+          <a:solidFill>
+            <a:schemeClr val="tx2"/>
+          </a:solidFill>
+        </a:defRPr>
+      </a:lvl6pPr>
+      <a:lvl7pPr eaLnBrk="1" hangingPunct="1">
+        <a:defRPr>
+          <a:solidFill>
+            <a:schemeClr val="tx2"/>
+          </a:solidFill>
+        </a:defRPr>
+      </a:lvl7pPr>
+      <a:lvl8pPr eaLnBrk="1" hangingPunct="1">
+        <a:defRPr>
+          <a:solidFill>
+            <a:schemeClr val="tx2"/>
+          </a:solidFill>
+        </a:defRPr>
+      </a:lvl8pPr>
+      <a:lvl9pPr eaLnBrk="1" hangingPunct="1">
+        <a:defRPr>
+          <a:solidFill>
+            <a:schemeClr val="tx2"/>
+          </a:solidFill>
+        </a:defRPr>
+      </a:lvl9pPr>
     </p:titleStyle>
     <p:bodyStyle>
-      <a:lvl1pPr marL="342900" indent="-342900" algn="l" defTabSz="457200" rtl="0" eaLnBrk="1" latinLnBrk="0" hangingPunct="1">
+      <a:lvl1pPr marL="285750" indent="-285750" algn="l" defTabSz="457200" rtl="0" eaLnBrk="1" latinLnBrk="0" hangingPunct="1">
         <a:spcBef>
           <a:spcPct val="20000"/>
         </a:spcBef>
+        <a:spcAft>
+          <a:spcPts val="600"/>
+        </a:spcAft>
+        <a:buClr>
+          <a:schemeClr val="accent1"/>
+        </a:buClr>
+        <a:buSzPct val="115000"/>
         <a:buFont typeface="Arial"/>
         <a:buChar char="•"/>
-        <a:defRPr sz="3200" kern="1200">
+        <a:defRPr sz="2400" kern="1200" cap="none">
           <a:solidFill>
-            <a:schemeClr val="tx1"/>
+            <a:schemeClr val="tx1">
+              <a:lumMod val="85000"/>
+              <a:lumOff val="15000"/>
+            </a:schemeClr>
           </a:solidFill>
+          <a:effectLst/>
           <a:latin typeface="+mn-lt"/>
           <a:ea typeface="+mn-ea"/>
           <a:cs typeface="+mn-cs"/>
@@ -2865,57 +5575,101 @@
         <a:spcBef>
           <a:spcPct val="20000"/>
         </a:spcBef>
+        <a:spcAft>
+          <a:spcPts val="600"/>
+        </a:spcAft>
+        <a:buClr>
+          <a:schemeClr val="accent1"/>
+        </a:buClr>
+        <a:buSzPct val="115000"/>
         <a:buFont typeface="Arial"/>
-        <a:buChar char="–"/>
-        <a:defRPr sz="2800" kern="1200">
+        <a:buChar char="•"/>
+        <a:defRPr sz="2000" kern="1200" cap="none">
           <a:solidFill>
-            <a:schemeClr val="tx1"/>
+            <a:schemeClr val="tx1">
+              <a:lumMod val="85000"/>
+              <a:lumOff val="15000"/>
+            </a:schemeClr>
           </a:solidFill>
+          <a:effectLst/>
           <a:latin typeface="+mn-lt"/>
           <a:ea typeface="+mn-ea"/>
           <a:cs typeface="+mn-cs"/>
         </a:defRPr>
       </a:lvl2pPr>
-      <a:lvl3pPr marL="1143000" indent="-228600" algn="l" defTabSz="457200" rtl="0" eaLnBrk="1" latinLnBrk="0" hangingPunct="1">
+      <a:lvl3pPr marL="1200150" indent="-285750" algn="l" defTabSz="457200" rtl="0" eaLnBrk="1" latinLnBrk="0" hangingPunct="1">
         <a:spcBef>
           <a:spcPct val="20000"/>
         </a:spcBef>
+        <a:spcAft>
+          <a:spcPts val="600"/>
+        </a:spcAft>
+        <a:buClr>
+          <a:schemeClr val="accent1"/>
+        </a:buClr>
+        <a:buSzPct val="115000"/>
         <a:buFont typeface="Arial"/>
         <a:buChar char="•"/>
-        <a:defRPr sz="2400" kern="1200">
+        <a:defRPr sz="1800" kern="1200" cap="none">
           <a:solidFill>
-            <a:schemeClr val="tx1"/>
+            <a:schemeClr val="tx1">
+              <a:lumMod val="85000"/>
+              <a:lumOff val="15000"/>
+            </a:schemeClr>
           </a:solidFill>
+          <a:effectLst/>
           <a:latin typeface="+mn-lt"/>
           <a:ea typeface="+mn-ea"/>
           <a:cs typeface="+mn-cs"/>
         </a:defRPr>
       </a:lvl3pPr>
-      <a:lvl4pPr marL="1600200" indent="-228600" algn="l" defTabSz="457200" rtl="0" eaLnBrk="1" latinLnBrk="0" hangingPunct="1">
+      <a:lvl4pPr marL="1543050" indent="-171450" algn="l" defTabSz="457200" rtl="0" eaLnBrk="1" latinLnBrk="0" hangingPunct="1">
         <a:spcBef>
           <a:spcPct val="20000"/>
         </a:spcBef>
+        <a:spcAft>
+          <a:spcPts val="600"/>
+        </a:spcAft>
+        <a:buClr>
+          <a:schemeClr val="accent1"/>
+        </a:buClr>
+        <a:buSzPct val="115000"/>
         <a:buFont typeface="Arial"/>
-        <a:buChar char="–"/>
-        <a:defRPr sz="2000" kern="1200">
+        <a:buChar char="•"/>
+        <a:defRPr sz="1600" kern="1200" cap="none">
           <a:solidFill>
-            <a:schemeClr val="tx1"/>
+            <a:schemeClr val="tx1">
+              <a:lumMod val="85000"/>
+              <a:lumOff val="15000"/>
+            </a:schemeClr>
           </a:solidFill>
+          <a:effectLst/>
           <a:latin typeface="+mn-lt"/>
           <a:ea typeface="+mn-ea"/>
           <a:cs typeface="+mn-cs"/>
         </a:defRPr>
       </a:lvl4pPr>
-      <a:lvl5pPr marL="2057400" indent="-228600" algn="l" defTabSz="457200" rtl="0" eaLnBrk="1" latinLnBrk="0" hangingPunct="1">
+      <a:lvl5pPr marL="2000250" indent="-171450" algn="l" defTabSz="457200" rtl="0" eaLnBrk="1" latinLnBrk="0" hangingPunct="1">
         <a:spcBef>
           <a:spcPct val="20000"/>
         </a:spcBef>
+        <a:spcAft>
+          <a:spcPts val="600"/>
+        </a:spcAft>
+        <a:buClr>
+          <a:schemeClr val="accent1"/>
+        </a:buClr>
+        <a:buSzPct val="115000"/>
         <a:buFont typeface="Arial"/>
-        <a:buChar char="»"/>
-        <a:defRPr sz="2000" kern="1200">
+        <a:buChar char="•"/>
+        <a:defRPr sz="1400" kern="1200" cap="none">
           <a:solidFill>
-            <a:schemeClr val="tx1"/>
+            <a:schemeClr val="tx1">
+              <a:lumMod val="85000"/>
+              <a:lumOff val="15000"/>
+            </a:schemeClr>
           </a:solidFill>
+          <a:effectLst/>
           <a:latin typeface="+mn-lt"/>
           <a:ea typeface="+mn-ea"/>
           <a:cs typeface="+mn-cs"/>
@@ -2925,12 +5679,23 @@
         <a:spcBef>
           <a:spcPct val="20000"/>
         </a:spcBef>
+        <a:spcAft>
+          <a:spcPts val="600"/>
+        </a:spcAft>
+        <a:buClr>
+          <a:schemeClr val="accent1"/>
+        </a:buClr>
+        <a:buSzPct val="115000"/>
         <a:buFont typeface="Arial"/>
         <a:buChar char="•"/>
-        <a:defRPr sz="2000" kern="1200">
+        <a:defRPr sz="1400" kern="1200" cap="none">
           <a:solidFill>
-            <a:schemeClr val="tx1"/>
+            <a:schemeClr val="tx1">
+              <a:lumMod val="85000"/>
+              <a:lumOff val="15000"/>
+            </a:schemeClr>
           </a:solidFill>
+          <a:effectLst/>
           <a:latin typeface="+mn-lt"/>
           <a:ea typeface="+mn-ea"/>
           <a:cs typeface="+mn-cs"/>
@@ -2940,12 +5705,23 @@
         <a:spcBef>
           <a:spcPct val="20000"/>
         </a:spcBef>
+        <a:spcAft>
+          <a:spcPts val="600"/>
+        </a:spcAft>
+        <a:buClr>
+          <a:schemeClr val="accent1"/>
+        </a:buClr>
+        <a:buSzPct val="115000"/>
         <a:buFont typeface="Arial"/>
         <a:buChar char="•"/>
-        <a:defRPr sz="2000" kern="1200">
+        <a:defRPr sz="1400" kern="1200" cap="none">
           <a:solidFill>
-            <a:schemeClr val="tx1"/>
+            <a:schemeClr val="tx1">
+              <a:lumMod val="85000"/>
+              <a:lumOff val="15000"/>
+            </a:schemeClr>
           </a:solidFill>
+          <a:effectLst/>
           <a:latin typeface="+mn-lt"/>
           <a:ea typeface="+mn-ea"/>
           <a:cs typeface="+mn-cs"/>
@@ -2955,12 +5731,23 @@
         <a:spcBef>
           <a:spcPct val="20000"/>
         </a:spcBef>
+        <a:spcAft>
+          <a:spcPts val="600"/>
+        </a:spcAft>
+        <a:buClr>
+          <a:schemeClr val="accent1"/>
+        </a:buClr>
+        <a:buSzPct val="115000"/>
         <a:buFont typeface="Arial"/>
         <a:buChar char="•"/>
-        <a:defRPr sz="2000" kern="1200">
+        <a:defRPr sz="1400" kern="1200" cap="none">
           <a:solidFill>
-            <a:schemeClr val="tx1"/>
+            <a:schemeClr val="tx1">
+              <a:lumMod val="85000"/>
+              <a:lumOff val="15000"/>
+            </a:schemeClr>
           </a:solidFill>
+          <a:effectLst/>
           <a:latin typeface="+mn-lt"/>
           <a:ea typeface="+mn-ea"/>
           <a:cs typeface="+mn-cs"/>
@@ -2970,12 +5757,23 @@
         <a:spcBef>
           <a:spcPct val="20000"/>
         </a:spcBef>
+        <a:spcAft>
+          <a:spcPts val="600"/>
+        </a:spcAft>
+        <a:buClr>
+          <a:schemeClr val="accent1"/>
+        </a:buClr>
+        <a:buSzPct val="115000"/>
         <a:buFont typeface="Arial"/>
         <a:buChar char="•"/>
-        <a:defRPr sz="2000" kern="1200">
+        <a:defRPr sz="1400" kern="1200" cap="none">
           <a:solidFill>
-            <a:schemeClr val="tx1"/>
+            <a:schemeClr val="tx1">
+              <a:lumMod val="85000"/>
+              <a:lumOff val="15000"/>
+            </a:schemeClr>
           </a:solidFill>
+          <a:effectLst/>
           <a:latin typeface="+mn-lt"/>
           <a:ea typeface="+mn-ea"/>
           <a:cs typeface="+mn-cs"/>
@@ -3082,7 +5880,7 @@
 </file>
 
 <file path=ppt/slides/slide1.xml><?xml version="1.0" encoding="utf-8"?>
-<p:sld xmlns:a="http://schemas.openxmlformats.org/drawingml/2006/main" xmlns:p="http://schemas.openxmlformats.org/presentationml/2006/main" xmlns:r="http://schemas.openxmlformats.org/officeDocument/2006/relationships">
+<p:sld xmlns:a="http://schemas.openxmlformats.org/drawingml/2006/main" xmlns:r="http://schemas.openxmlformats.org/officeDocument/2006/relationships" xmlns:p="http://schemas.openxmlformats.org/presentationml/2006/main">
   <p:cSld>
     <p:spTree>
       <p:nvGrpSpPr>
@@ -3090,7 +5888,14 @@
         <p:cNvGrpSpPr/>
         <p:nvPr/>
       </p:nvGrpSpPr>
-      <p:grpSpPr/>
+      <p:grpSpPr>
+        <a:xfrm>
+          <a:off x="0" y="0"/>
+          <a:ext cx="0" cy="0"/>
+          <a:chOff x="0" y="0"/>
+          <a:chExt cx="0" cy="0"/>
+        </a:xfrm>
+      </p:grpSpPr>
       <p:sp>
         <p:nvSpPr>
           <p:cNvPr id="2" name="Title 1"/>
@@ -3101,13 +5906,503 @@
             <p:ph type="ctrTitle"/>
           </p:nvPr>
         </p:nvSpPr>
+        <p:spPr>
+          <a:xfrm>
+            <a:off x="1828800" y="1495424"/>
+            <a:ext cx="8500533" cy="934509"/>
+          </a:xfrm>
+        </p:spPr>
+        <p:txBody>
+          <a:bodyPr/>
+          <a:lstStyle/>
+          <a:p>
+            <a:r>
+              <a:rPr sz="4800" dirty="0"/>
+              <a:t>AI MENTAL HEALTH UK</a:t>
+            </a:r>
+          </a:p>
+        </p:txBody>
+      </p:sp>
+      <p:sp>
+        <p:nvSpPr>
+          <p:cNvPr id="3" name="Subtitle 2"/>
+          <p:cNvSpPr>
+            <a:spLocks noGrp="1"/>
+          </p:cNvSpPr>
+          <p:nvPr>
+            <p:ph type="subTitle" idx="1"/>
+          </p:nvPr>
+        </p:nvSpPr>
+        <p:spPr>
+          <a:xfrm>
+            <a:off x="2895600" y="2457450"/>
+            <a:ext cx="6400800" cy="2690284"/>
+          </a:xfrm>
+        </p:spPr>
+        <p:txBody>
+          <a:bodyPr>
+            <a:normAutofit/>
+          </a:bodyPr>
+          <a:lstStyle/>
+          <a:p>
+            <a:r>
+              <a:rPr dirty="0">
+                <a:latin typeface="Times New Roman" panose="02020603050405020304" pitchFamily="18" charset="0"/>
+                <a:cs typeface="Times New Roman" panose="02020603050405020304" pitchFamily="18" charset="0"/>
+              </a:rPr>
+              <a:t>Mental Health Risk Prediction Model</a:t>
+            </a:r>
+          </a:p>
+          <a:p>
+            <a:r>
+              <a:rPr dirty="0">
+                <a:latin typeface="Times New Roman" panose="02020603050405020304" pitchFamily="18" charset="0"/>
+                <a:cs typeface="Times New Roman" panose="02020603050405020304" pitchFamily="18" charset="0"/>
+              </a:rPr>
+              <a:t>AIML-4 Demo Walkthrough</a:t>
+            </a:r>
+          </a:p>
+          <a:p>
+            <a:r>
+              <a:rPr dirty="0">
+                <a:latin typeface="Times New Roman" panose="02020603050405020304" pitchFamily="18" charset="0"/>
+                <a:cs typeface="Times New Roman" panose="02020603050405020304" pitchFamily="18" charset="0"/>
+              </a:rPr>
+              <a:t>May 2026</a:t>
+            </a:r>
+          </a:p>
+          <a:p>
+            <a:endParaRPr dirty="0">
+              <a:latin typeface="Times New Roman" panose="02020603050405020304" pitchFamily="18" charset="0"/>
+              <a:cs typeface="Times New Roman" panose="02020603050405020304" pitchFamily="18" charset="0"/>
+            </a:endParaRPr>
+          </a:p>
+          <a:p>
+            <a:r>
+              <a:rPr dirty="0">
+                <a:latin typeface="Times New Roman" panose="02020603050405020304" pitchFamily="18" charset="0"/>
+                <a:cs typeface="Times New Roman" panose="02020603050405020304" pitchFamily="18" charset="0"/>
+              </a:rPr>
+              <a:t>Team: </a:t>
+            </a:r>
+            <a:r>
+              <a:rPr lang="en-US" dirty="0">
+                <a:latin typeface="Times New Roman" panose="02020603050405020304" pitchFamily="18" charset="0"/>
+                <a:cs typeface="Times New Roman" panose="02020603050405020304" pitchFamily="18" charset="0"/>
+              </a:rPr>
+              <a:t>AI/ML</a:t>
+            </a:r>
+            <a:endParaRPr dirty="0">
+              <a:latin typeface="Times New Roman" panose="02020603050405020304" pitchFamily="18" charset="0"/>
+              <a:cs typeface="Times New Roman" panose="02020603050405020304" pitchFamily="18" charset="0"/>
+            </a:endParaRPr>
+          </a:p>
+        </p:txBody>
+      </p:sp>
+    </p:spTree>
+  </p:cSld>
+  <p:clrMapOvr>
+    <a:masterClrMapping/>
+  </p:clrMapOvr>
+</p:sld>
+</file>
+
+<file path=ppt/slides/slide10.xml><?xml version="1.0" encoding="utf-8"?>
+<p:sld xmlns:a="http://schemas.openxmlformats.org/drawingml/2006/main" xmlns:r="http://schemas.openxmlformats.org/officeDocument/2006/relationships" xmlns:p="http://schemas.openxmlformats.org/presentationml/2006/main">
+  <p:cSld>
+    <p:spTree>
+      <p:nvGrpSpPr>
+        <p:cNvPr id="1" name=""/>
+        <p:cNvGrpSpPr/>
+        <p:nvPr/>
+      </p:nvGrpSpPr>
+      <p:grpSpPr>
+        <a:xfrm>
+          <a:off x="0" y="0"/>
+          <a:ext cx="0" cy="0"/>
+          <a:chOff x="0" y="0"/>
+          <a:chExt cx="0" cy="0"/>
+        </a:xfrm>
+      </p:grpSpPr>
+      <p:sp>
+        <p:nvSpPr>
+          <p:cNvPr id="2" name="Title 1"/>
+          <p:cNvSpPr>
+            <a:spLocks noGrp="1"/>
+          </p:cNvSpPr>
+          <p:nvPr>
+            <p:ph type="title"/>
+          </p:nvPr>
+        </p:nvSpPr>
         <p:spPr/>
         <p:txBody>
           <a:bodyPr/>
           <a:lstStyle/>
           <a:p>
             <a:r>
-              <a:t>AI Mental Health UK</a:t>
+              <a:t>Week 4: Model Validation</a:t>
+            </a:r>
+          </a:p>
+        </p:txBody>
+      </p:sp>
+      <p:sp>
+        <p:nvSpPr>
+          <p:cNvPr id="3" name="Content Placeholder 2"/>
+          <p:cNvSpPr>
+            <a:spLocks noGrp="1"/>
+          </p:cNvSpPr>
+          <p:nvPr>
+            <p:ph idx="1"/>
+          </p:nvPr>
+        </p:nvSpPr>
+        <p:spPr/>
+        <p:txBody>
+          <a:bodyPr/>
+          <a:lstStyle/>
+          <a:p>
+            <a:pPr>
+              <a:defRPr sz="1800"/>
+            </a:pPr>
+            <a:r>
+              <a:t>AIML-1: Validation</a:t>
+            </a:r>
+          </a:p>
+          <a:p>
+            <a:pPr>
+              <a:defRPr sz="1800"/>
+            </a:pPr>
+            <a:r>
+              <a:t>MHSDS Validation: F1=0.34, AUC=0.51</a:t>
+            </a:r>
+          </a:p>
+          <a:p>
+            <a:pPr>
+              <a:defRPr sz="1800"/>
+            </a:pPr>
+            <a:r>
+              <a:t>Model Card created</a:t>
+            </a:r>
+          </a:p>
+          <a:p>
+            <a:pPr>
+              <a:defRPr sz="1800"/>
+            </a:pPr>
+            <a:r>
+              <a:t>Load testing completed</a:t>
+            </a:r>
+          </a:p>
+        </p:txBody>
+      </p:sp>
+    </p:spTree>
+  </p:cSld>
+  <p:clrMapOvr>
+    <a:masterClrMapping/>
+  </p:clrMapOvr>
+</p:sld>
+</file>
+
+<file path=ppt/slides/slide11.xml><?xml version="1.0" encoding="utf-8"?>
+<p:sld xmlns:a="http://schemas.openxmlformats.org/drawingml/2006/main" xmlns:r="http://schemas.openxmlformats.org/officeDocument/2006/relationships" xmlns:p="http://schemas.openxmlformats.org/presentationml/2006/main">
+  <p:cSld>
+    <p:spTree>
+      <p:nvGrpSpPr>
+        <p:cNvPr id="1" name=""/>
+        <p:cNvGrpSpPr/>
+        <p:nvPr/>
+      </p:nvGrpSpPr>
+      <p:grpSpPr>
+        <a:xfrm>
+          <a:off x="0" y="0"/>
+          <a:ext cx="0" cy="0"/>
+          <a:chOff x="0" y="0"/>
+          <a:chExt cx="0" cy="0"/>
+        </a:xfrm>
+      </p:grpSpPr>
+      <p:sp>
+        <p:nvSpPr>
+          <p:cNvPr id="2" name="TextBox 1"/>
+          <p:cNvSpPr txBox="1"/>
+          <p:nvPr/>
+        </p:nvSpPr>
+        <p:spPr>
+          <a:xfrm>
+            <a:off x="702733" y="833120"/>
+            <a:ext cx="10972800" cy="731520"/>
+          </a:xfrm>
+          <a:prstGeom prst="rect">
+            <a:avLst/>
+          </a:prstGeom>
+          <a:noFill/>
+        </p:spPr>
+        <p:txBody>
+          <a:bodyPr wrap="none">
+            <a:spAutoFit/>
+          </a:bodyPr>
+          <a:lstStyle/>
+          <a:p>
+            <a:pPr>
+              <a:defRPr sz="3200" b="1"/>
+            </a:pPr>
+            <a:r>
+              <a:rPr dirty="0"/>
+              <a:t>Week 4: Bias Audit</a:t>
+            </a:r>
+          </a:p>
+        </p:txBody>
+      </p:sp>
+      <p:pic>
+        <p:nvPicPr>
+          <p:cNvPr id="3" name="Picture 2" descr="bias_audit_plot.png"/>
+          <p:cNvPicPr>
+            <a:picLocks noChangeAspect="1"/>
+          </p:cNvPicPr>
+          <p:nvPr/>
+        </p:nvPicPr>
+        <p:blipFill>
+          <a:blip r:embed="rId2"/>
+          <a:stretch>
+            <a:fillRect/>
+          </a:stretch>
+        </p:blipFill>
+        <p:spPr>
+          <a:xfrm>
+            <a:off x="1828800" y="2150533"/>
+            <a:ext cx="8229600" cy="2743200"/>
+          </a:xfrm>
+          <a:prstGeom prst="rect">
+            <a:avLst/>
+          </a:prstGeom>
+        </p:spPr>
+      </p:pic>
+    </p:spTree>
+  </p:cSld>
+  <p:clrMapOvr>
+    <a:masterClrMapping/>
+  </p:clrMapOvr>
+</p:sld>
+</file>
+
+<file path=ppt/slides/slide12.xml><?xml version="1.0" encoding="utf-8"?>
+<p:sld xmlns:a="http://schemas.openxmlformats.org/drawingml/2006/main" xmlns:r="http://schemas.openxmlformats.org/officeDocument/2006/relationships" xmlns:p="http://schemas.openxmlformats.org/presentationml/2006/main">
+  <p:cSld>
+    <p:spTree>
+      <p:nvGrpSpPr>
+        <p:cNvPr id="1" name=""/>
+        <p:cNvGrpSpPr/>
+        <p:nvPr/>
+      </p:nvGrpSpPr>
+      <p:grpSpPr>
+        <a:xfrm>
+          <a:off x="0" y="0"/>
+          <a:ext cx="0" cy="0"/>
+          <a:chOff x="0" y="0"/>
+          <a:chExt cx="0" cy="0"/>
+        </a:xfrm>
+      </p:grpSpPr>
+      <p:sp>
+        <p:nvSpPr>
+          <p:cNvPr id="2" name="Title 1"/>
+          <p:cNvSpPr>
+            <a:spLocks noGrp="1"/>
+          </p:cNvSpPr>
+          <p:nvPr>
+            <p:ph type="title"/>
+          </p:nvPr>
+        </p:nvSpPr>
+        <p:spPr/>
+        <p:txBody>
+          <a:bodyPr/>
+          <a:lstStyle/>
+          <a:p>
+            <a:r>
+              <a:t>AIML-4: Live Demo</a:t>
+            </a:r>
+          </a:p>
+        </p:txBody>
+      </p:sp>
+      <p:sp>
+        <p:nvSpPr>
+          <p:cNvPr id="3" name="Content Placeholder 2"/>
+          <p:cNvSpPr>
+            <a:spLocks noGrp="1"/>
+          </p:cNvSpPr>
+          <p:nvPr>
+            <p:ph idx="1"/>
+          </p:nvPr>
+        </p:nvSpPr>
+        <p:spPr/>
+        <p:txBody>
+          <a:bodyPr/>
+          <a:lstStyle/>
+          <a:p>
+            <a:pPr>
+              <a:defRPr sz="1800"/>
+            </a:pPr>
+            <a:r>
+              <a:t>Run: python Week 4/demo_notebook.py</a:t>
+            </a:r>
+          </a:p>
+          <a:p>
+            <a:pPr>
+              <a:defRPr sz="1800"/>
+            </a:pPr>
+            <a:r>
+              <a:t>P001: PHQ-9=18, GAD-7=15 → Risk 9.95 (HIGH)</a:t>
+            </a:r>
+          </a:p>
+          <a:p>
+            <a:pPr>
+              <a:defRPr sz="1800"/>
+            </a:pPr>
+            <a:r>
+              <a:t>P002: PHQ-9=3, GAD-7=2 → Risk 0.02 (LOW)</a:t>
+            </a:r>
+          </a:p>
+          <a:p>
+            <a:pPr>
+              <a:defRPr sz="1800"/>
+            </a:pPr>
+            <a:r>
+              <a:t>P003: PHQ-9=20, GAD-7=18 → Risk 9.96 (HIGH)</a:t>
+            </a:r>
+          </a:p>
+        </p:txBody>
+      </p:sp>
+    </p:spTree>
+  </p:cSld>
+  <p:clrMapOvr>
+    <a:masterClrMapping/>
+  </p:clrMapOvr>
+</p:sld>
+</file>
+
+<file path=ppt/slides/slide13.xml><?xml version="1.0" encoding="utf-8"?>
+<p:sld xmlns:a="http://schemas.openxmlformats.org/drawingml/2006/main" xmlns:r="http://schemas.openxmlformats.org/officeDocument/2006/relationships" xmlns:p="http://schemas.openxmlformats.org/presentationml/2006/main">
+  <p:cSld>
+    <p:spTree>
+      <p:nvGrpSpPr>
+        <p:cNvPr id="1" name=""/>
+        <p:cNvGrpSpPr/>
+        <p:nvPr/>
+      </p:nvGrpSpPr>
+      <p:grpSpPr>
+        <a:xfrm>
+          <a:off x="0" y="0"/>
+          <a:ext cx="0" cy="0"/>
+          <a:chOff x="0" y="0"/>
+          <a:chExt cx="0" cy="0"/>
+        </a:xfrm>
+      </p:grpSpPr>
+      <p:sp>
+        <p:nvSpPr>
+          <p:cNvPr id="2" name="Title 1"/>
+          <p:cNvSpPr>
+            <a:spLocks noGrp="1"/>
+          </p:cNvSpPr>
+          <p:nvPr>
+            <p:ph type="title"/>
+          </p:nvPr>
+        </p:nvSpPr>
+        <p:spPr/>
+        <p:txBody>
+          <a:bodyPr/>
+          <a:lstStyle/>
+          <a:p>
+            <a:r>
+              <a:t>Limitations</a:t>
+            </a:r>
+          </a:p>
+        </p:txBody>
+      </p:sp>
+      <p:sp>
+        <p:nvSpPr>
+          <p:cNvPr id="3" name="Content Placeholder 2"/>
+          <p:cNvSpPr>
+            <a:spLocks noGrp="1"/>
+          </p:cNvSpPr>
+          <p:nvPr>
+            <p:ph idx="1"/>
+          </p:nvPr>
+        </p:nvSpPr>
+        <p:spPr/>
+        <p:txBody>
+          <a:bodyPr/>
+          <a:lstStyle/>
+          <a:p>
+            <a:r>
+              <a:t>NOT clinically validated</a:t>
+            </a:r>
+          </a:p>
+          <a:p>
+            <a:r>
+              <a:t>Trained on synthetic data</a:t>
+            </a:r>
+          </a:p>
+          <a:p>
+            <a:r>
+              <a:t>Validation metrics need improvement</a:t>
+            </a:r>
+          </a:p>
+          <a:p>
+            <a:r>
+              <a:t>NHS approval pending</a:t>
+            </a:r>
+          </a:p>
+          <a:p>
+            <a:r>
+              <a:t>NOT clinical replacement</a:t>
+            </a:r>
+          </a:p>
+        </p:txBody>
+      </p:sp>
+    </p:spTree>
+  </p:cSld>
+  <p:clrMapOvr>
+    <a:masterClrMapping/>
+  </p:clrMapOvr>
+</p:sld>
+</file>
+
+<file path=ppt/slides/slide14.xml><?xml version="1.0" encoding="utf-8"?>
+<p:sld xmlns:a="http://schemas.openxmlformats.org/drawingml/2006/main" xmlns:r="http://schemas.openxmlformats.org/officeDocument/2006/relationships" xmlns:p="http://schemas.openxmlformats.org/presentationml/2006/main">
+  <p:cSld>
+    <p:spTree>
+      <p:nvGrpSpPr>
+        <p:cNvPr id="1" name=""/>
+        <p:cNvGrpSpPr/>
+        <p:nvPr/>
+      </p:nvGrpSpPr>
+      <p:grpSpPr>
+        <a:xfrm>
+          <a:off x="0" y="0"/>
+          <a:ext cx="0" cy="0"/>
+          <a:chOff x="0" y="0"/>
+          <a:chExt cx="0" cy="0"/>
+        </a:xfrm>
+      </p:grpSpPr>
+      <p:sp>
+        <p:nvSpPr>
+          <p:cNvPr id="2" name="Title 1"/>
+          <p:cNvSpPr>
+            <a:spLocks noGrp="1"/>
+          </p:cNvSpPr>
+          <p:nvPr>
+            <p:ph type="ctrTitle"/>
+          </p:nvPr>
+        </p:nvSpPr>
+        <p:spPr>
+          <a:xfrm>
+            <a:off x="2209800" y="1683808"/>
+            <a:ext cx="7772400" cy="1470025"/>
+          </a:xfrm>
+        </p:spPr>
+        <p:txBody>
+          <a:bodyPr/>
+          <a:lstStyle/>
+          <a:p>
+            <a:r>
+              <a:rPr dirty="0"/>
+              <a:t>Thank You!</a:t>
             </a:r>
           </a:p>
         </p:txBody>
@@ -3122,18 +6417,42 @@
             <p:ph type="subTitle" idx="1"/>
           </p:nvPr>
         </p:nvSpPr>
-        <p:spPr/>
-        <p:txBody>
-          <a:bodyPr/>
-          <a:lstStyle/>
-          <a:p>
-            <a:r>
-              <a:t>Mental Health Risk Prediction</a:t>
-            </a:r>
-          </a:p>
-          <a:p>
-            <a:r>
-              <a:t>AIML-4 | May 2026</a:t>
+        <p:spPr>
+          <a:xfrm>
+            <a:off x="2819399" y="3530600"/>
+            <a:ext cx="6400800" cy="1752600"/>
+          </a:xfrm>
+        </p:spPr>
+        <p:txBody>
+          <a:bodyPr>
+            <a:normAutofit fontScale="85000" lnSpcReduction="20000"/>
+          </a:bodyPr>
+          <a:lstStyle/>
+          <a:p>
+            <a:r>
+              <a:rPr dirty="0"/>
+              <a:t>Dinisha Jain</a:t>
+            </a:r>
+          </a:p>
+          <a:p>
+            <a:r>
+              <a:rPr dirty="0"/>
+              <a:t>Mohit</a:t>
+            </a:r>
+          </a:p>
+          <a:p>
+            <a:r>
+              <a:rPr dirty="0"/>
+              <a:t>May 2026</a:t>
+            </a:r>
+          </a:p>
+          <a:p>
+            <a:endParaRPr dirty="0"/>
+          </a:p>
+          <a:p>
+            <a:r>
+              <a:rPr dirty="0"/>
+              <a:t>Questions?</a:t>
             </a:r>
           </a:p>
         </p:txBody>
@@ -3147,7 +6466,7 @@
 </file>
 
 <file path=ppt/slides/slide2.xml><?xml version="1.0" encoding="utf-8"?>
-<p:sld xmlns:a="http://schemas.openxmlformats.org/drawingml/2006/main" xmlns:p="http://schemas.openxmlformats.org/presentationml/2006/main" xmlns:r="http://schemas.openxmlformats.org/officeDocument/2006/relationships">
+<p:sld xmlns:a="http://schemas.openxmlformats.org/drawingml/2006/main" xmlns:r="http://schemas.openxmlformats.org/officeDocument/2006/relationships" xmlns:p="http://schemas.openxmlformats.org/presentationml/2006/main">
   <p:cSld>
     <p:spTree>
       <p:nvGrpSpPr>
@@ -3155,7 +6474,14 @@
         <p:cNvGrpSpPr/>
         <p:nvPr/>
       </p:nvGrpSpPr>
-      <p:grpSpPr/>
+      <p:grpSpPr>
+        <a:xfrm>
+          <a:off x="0" y="0"/>
+          <a:ext cx="0" cy="0"/>
+          <a:chOff x="0" y="0"/>
+          <a:chExt cx="0" cy="0"/>
+        </a:xfrm>
+      </p:grpSpPr>
       <p:sp>
         <p:nvSpPr>
           <p:cNvPr id="2" name="Title 1"/>
@@ -3192,18 +6518,43 @@
           <a:bodyPr/>
           <a:lstStyle/>
           <a:p>
-            <a:r>
-              <a:t>Purpose: Predict 30-day readmission risk</a:t>
-            </a:r>
-          </a:p>
-          <a:p>
-            <a:r>
-              <a:t>Model: XGBoost + RF + LogReg Ensemble</a:t>
-            </a:r>
-          </a:p>
-          <a:p>
-            <a:r>
-              <a:t>Team: Dinisha Jain, Mohit</a:t>
+            <a:pPr>
+              <a:defRPr sz="1800"/>
+            </a:pPr>
+            <a:r>
+              <a:t>Purpose: Predict 30-day readmission risk for mental health patients</a:t>
+            </a:r>
+          </a:p>
+          <a:p>
+            <a:pPr>
+              <a:defRPr sz="1800"/>
+            </a:pPr>
+            <a:r>
+              <a:t>Model: Ensemble (XGBoost + RF + LogReg)</a:t>
+            </a:r>
+          </a:p>
+          <a:p>
+            <a:pPr>
+              <a:defRPr sz="1800"/>
+            </a:pPr>
+            <a:r>
+              <a:t>Features: 14 input features</a:t>
+            </a:r>
+          </a:p>
+          <a:p>
+            <a:pPr>
+              <a:defRPr sz="1800"/>
+            </a:pPr>
+            <a:r>
+              <a:t>Target: F1 &gt; 0.80</a:t>
+            </a:r>
+          </a:p>
+          <a:p>
+            <a:pPr>
+              <a:defRPr sz="1800"/>
+            </a:pPr>
+            <a:r>
+              <a:t>Data: NHS MHSDS</a:t>
             </a:r>
           </a:p>
         </p:txBody>
@@ -3217,7 +6568,7 @@
 </file>
 
 <file path=ppt/slides/slide3.xml><?xml version="1.0" encoding="utf-8"?>
-<p:sld xmlns:a="http://schemas.openxmlformats.org/drawingml/2006/main" xmlns:p="http://schemas.openxmlformats.org/presentationml/2006/main" xmlns:r="http://schemas.openxmlformats.org/officeDocument/2006/relationships">
+<p:sld xmlns:a="http://schemas.openxmlformats.org/drawingml/2006/main" xmlns:r="http://schemas.openxmlformats.org/officeDocument/2006/relationships" xmlns:p="http://schemas.openxmlformats.org/presentationml/2006/main">
   <p:cSld>
     <p:spTree>
       <p:nvGrpSpPr>
@@ -3225,7 +6576,14 @@
         <p:cNvGrpSpPr/>
         <p:nvPr/>
       </p:nvGrpSpPr>
-      <p:grpSpPr/>
+      <p:grpSpPr>
+        <a:xfrm>
+          <a:off x="0" y="0"/>
+          <a:ext cx="0" cy="0"/>
+          <a:chOff x="0" y="0"/>
+          <a:chExt cx="0" cy="0"/>
+        </a:xfrm>
+      </p:grpSpPr>
       <p:sp>
         <p:nvSpPr>
           <p:cNvPr id="2" name="Title 1"/>
@@ -3242,7 +6600,7 @@
           <a:lstStyle/>
           <a:p>
             <a:r>
-              <a:t>Live Demo Results</a:t>
+              <a:t>Week 1: Data Collection &amp; EDA</a:t>
             </a:r>
           </a:p>
         </p:txBody>
@@ -3262,18 +6620,43 @@
           <a:bodyPr/>
           <a:lstStyle/>
           <a:p>
-            <a:r>
-              <a:t>P001: PHQ-9=18, GAD-7=15 → Risk 9.95 (HIGH)</a:t>
-            </a:r>
-          </a:p>
-          <a:p>
-            <a:r>
-              <a:t>P002: PHQ-9=3, GAD-7=2 → Risk 0.02 (LOW)</a:t>
-            </a:r>
-          </a:p>
-          <a:p>
-            <a:r>
-              <a:t>P003: PHQ-9=20, GAD-7=18 → Risk 9.96 (HIGH)</a:t>
+            <a:pPr>
+              <a:defRPr sz="1800"/>
+            </a:pPr>
+            <a:r>
+              <a:t>AIML-1: Data Analysis</a:t>
+            </a:r>
+          </a:p>
+          <a:p>
+            <a:pPr>
+              <a:defRPr sz="1800"/>
+            </a:pPr>
+            <a:r>
+              <a:t>496 patient records analyzed</a:t>
+            </a:r>
+          </a:p>
+          <a:p>
+            <a:pPr>
+              <a:defRPr sz="1800"/>
+            </a:pPr>
+            <a:r>
+              <a:t>PHQ-9: Mean=12, SD=7</a:t>
+            </a:r>
+          </a:p>
+          <a:p>
+            <a:pPr>
+              <a:defRPr sz="1800"/>
+            </a:pPr>
+            <a:r>
+              <a:t>GAD-7: Mean=10, SD=6</a:t>
+            </a:r>
+          </a:p>
+          <a:p>
+            <a:pPr>
+              <a:defRPr sz="1800"/>
+            </a:pPr>
+            <a:r>
+              <a:t>14 features engineered</a:t>
             </a:r>
           </a:p>
         </p:txBody>
@@ -3287,7 +6670,7 @@
 </file>
 
 <file path=ppt/slides/slide4.xml><?xml version="1.0" encoding="utf-8"?>
-<p:sld xmlns:a="http://schemas.openxmlformats.org/drawingml/2006/main" xmlns:p="http://schemas.openxmlformats.org/presentationml/2006/main" xmlns:r="http://schemas.openxmlformats.org/officeDocument/2006/relationships">
+<p:sld xmlns:a="http://schemas.openxmlformats.org/drawingml/2006/main" xmlns:r="http://schemas.openxmlformats.org/officeDocument/2006/relationships" xmlns:p="http://schemas.openxmlformats.org/presentationml/2006/main">
   <p:cSld>
     <p:spTree>
       <p:nvGrpSpPr>
@@ -3295,7 +6678,95 @@
         <p:cNvGrpSpPr/>
         <p:nvPr/>
       </p:nvGrpSpPr>
-      <p:grpSpPr/>
+      <p:grpSpPr>
+        <a:xfrm>
+          <a:off x="0" y="0"/>
+          <a:ext cx="0" cy="0"/>
+          <a:chOff x="0" y="0"/>
+          <a:chExt cx="0" cy="0"/>
+        </a:xfrm>
+      </p:grpSpPr>
+      <p:sp>
+        <p:nvSpPr>
+          <p:cNvPr id="2" name="TextBox 1"/>
+          <p:cNvSpPr txBox="1"/>
+          <p:nvPr/>
+        </p:nvSpPr>
+        <p:spPr>
+          <a:xfrm>
+            <a:off x="609600" y="562186"/>
+            <a:ext cx="10972800" cy="731520"/>
+          </a:xfrm>
+          <a:prstGeom prst="rect">
+            <a:avLst/>
+          </a:prstGeom>
+          <a:noFill/>
+        </p:spPr>
+        <p:txBody>
+          <a:bodyPr wrap="none">
+            <a:spAutoFit/>
+          </a:bodyPr>
+          <a:lstStyle/>
+          <a:p>
+            <a:pPr>
+              <a:defRPr sz="3200" b="1"/>
+            </a:pPr>
+            <a:r>
+              <a:rPr dirty="0"/>
+              <a:t>Week 1: Feature Analysis</a:t>
+            </a:r>
+          </a:p>
+        </p:txBody>
+      </p:sp>
+      <p:pic>
+        <p:nvPicPr>
+          <p:cNvPr id="3" name="Picture 2" descr="feature_target_bars.png"/>
+          <p:cNvPicPr>
+            <a:picLocks noChangeAspect="1"/>
+          </p:cNvPicPr>
+          <p:nvPr/>
+        </p:nvPicPr>
+        <p:blipFill>
+          <a:blip r:embed="rId2"/>
+          <a:stretch>
+            <a:fillRect/>
+          </a:stretch>
+        </p:blipFill>
+        <p:spPr>
+          <a:xfrm>
+            <a:off x="1134532" y="1193800"/>
+            <a:ext cx="9838267" cy="4944533"/>
+          </a:xfrm>
+          <a:prstGeom prst="rect">
+            <a:avLst/>
+          </a:prstGeom>
+        </p:spPr>
+      </p:pic>
+    </p:spTree>
+  </p:cSld>
+  <p:clrMapOvr>
+    <a:masterClrMapping/>
+  </p:clrMapOvr>
+</p:sld>
+</file>
+
+<file path=ppt/slides/slide5.xml><?xml version="1.0" encoding="utf-8"?>
+<p:sld xmlns:a="http://schemas.openxmlformats.org/drawingml/2006/main" xmlns:r="http://schemas.openxmlformats.org/officeDocument/2006/relationships" xmlns:p="http://schemas.openxmlformats.org/presentationml/2006/main">
+  <p:cSld>
+    <p:spTree>
+      <p:nvGrpSpPr>
+        <p:cNvPr id="1" name=""/>
+        <p:cNvGrpSpPr/>
+        <p:nvPr/>
+      </p:nvGrpSpPr>
+      <p:grpSpPr>
+        <a:xfrm>
+          <a:off x="0" y="0"/>
+          <a:ext cx="0" cy="0"/>
+          <a:chOff x="0" y="0"/>
+          <a:chExt cx="0" cy="0"/>
+        </a:xfrm>
+      </p:grpSpPr>
       <p:sp>
         <p:nvSpPr>
           <p:cNvPr id="2" name="Title 1"/>
@@ -3303,7 +6774,7 @@
             <a:spLocks noGrp="1"/>
           </p:cNvSpPr>
           <p:nvPr>
-            <p:ph type="ctrTitle"/>
+            <p:ph type="title"/>
           </p:nvPr>
         </p:nvSpPr>
         <p:spPr/>
@@ -3312,19 +6783,19 @@
           <a:lstStyle/>
           <a:p>
             <a:r>
-              <a:t>Thank You!</a:t>
-            </a:r>
-          </a:p>
-        </p:txBody>
-      </p:sp>
-      <p:sp>
-        <p:nvSpPr>
-          <p:cNvPr id="3" name="Subtitle 2"/>
-          <p:cNvSpPr>
-            <a:spLocks noGrp="1"/>
-          </p:cNvSpPr>
-          <p:nvPr>
-            <p:ph type="subTitle" idx="1"/>
+              <a:t>Week 2: Baseline Models</a:t>
+            </a:r>
+          </a:p>
+        </p:txBody>
+      </p:sp>
+      <p:sp>
+        <p:nvSpPr>
+          <p:cNvPr id="3" name="Content Placeholder 2"/>
+          <p:cNvSpPr>
+            <a:spLocks noGrp="1"/>
+          </p:cNvSpPr>
+          <p:nvPr>
+            <p:ph idx="1"/>
           </p:nvPr>
         </p:nvSpPr>
         <p:spPr/>
@@ -3332,22 +6803,384 @@
           <a:bodyPr/>
           <a:lstStyle/>
           <a:p>
-            <a:r>
-              <a:t>Dinisha Jain</a:t>
-            </a:r>
-          </a:p>
-          <a:p>
-            <a:r>
-              <a:t>Mohit</a:t>
-            </a:r>
-          </a:p>
-          <a:p>
-            <a:r>
-              <a:t>May 2026</a:t>
-            </a:r>
-          </a:p>
-        </p:txBody>
-      </p:sp>
+            <a:pPr>
+              <a:defRPr sz="1800"/>
+            </a:pPr>
+            <a:r>
+              <a:t>AIML-2: Model Development</a:t>
+            </a:r>
+          </a:p>
+          <a:p>
+            <a:pPr>
+              <a:defRPr sz="1800"/>
+            </a:pPr>
+            <a:r>
+              <a:t>Logistic Regression: F1=0.72, AUC=0.78</a:t>
+            </a:r>
+          </a:p>
+          <a:p>
+            <a:pPr>
+              <a:defRPr sz="1800"/>
+            </a:pPr>
+            <a:r>
+              <a:t>Random Forest: F1=0.75, AUC=0.80</a:t>
+            </a:r>
+          </a:p>
+          <a:p>
+            <a:pPr>
+              <a:defRPr sz="1800"/>
+            </a:pPr>
+            <a:r>
+              <a:t>XGBoost: F1=0.78, AUC=0.82</a:t>
+            </a:r>
+          </a:p>
+        </p:txBody>
+      </p:sp>
+    </p:spTree>
+  </p:cSld>
+  <p:clrMapOvr>
+    <a:masterClrMapping/>
+  </p:clrMapOvr>
+</p:sld>
+</file>
+
+<file path=ppt/slides/slide6.xml><?xml version="1.0" encoding="utf-8"?>
+<p:sld xmlns:a="http://schemas.openxmlformats.org/drawingml/2006/main" xmlns:r="http://schemas.openxmlformats.org/officeDocument/2006/relationships" xmlns:p="http://schemas.openxmlformats.org/presentationml/2006/main">
+  <p:cSld>
+    <p:spTree>
+      <p:nvGrpSpPr>
+        <p:cNvPr id="1" name=""/>
+        <p:cNvGrpSpPr/>
+        <p:nvPr/>
+      </p:nvGrpSpPr>
+      <p:grpSpPr>
+        <a:xfrm>
+          <a:off x="0" y="0"/>
+          <a:ext cx="0" cy="0"/>
+          <a:chOff x="0" y="0"/>
+          <a:chExt cx="0" cy="0"/>
+        </a:xfrm>
+      </p:grpSpPr>
+      <p:sp>
+        <p:nvSpPr>
+          <p:cNvPr id="2" name="TextBox 1"/>
+          <p:cNvSpPr txBox="1"/>
+          <p:nvPr/>
+        </p:nvSpPr>
+        <p:spPr>
+          <a:xfrm>
+            <a:off x="728133" y="497841"/>
+            <a:ext cx="10972800" cy="731520"/>
+          </a:xfrm>
+          <a:prstGeom prst="rect">
+            <a:avLst/>
+          </a:prstGeom>
+          <a:noFill/>
+        </p:spPr>
+        <p:txBody>
+          <a:bodyPr wrap="none">
+            <a:spAutoFit/>
+          </a:bodyPr>
+          <a:lstStyle/>
+          <a:p>
+            <a:pPr>
+              <a:defRPr sz="3200" b="1"/>
+            </a:pPr>
+            <a:r>
+              <a:rPr dirty="0"/>
+              <a:t>Week 2: ROC Curve</a:t>
+            </a:r>
+          </a:p>
+        </p:txBody>
+      </p:sp>
+      <p:pic>
+        <p:nvPicPr>
+          <p:cNvPr id="3" name="Picture 2" descr="xgboost_roc_curve.png"/>
+          <p:cNvPicPr>
+            <a:picLocks noChangeAspect="1"/>
+          </p:cNvPicPr>
+          <p:nvPr/>
+        </p:nvPicPr>
+        <p:blipFill>
+          <a:blip r:embed="rId2"/>
+          <a:stretch>
+            <a:fillRect/>
+          </a:stretch>
+        </p:blipFill>
+        <p:spPr>
+          <a:xfrm>
+            <a:off x="1371601" y="1031240"/>
+            <a:ext cx="9872132" cy="5149428"/>
+          </a:xfrm>
+          <a:prstGeom prst="rect">
+            <a:avLst/>
+          </a:prstGeom>
+        </p:spPr>
+      </p:pic>
+    </p:spTree>
+  </p:cSld>
+  <p:clrMapOvr>
+    <a:masterClrMapping/>
+  </p:clrMapOvr>
+</p:sld>
+</file>
+
+<file path=ppt/slides/slide7.xml><?xml version="1.0" encoding="utf-8"?>
+<p:sld xmlns:a="http://schemas.openxmlformats.org/drawingml/2006/main" xmlns:r="http://schemas.openxmlformats.org/officeDocument/2006/relationships" xmlns:p="http://schemas.openxmlformats.org/presentationml/2006/main">
+  <p:cSld>
+    <p:spTree>
+      <p:nvGrpSpPr>
+        <p:cNvPr id="1" name=""/>
+        <p:cNvGrpSpPr/>
+        <p:nvPr/>
+      </p:nvGrpSpPr>
+      <p:grpSpPr>
+        <a:xfrm>
+          <a:off x="0" y="0"/>
+          <a:ext cx="0" cy="0"/>
+          <a:chOff x="0" y="0"/>
+          <a:chExt cx="0" cy="0"/>
+        </a:xfrm>
+      </p:grpSpPr>
+      <p:sp>
+        <p:nvSpPr>
+          <p:cNvPr id="2" name="Title 1"/>
+          <p:cNvSpPr>
+            <a:spLocks noGrp="1"/>
+          </p:cNvSpPr>
+          <p:nvPr>
+            <p:ph type="title"/>
+          </p:nvPr>
+        </p:nvSpPr>
+        <p:spPr/>
+        <p:txBody>
+          <a:bodyPr/>
+          <a:lstStyle/>
+          <a:p>
+            <a:r>
+              <a:t>Week 3: Ensemble + Tuning</a:t>
+            </a:r>
+          </a:p>
+        </p:txBody>
+      </p:sp>
+      <p:sp>
+        <p:nvSpPr>
+          <p:cNvPr id="3" name="Content Placeholder 2"/>
+          <p:cNvSpPr>
+            <a:spLocks noGrp="1"/>
+          </p:cNvSpPr>
+          <p:nvPr>
+            <p:ph idx="1"/>
+          </p:nvPr>
+        </p:nvSpPr>
+        <p:spPr/>
+        <p:txBody>
+          <a:bodyPr/>
+          <a:lstStyle/>
+          <a:p>
+            <a:pPr>
+              <a:defRPr sz="1800"/>
+            </a:pPr>
+            <a:r>
+              <a:t>AIML-2: Ensemble Model</a:t>
+            </a:r>
+          </a:p>
+          <a:p>
+            <a:pPr>
+              <a:defRPr sz="1800"/>
+            </a:pPr>
+            <a:r>
+              <a:t>Voting Ensemble: XGBoost + RF + LogReg</a:t>
+            </a:r>
+          </a:p>
+          <a:p>
+            <a:pPr>
+              <a:defRPr sz="1800"/>
+            </a:pPr>
+            <a:r>
+              <a:t>20 Optuna trials</a:t>
+            </a:r>
+          </a:p>
+          <a:p>
+            <a:pPr>
+              <a:defRPr sz="1800"/>
+            </a:pPr>
+            <a:r>
+              <a:t>Training F1=1.00, AUC=1.00</a:t>
+            </a:r>
+          </a:p>
+          <a:p>
+            <a:pPr>
+              <a:defRPr sz="1800"/>
+            </a:pPr>
+            <a:r>
+              <a:t>Saved: ensemble_v3.pkl</a:t>
+            </a:r>
+          </a:p>
+        </p:txBody>
+      </p:sp>
+    </p:spTree>
+  </p:cSld>
+  <p:clrMapOvr>
+    <a:masterClrMapping/>
+  </p:clrMapOvr>
+</p:sld>
+</file>
+
+<file path=ppt/slides/slide8.xml><?xml version="1.0" encoding="utf-8"?>
+<p:sld xmlns:a="http://schemas.openxmlformats.org/drawingml/2006/main" xmlns:r="http://schemas.openxmlformats.org/officeDocument/2006/relationships" xmlns:p="http://schemas.openxmlformats.org/presentationml/2006/main">
+  <p:cSld>
+    <p:spTree>
+      <p:nvGrpSpPr>
+        <p:cNvPr id="1" name=""/>
+        <p:cNvGrpSpPr/>
+        <p:nvPr/>
+      </p:nvGrpSpPr>
+      <p:grpSpPr>
+        <a:xfrm>
+          <a:off x="0" y="0"/>
+          <a:ext cx="0" cy="0"/>
+          <a:chOff x="0" y="0"/>
+          <a:chExt cx="0" cy="0"/>
+        </a:xfrm>
+      </p:grpSpPr>
+      <p:sp>
+        <p:nvSpPr>
+          <p:cNvPr id="2" name="TextBox 1"/>
+          <p:cNvSpPr txBox="1"/>
+          <p:nvPr/>
+        </p:nvSpPr>
+        <p:spPr>
+          <a:xfrm>
+            <a:off x="778934" y="592667"/>
+            <a:ext cx="10972800" cy="731520"/>
+          </a:xfrm>
+          <a:prstGeom prst="rect">
+            <a:avLst/>
+          </a:prstGeom>
+          <a:noFill/>
+        </p:spPr>
+        <p:txBody>
+          <a:bodyPr wrap="none">
+            <a:spAutoFit/>
+          </a:bodyPr>
+          <a:lstStyle/>
+          <a:p>
+            <a:pPr>
+              <a:defRPr sz="3200" b="1"/>
+            </a:pPr>
+            <a:r>
+              <a:rPr dirty="0"/>
+              <a:t>Week 3: Ensemble Comparison</a:t>
+            </a:r>
+          </a:p>
+        </p:txBody>
+      </p:sp>
+      <p:pic>
+        <p:nvPicPr>
+          <p:cNvPr id="3" name="Picture 2" descr="ensemble_comparison.png"/>
+          <p:cNvPicPr>
+            <a:picLocks noChangeAspect="1"/>
+          </p:cNvPicPr>
+          <p:nvPr/>
+        </p:nvPicPr>
+        <p:blipFill>
+          <a:blip r:embed="rId2"/>
+          <a:stretch>
+            <a:fillRect/>
+          </a:stretch>
+        </p:blipFill>
+        <p:spPr>
+          <a:xfrm>
+            <a:off x="1075267" y="1202267"/>
+            <a:ext cx="9906000" cy="4961466"/>
+          </a:xfrm>
+          <a:prstGeom prst="rect">
+            <a:avLst/>
+          </a:prstGeom>
+        </p:spPr>
+      </p:pic>
+    </p:spTree>
+  </p:cSld>
+  <p:clrMapOvr>
+    <a:masterClrMapping/>
+  </p:clrMapOvr>
+</p:sld>
+</file>
+
+<file path=ppt/slides/slide9.xml><?xml version="1.0" encoding="utf-8"?>
+<p:sld xmlns:a="http://schemas.openxmlformats.org/drawingml/2006/main" xmlns:r="http://schemas.openxmlformats.org/officeDocument/2006/relationships" xmlns:p="http://schemas.openxmlformats.org/presentationml/2006/main">
+  <p:cSld>
+    <p:spTree>
+      <p:nvGrpSpPr>
+        <p:cNvPr id="1" name=""/>
+        <p:cNvGrpSpPr/>
+        <p:nvPr/>
+      </p:nvGrpSpPr>
+      <p:grpSpPr>
+        <a:xfrm>
+          <a:off x="0" y="0"/>
+          <a:ext cx="0" cy="0"/>
+          <a:chOff x="0" y="0"/>
+          <a:chExt cx="0" cy="0"/>
+        </a:xfrm>
+      </p:grpSpPr>
+      <p:sp>
+        <p:nvSpPr>
+          <p:cNvPr id="2" name="TextBox 1"/>
+          <p:cNvSpPr txBox="1"/>
+          <p:nvPr/>
+        </p:nvSpPr>
+        <p:spPr>
+          <a:xfrm>
+            <a:off x="609600" y="640080"/>
+            <a:ext cx="10972800" cy="731520"/>
+          </a:xfrm>
+          <a:prstGeom prst="rect">
+            <a:avLst/>
+          </a:prstGeom>
+          <a:noFill/>
+        </p:spPr>
+        <p:txBody>
+          <a:bodyPr wrap="none">
+            <a:spAutoFit/>
+          </a:bodyPr>
+          <a:lstStyle/>
+          <a:p>
+            <a:pPr>
+              <a:defRPr sz="3200" b="1"/>
+            </a:pPr>
+            <a:r>
+              <a:rPr dirty="0"/>
+              <a:t>Week 3: SHAP Analysis</a:t>
+            </a:r>
+          </a:p>
+        </p:txBody>
+      </p:sp>
+      <p:pic>
+        <p:nvPicPr>
+          <p:cNvPr id="3" name="Picture 2" descr="shap_bar.png"/>
+          <p:cNvPicPr>
+            <a:picLocks noChangeAspect="1"/>
+          </p:cNvPicPr>
+          <p:nvPr/>
+        </p:nvPicPr>
+        <p:blipFill>
+          <a:blip r:embed="rId2"/>
+          <a:stretch>
+            <a:fillRect/>
+          </a:stretch>
+        </p:blipFill>
+        <p:spPr>
+          <a:xfrm>
+            <a:off x="1828800" y="1219200"/>
+            <a:ext cx="8229600" cy="4937760"/>
+          </a:xfrm>
+          <a:prstGeom prst="rect">
+            <a:avLst/>
+          </a:prstGeom>
+        </p:spPr>
+      </p:pic>
     </p:spTree>
   </p:cSld>
   <p:clrMapOvr>
@@ -3357,9 +7190,9 @@
 </file>
 
 <file path=ppt/theme/theme1.xml><?xml version="1.0" encoding="utf-8"?>
-<a:theme xmlns:a="http://schemas.openxmlformats.org/drawingml/2006/main" name="Office Theme">
+<a:theme xmlns:a="http://schemas.openxmlformats.org/drawingml/2006/main" name="Organic">
   <a:themeElements>
-    <a:clrScheme name="Office">
+    <a:clrScheme name="Organic">
       <a:dk1>
         <a:sysClr val="windowText" lastClr="000000"/>
       </a:dk1>
@@ -3367,44 +7200,79 @@
         <a:sysClr val="window" lastClr="FFFFFF"/>
       </a:lt1>
       <a:dk2>
-        <a:srgbClr val="1F497D"/>
+        <a:srgbClr val="212121"/>
       </a:dk2>
       <a:lt2>
-        <a:srgbClr val="EEECE1"/>
+        <a:srgbClr val="DADADA"/>
       </a:lt2>
       <a:accent1>
-        <a:srgbClr val="4F81BD"/>
+        <a:srgbClr val="83992A"/>
       </a:accent1>
       <a:accent2>
-        <a:srgbClr val="C0504D"/>
+        <a:srgbClr val="3C9770"/>
       </a:accent2>
       <a:accent3>
-        <a:srgbClr val="9BBB59"/>
+        <a:srgbClr val="44709D"/>
       </a:accent3>
       <a:accent4>
-        <a:srgbClr val="8064A2"/>
+        <a:srgbClr val="A23C33"/>
       </a:accent4>
       <a:accent5>
-        <a:srgbClr val="4BACC6"/>
+        <a:srgbClr val="D97828"/>
       </a:accent5>
       <a:accent6>
-        <a:srgbClr val="F79646"/>
+        <a:srgbClr val="DEB340"/>
       </a:accent6>
       <a:hlink>
-        <a:srgbClr val="0000FF"/>
+        <a:srgbClr val="A8BF4D"/>
       </a:hlink>
       <a:folHlink>
-        <a:srgbClr val="800080"/>
+        <a:srgbClr val="B4CA80"/>
       </a:folHlink>
     </a:clrScheme>
-    <a:fontScheme name="Office">
+    <a:fontScheme name="Organic">
       <a:majorFont>
-        <a:latin typeface="Calibri"/>
+        <a:latin typeface="Garamond" panose="02020404030301010803"/>
         <a:ea typeface=""/>
         <a:cs typeface=""/>
         <a:font script="Jpan" typeface="ＭＳ Ｐゴシック"/>
-        <a:font script="Hang" typeface="맑은 고딕"/>
-        <a:font script="Hans" typeface="宋体"/>
+        <a:font script="Hang" typeface="돋움"/>
+        <a:font script="Hans" typeface="方正舒体"/>
+        <a:font script="Hant" typeface="微軟正黑體"/>
+        <a:font script="Arab" typeface="Arial"/>
+        <a:font script="Hebr" typeface="Arial"/>
+        <a:font script="Thai" typeface="Cordia New"/>
+        <a:font script="Ethi" typeface="Nyala"/>
+        <a:font script="Beng" typeface="Vrinda"/>
+        <a:font script="Gujr" typeface="Shruti"/>
+        <a:font script="Khmr" typeface="DaunPenh"/>
+        <a:font script="Knda" typeface="Tunga"/>
+        <a:font script="Guru" typeface="Raavi"/>
+        <a:font script="Cans" typeface="Euphemia"/>
+        <a:font script="Cher" typeface="Plantagenet Cherokee"/>
+        <a:font script="Yiii" typeface="Microsoft Yi Baiti"/>
+        <a:font script="Tibt" typeface="Microsoft Himalaya"/>
+        <a:font script="Thaa" typeface="MV Boli"/>
+        <a:font script="Deva" typeface="Mangal"/>
+        <a:font script="Telu" typeface="Gautami"/>
+        <a:font script="Taml" typeface="Latha"/>
+        <a:font script="Syrc" typeface="Estrangelo Edessa"/>
+        <a:font script="Orya" typeface="Kalinga"/>
+        <a:font script="Mlym" typeface="Kartika"/>
+        <a:font script="Laoo" typeface="DokChampa"/>
+        <a:font script="Sinh" typeface="Iskoola Pota"/>
+        <a:font script="Mong" typeface="Mongolian Baiti"/>
+        <a:font script="Viet" typeface="Arial"/>
+        <a:font script="Uigh" typeface="Microsoft Uighur"/>
+        <a:font script="Geor" typeface="Sylfaen"/>
+      </a:majorFont>
+      <a:minorFont>
+        <a:latin typeface="Garamond" panose="02020404030301010803"/>
+        <a:ea typeface=""/>
+        <a:cs typeface=""/>
+        <a:font script="Jpan" typeface="ＭＳ Ｐ明朝"/>
+        <a:font script="Hang" typeface="바탕"/>
+        <a:font script="Hans" typeface="方正舒体"/>
         <a:font script="Hant" typeface="新細明體"/>
         <a:font script="Arab" typeface="Times New Roman"/>
         <a:font script="Hebr" typeface="Times New Roman"/>
@@ -3432,44 +7300,9 @@
         <a:font script="Viet" typeface="Times New Roman"/>
         <a:font script="Uigh" typeface="Microsoft Uighur"/>
         <a:font script="Geor" typeface="Sylfaen"/>
-      </a:majorFont>
-      <a:minorFont>
-        <a:latin typeface="Calibri"/>
-        <a:ea typeface=""/>
-        <a:cs typeface=""/>
-        <a:font script="Jpan" typeface="ＭＳ Ｐゴシック"/>
-        <a:font script="Hang" typeface="맑은 고딕"/>
-        <a:font script="Hans" typeface="宋体"/>
-        <a:font script="Hant" typeface="新細明體"/>
-        <a:font script="Arab" typeface="Arial"/>
-        <a:font script="Hebr" typeface="Arial"/>
-        <a:font script="Thai" typeface="Cordia New"/>
-        <a:font script="Ethi" typeface="Nyala"/>
-        <a:font script="Beng" typeface="Vrinda"/>
-        <a:font script="Gujr" typeface="Shruti"/>
-        <a:font script="Khmr" typeface="DaunPenh"/>
-        <a:font script="Knda" typeface="Tunga"/>
-        <a:font script="Guru" typeface="Raavi"/>
-        <a:font script="Cans" typeface="Euphemia"/>
-        <a:font script="Cher" typeface="Plantagenet Cherokee"/>
-        <a:font script="Yiii" typeface="Microsoft Yi Baiti"/>
-        <a:font script="Tibt" typeface="Microsoft Himalaya"/>
-        <a:font script="Thaa" typeface="MV Boli"/>
-        <a:font script="Deva" typeface="Mangal"/>
-        <a:font script="Telu" typeface="Gautami"/>
-        <a:font script="Taml" typeface="Latha"/>
-        <a:font script="Syrc" typeface="Estrangelo Edessa"/>
-        <a:font script="Orya" typeface="Kalinga"/>
-        <a:font script="Mlym" typeface="Kartika"/>
-        <a:font script="Laoo" typeface="DokChampa"/>
-        <a:font script="Sinh" typeface="Iskoola Pota"/>
-        <a:font script="Mong" typeface="Mongolian Baiti"/>
-        <a:font script="Viet" typeface="Arial"/>
-        <a:font script="Uigh" typeface="Microsoft Uighur"/>
-        <a:font script="Geor" typeface="Sylfaen"/>
       </a:minorFont>
     </a:fontScheme>
-    <a:fmtScheme name="Office">
+    <a:fmtScheme name="Organic">
       <a:fillStyleLst>
         <a:solidFill>
           <a:schemeClr val="phClr"/>
@@ -3478,52 +7311,46 @@
           <a:gsLst>
             <a:gs pos="0">
               <a:schemeClr val="phClr">
-                <a:tint val="50000"/>
-                <a:satMod val="300000"/>
-              </a:schemeClr>
-            </a:gs>
-            <a:gs pos="35000">
-              <a:schemeClr val="phClr">
-                <a:tint val="37000"/>
-                <a:satMod val="300000"/>
+                <a:tint val="60000"/>
+                <a:lumMod val="110000"/>
               </a:schemeClr>
             </a:gs>
             <a:gs pos="100000">
               <a:schemeClr val="phClr">
-                <a:tint val="15000"/>
-                <a:satMod val="350000"/>
+                <a:tint val="82000"/>
               </a:schemeClr>
             </a:gs>
           </a:gsLst>
-          <a:lin ang="16200000" scaled="1"/>
+          <a:lin ang="5400000" scaled="0"/>
         </a:gradFill>
-        <a:gradFill rotWithShape="1">
-          <a:gsLst>
-            <a:gs pos="0">
+        <a:blipFill>
+          <a:blip xmlns:r="http://schemas.openxmlformats.org/officeDocument/2006/relationships" r:embed="rId1">
+            <a:duotone>
               <a:schemeClr val="phClr">
-                <a:tint val="100000"/>
-                <a:shade val="100000"/>
+                <a:shade val="74000"/>
                 <a:satMod val="130000"/>
+                <a:lumMod val="90000"/>
               </a:schemeClr>
-            </a:gs>
-            <a:gs pos="100000">
               <a:schemeClr val="phClr">
-                <a:tint val="50000"/>
-                <a:shade val="100000"/>
-                <a:satMod val="350000"/>
+                <a:tint val="94000"/>
+                <a:satMod val="120000"/>
+                <a:lumMod val="104000"/>
               </a:schemeClr>
-            </a:gs>
-          </a:gsLst>
-          <a:lin ang="16200000" scaled="0"/>
-        </a:gradFill>
+            </a:duotone>
+          </a:blip>
+          <a:tile tx="0" ty="0" sx="100000" sy="100000" flip="none" algn="tl"/>
+        </a:blipFill>
       </a:fillStyleLst>
       <a:lnStyleLst>
         <a:ln w="9525" cap="flat" cmpd="sng" algn="ctr">
           <a:solidFill>
-            <a:schemeClr val="phClr">
-              <a:shade val="95000"/>
-              <a:satMod val="105000"/>
-            </a:schemeClr>
+            <a:schemeClr val="phClr"/>
+          </a:solidFill>
+          <a:prstDash val="solid"/>
+        </a:ln>
+        <a:ln w="15875" cap="flat" cmpd="sng" algn="ctr">
+          <a:solidFill>
+            <a:schemeClr val="phClr"/>
           </a:solidFill>
           <a:prstDash val="solid"/>
         </a:ln>
@@ -3533,51 +7360,28 @@
           </a:solidFill>
           <a:prstDash val="solid"/>
         </a:ln>
-        <a:ln w="38100" cap="flat" cmpd="sng" algn="ctr">
-          <a:solidFill>
-            <a:schemeClr val="phClr"/>
-          </a:solidFill>
-          <a:prstDash val="solid"/>
-        </a:ln>
       </a:lnStyleLst>
       <a:effectStyleLst>
         <a:effectStyle>
+          <a:effectLst/>
+        </a:effectStyle>
+        <a:effectStyle>
           <a:effectLst>
-            <a:outerShdw blurRad="40000" dist="20000" dir="5400000" rotWithShape="0">
+            <a:innerShdw blurRad="25400" dist="12700" dir="13500000">
               <a:srgbClr val="000000">
-                <a:alpha val="38000"/>
+                <a:alpha val="45000"/>
               </a:srgbClr>
-            </a:outerShdw>
+            </a:innerShdw>
           </a:effectLst>
         </a:effectStyle>
         <a:effectStyle>
           <a:effectLst>
-            <a:outerShdw blurRad="40000" dist="23000" dir="5400000" rotWithShape="0">
+            <a:outerShdw blurRad="38100" dist="25400" dir="5400000" rotWithShape="0">
               <a:srgbClr val="000000">
-                <a:alpha val="35000"/>
+                <a:alpha val="60000"/>
               </a:srgbClr>
             </a:outerShdw>
           </a:effectLst>
-        </a:effectStyle>
-        <a:effectStyle>
-          <a:effectLst>
-            <a:outerShdw blurRad="40000" dist="23000" dir="5400000" rotWithShape="0">
-              <a:srgbClr val="000000">
-                <a:alpha val="35000"/>
-              </a:srgbClr>
-            </a:outerShdw>
-          </a:effectLst>
-          <a:scene3d>
-            <a:camera prst="orthographicFront">
-              <a:rot lat="0" lon="0" rev="0"/>
-            </a:camera>
-            <a:lightRig rig="threePt" dir="t">
-              <a:rot lat="0" lon="0" rev="1200000"/>
-            </a:lightRig>
-          </a:scene3d>
-          <a:sp3d>
-            <a:bevelT w="63500" h="25400"/>
-          </a:sp3d>
         </a:effectStyle>
       </a:effectStyleLst>
       <a:bgFillStyleLst>
@@ -3588,90 +7392,32 @@
           <a:gsLst>
             <a:gs pos="0">
               <a:schemeClr val="phClr">
-                <a:tint val="40000"/>
-                <a:satMod val="350000"/>
-              </a:schemeClr>
-            </a:gs>
-            <a:gs pos="40000">
-              <a:schemeClr val="phClr">
-                <a:tint val="45000"/>
-                <a:shade val="99000"/>
-                <a:satMod val="350000"/>
+                <a:tint val="90000"/>
+                <a:lumMod val="110000"/>
               </a:schemeClr>
             </a:gs>
             <a:gs pos="100000">
               <a:schemeClr val="phClr">
-                <a:shade val="20000"/>
-                <a:satMod val="255000"/>
+                <a:shade val="88000"/>
+                <a:lumMod val="98000"/>
               </a:schemeClr>
             </a:gs>
           </a:gsLst>
-          <a:path path="circle">
-            <a:fillToRect l="50000" t="-80000" r="50000" b="180000"/>
-          </a:path>
+          <a:lin ang="5400000" scaled="0"/>
         </a:gradFill>
-        <a:gradFill rotWithShape="1">
-          <a:gsLst>
-            <a:gs pos="0">
-              <a:schemeClr val="phClr">
-                <a:tint val="80000"/>
-                <a:satMod val="300000"/>
-              </a:schemeClr>
-            </a:gs>
-            <a:gs pos="100000">
-              <a:schemeClr val="phClr">
-                <a:shade val="30000"/>
-                <a:satMod val="200000"/>
-              </a:schemeClr>
-            </a:gs>
-          </a:gsLst>
-          <a:path path="circle">
-            <a:fillToRect l="50000" t="50000" r="50000" b="50000"/>
-          </a:path>
-        </a:gradFill>
+        <a:blipFill>
+          <a:blip xmlns:r="http://schemas.openxmlformats.org/officeDocument/2006/relationships" r:embed="rId2"/>
+          <a:stretch/>
+        </a:blipFill>
       </a:bgFillStyleLst>
     </a:fmtScheme>
   </a:themeElements>
-  <a:objectDefaults>
-    <a:spDef>
-      <a:spPr/>
-      <a:bodyPr/>
-      <a:lstStyle/>
-      <a:style>
-        <a:lnRef idx="1">
-          <a:schemeClr val="accent1"/>
-        </a:lnRef>
-        <a:fillRef idx="3">
-          <a:schemeClr val="accent1"/>
-        </a:fillRef>
-        <a:effectRef idx="2">
-          <a:schemeClr val="accent1"/>
-        </a:effectRef>
-        <a:fontRef idx="minor">
-          <a:schemeClr val="lt1"/>
-        </a:fontRef>
-      </a:style>
-    </a:spDef>
-    <a:lnDef>
-      <a:spPr/>
-      <a:bodyPr/>
-      <a:lstStyle/>
-      <a:style>
-        <a:lnRef idx="2">
-          <a:schemeClr val="accent1"/>
-        </a:lnRef>
-        <a:fillRef idx="0">
-          <a:schemeClr val="accent1"/>
-        </a:fillRef>
-        <a:effectRef idx="1">
-          <a:schemeClr val="accent1"/>
-        </a:effectRef>
-        <a:fontRef idx="minor">
-          <a:schemeClr val="tx1"/>
-        </a:fontRef>
-      </a:style>
-    </a:lnDef>
-  </a:objectDefaults>
+  <a:objectDefaults/>
   <a:extraClrSchemeLst/>
+  <a:extLst>
+    <a:ext uri="{05A4C25C-085E-4340-85A3-A5531E510DB2}">
+      <thm15:themeFamily xmlns:thm15="http://schemas.microsoft.com/office/thememl/2012/main" name="Organic" id="{28CDC826-8792-45C0-861B-85EB3ADEDA33}" vid="{7DAC20F1-423D-49E2-BD0B-50532748BAD0}"/>
+    </a:ext>
+  </a:extLst>
 </a:theme>
 </file>
--- a/AI_Mental_Health_Presentation.pptx
+++ b/AI_Mental_Health_Presentation.pptx
@@ -467,7 +467,7 @@
           <a:p>
             <a:fld id="{5BCAD085-E8A6-8845-BD4E-CB4CCA059FC4}" type="datetimeFigureOut">
               <a:rPr lang="en-US" smtClean="0"/>
-              <a:t>5/25/2026</a:t>
+              <a:t>5/27/2026</a:t>
             </a:fld>
             <a:endParaRPr lang="en-US"/>
           </a:p>
@@ -791,7 +791,7 @@
           <a:p>
             <a:fld id="{5BCAD085-E8A6-8845-BD4E-CB4CCA059FC4}" type="datetimeFigureOut">
               <a:rPr lang="en-US" smtClean="0"/>
-              <a:t>5/25/2026</a:t>
+              <a:t>5/27/2026</a:t>
             </a:fld>
             <a:endParaRPr lang="en-US"/>
           </a:p>
@@ -1039,7 +1039,7 @@
           <a:p>
             <a:fld id="{5BCAD085-E8A6-8845-BD4E-CB4CCA059FC4}" type="datetimeFigureOut">
               <a:rPr lang="en-US" smtClean="0"/>
-              <a:t>5/25/2026</a:t>
+              <a:t>5/27/2026</a:t>
             </a:fld>
             <a:endParaRPr lang="en-US"/>
           </a:p>
@@ -1378,7 +1378,7 @@
           <a:p>
             <a:fld id="{5BCAD085-E8A6-8845-BD4E-CB4CCA059FC4}" type="datetimeFigureOut">
               <a:rPr lang="en-US" smtClean="0"/>
-              <a:t>5/25/2026</a:t>
+              <a:t>5/27/2026</a:t>
             </a:fld>
             <a:endParaRPr lang="en-US"/>
           </a:p>
@@ -1725,7 +1725,7 @@
           <a:p>
             <a:fld id="{5BCAD085-E8A6-8845-BD4E-CB4CCA059FC4}" type="datetimeFigureOut">
               <a:rPr lang="en-US" smtClean="0"/>
-              <a:t>5/25/2026</a:t>
+              <a:t>5/27/2026</a:t>
             </a:fld>
             <a:endParaRPr lang="en-US"/>
           </a:p>
@@ -2099,7 +2099,7 @@
           <a:p>
             <a:fld id="{5BCAD085-E8A6-8845-BD4E-CB4CCA059FC4}" type="datetimeFigureOut">
               <a:rPr lang="en-US" smtClean="0"/>
-              <a:t>5/25/2026</a:t>
+              <a:t>5/27/2026</a:t>
             </a:fld>
             <a:endParaRPr lang="en-US"/>
           </a:p>
@@ -2569,7 +2569,7 @@
           <a:p>
             <a:fld id="{5BCAD085-E8A6-8845-BD4E-CB4CCA059FC4}" type="datetimeFigureOut">
               <a:rPr lang="en-US" smtClean="0"/>
-              <a:t>5/25/2026</a:t>
+              <a:t>5/27/2026</a:t>
             </a:fld>
             <a:endParaRPr lang="en-US"/>
           </a:p>
@@ -2774,7 +2774,7 @@
           <a:p>
             <a:fld id="{5BCAD085-E8A6-8845-BD4E-CB4CCA059FC4}" type="datetimeFigureOut">
               <a:rPr lang="en-US" smtClean="0"/>
-              <a:t>5/25/2026</a:t>
+              <a:t>5/27/2026</a:t>
             </a:fld>
             <a:endParaRPr lang="en-US"/>
           </a:p>
@@ -2985,7 +2985,7 @@
           <a:p>
             <a:fld id="{5BCAD085-E8A6-8845-BD4E-CB4CCA059FC4}" type="datetimeFigureOut">
               <a:rPr lang="en-US" smtClean="0"/>
-              <a:t>5/25/2026</a:t>
+              <a:t>5/27/2026</a:t>
             </a:fld>
             <a:endParaRPr lang="en-US"/>
           </a:p>
@@ -3217,7 +3217,7 @@
           <a:p>
             <a:fld id="{5BCAD085-E8A6-8845-BD4E-CB4CCA059FC4}" type="datetimeFigureOut">
               <a:rPr lang="en-US" smtClean="0"/>
-              <a:t>5/25/2026</a:t>
+              <a:t>5/27/2026</a:t>
             </a:fld>
             <a:endParaRPr lang="en-US"/>
           </a:p>
@@ -3465,7 +3465,7 @@
           <a:p>
             <a:fld id="{5BCAD085-E8A6-8845-BD4E-CB4CCA059FC4}" type="datetimeFigureOut">
               <a:rPr lang="en-US" smtClean="0"/>
-              <a:t>5/25/2026</a:t>
+              <a:t>5/27/2026</a:t>
             </a:fld>
             <a:endParaRPr lang="en-US"/>
           </a:p>
@@ -3763,7 +3763,7 @@
           <a:p>
             <a:fld id="{5BCAD085-E8A6-8845-BD4E-CB4CCA059FC4}" type="datetimeFigureOut">
               <a:rPr lang="en-US" smtClean="0"/>
-              <a:t>5/25/2026</a:t>
+              <a:t>5/27/2026</a:t>
             </a:fld>
             <a:endParaRPr lang="en-US"/>
           </a:p>
@@ -4157,7 +4157,7 @@
           <a:p>
             <a:fld id="{5BCAD085-E8A6-8845-BD4E-CB4CCA059FC4}" type="datetimeFigureOut">
               <a:rPr lang="en-US" smtClean="0"/>
-              <a:t>5/25/2026</a:t>
+              <a:t>5/27/2026</a:t>
             </a:fld>
             <a:endParaRPr lang="en-US"/>
           </a:p>
@@ -4306,7 +4306,7 @@
           <a:p>
             <a:fld id="{5BCAD085-E8A6-8845-BD4E-CB4CCA059FC4}" type="datetimeFigureOut">
               <a:rPr lang="en-US" smtClean="0"/>
-              <a:t>5/25/2026</a:t>
+              <a:t>5/27/2026</a:t>
             </a:fld>
             <a:endParaRPr lang="en-US"/>
           </a:p>
@@ -4432,7 +4432,7 @@
           <a:p>
             <a:fld id="{5BCAD085-E8A6-8845-BD4E-CB4CCA059FC4}" type="datetimeFigureOut">
               <a:rPr lang="en-US" smtClean="0"/>
-              <a:t>5/25/2026</a:t>
+              <a:t>5/27/2026</a:t>
             </a:fld>
             <a:endParaRPr lang="en-US"/>
           </a:p>
@@ -4687,7 +4687,7 @@
           <a:p>
             <a:fld id="{5BCAD085-E8A6-8845-BD4E-CB4CCA059FC4}" type="datetimeFigureOut">
               <a:rPr lang="en-US" smtClean="0"/>
-              <a:t>5/25/2026</a:t>
+              <a:t>5/27/2026</a:t>
             </a:fld>
             <a:endParaRPr lang="en-US"/>
           </a:p>
@@ -5002,7 +5002,7 @@
           <a:p>
             <a:fld id="{5BCAD085-E8A6-8845-BD4E-CB4CCA059FC4}" type="datetimeFigureOut">
               <a:rPr lang="en-US" smtClean="0"/>
-              <a:t>5/25/2026</a:t>
+              <a:t>5/27/2026</a:t>
             </a:fld>
             <a:endParaRPr lang="en-US"/>
           </a:p>
@@ -5353,7 +5353,7 @@
           <a:p>
             <a:fld id="{5BCAD085-E8A6-8845-BD4E-CB4CCA059FC4}" type="datetimeFigureOut">
               <a:rPr lang="en-US" smtClean="0"/>
-              <a:t>5/25/2026</a:t>
+              <a:t>5/27/2026</a:t>
             </a:fld>
             <a:endParaRPr lang="en-US"/>
           </a:p>
@@ -5941,7 +5941,7 @@
         </p:spPr>
         <p:txBody>
           <a:bodyPr>
-            <a:normAutofit/>
+            <a:normAutofit lnSpcReduction="10000"/>
           </a:bodyPr>
           <a:lstStyle/>
           <a:p>
@@ -5961,6 +5961,16 @@
               </a:rPr>
               <a:t>AIML-4 Demo Walkthrough</a:t>
             </a:r>
+            <a:endParaRPr lang="en-IN" dirty="0">
+              <a:latin typeface="Times New Roman" panose="02020603050405020304" pitchFamily="18" charset="0"/>
+              <a:cs typeface="Times New Roman" panose="02020603050405020304" pitchFamily="18" charset="0"/>
+            </a:endParaRPr>
+          </a:p>
+          <a:p>
+            <a:endParaRPr dirty="0">
+              <a:latin typeface="Times New Roman" panose="02020603050405020304" pitchFamily="18" charset="0"/>
+              <a:cs typeface="Times New Roman" panose="02020603050405020304" pitchFamily="18" charset="0"/>
+            </a:endParaRPr>
           </a:p>
           <a:p>
             <a:r>
